--- a/DocumentosTFG/PresentaciónTFG.pptx
+++ b/DocumentosTFG/PresentaciónTFG.pptx
@@ -414,6 +414,27 @@
 </p188:cmLst>
 </file>
 
+<file path=ppt/comments/modernComment_10F_687EE0A8.xml><?xml version="1.0" encoding="utf-8"?>
+<p188:cmLst xmlns:a="http://schemas.openxmlformats.org/drawingml/2006/main" xmlns:r="http://schemas.openxmlformats.org/officeDocument/2006/relationships" xmlns:p188="http://schemas.microsoft.com/office/powerpoint/2018/8/main">
+  <p188:cm id="{697D629B-86C2-4A2D-B1FA-2BBEC1B35DD1}" authorId="{D46F2EB9-8792-1B5E-E482-6287A72B49A3}" created="2026-06-10T21:19:01.275">
+    <pc:sldMkLst xmlns:pc="http://schemas.microsoft.com/office/powerpoint/2013/main/command">
+      <pc:docMk/>
+      <pc:sldMk cId="1753145512" sldId="271"/>
+    </pc:sldMkLst>
+    <p188:txBody>
+      <a:bodyPr/>
+      <a:lstStyle/>
+      <a:p>
+        <a:r>
+          <a:rPr lang="es-ES"/>
+          <a:t>El usuario previamente a una votación configura su certificado para poder acceder a la votación seleccionada en la que puede participar. Después elige la candidatura a la cual quiere votar y firma y envía su voto</a:t>
+        </a:r>
+      </a:p>
+    </p188:txBody>
+  </p188:cm>
+</p188:cmLst>
+</file>
+
 <file path=ppt/comments/modernComment_110_3FD3B5C.xml><?xml version="1.0" encoding="utf-8"?>
 <p188:cmLst xmlns:a="http://schemas.openxmlformats.org/drawingml/2006/main" xmlns:r="http://schemas.openxmlformats.org/officeDocument/2006/relationships" xmlns:p188="http://schemas.microsoft.com/office/powerpoint/2018/8/main">
   <p188:cm id="{E297E20B-3E96-4486-AD97-77BF88A36A3A}" authorId="{D46F2EB9-8792-1B5E-E482-6287A72B49A3}" created="2026-06-06T18:45:45.837">
@@ -517,7 +538,7 @@
           <a:p>
             <a:fld id="{F033DA4F-E9E2-486B-9E28-2A3AE3321793}" type="datetimeFigureOut">
               <a:rPr lang="es-ES" smtClean="0"/>
-              <a:t>07/06/2026</a:t>
+              <a:t>11/06/2026</a:t>
             </a:fld>
             <a:endParaRPr lang="es-ES"/>
           </a:p>
@@ -1113,7 +1134,7 @@
           <a:p>
             <a:fld id="{0082298D-10ED-4CEA-ABC9-062C01423615}" type="datetimeFigureOut">
               <a:rPr lang="es-ES" smtClean="0"/>
-              <a:t>07/06/2026</a:t>
+              <a:t>11/06/2026</a:t>
             </a:fld>
             <a:endParaRPr lang="es-ES"/>
           </a:p>
@@ -1311,7 +1332,7 @@
           <a:p>
             <a:fld id="{0082298D-10ED-4CEA-ABC9-062C01423615}" type="datetimeFigureOut">
               <a:rPr lang="es-ES" smtClean="0"/>
-              <a:t>07/06/2026</a:t>
+              <a:t>11/06/2026</a:t>
             </a:fld>
             <a:endParaRPr lang="es-ES"/>
           </a:p>
@@ -1519,7 +1540,7 @@
           <a:p>
             <a:fld id="{0082298D-10ED-4CEA-ABC9-062C01423615}" type="datetimeFigureOut">
               <a:rPr lang="es-ES" smtClean="0"/>
-              <a:t>07/06/2026</a:t>
+              <a:t>11/06/2026</a:t>
             </a:fld>
             <a:endParaRPr lang="es-ES"/>
           </a:p>
@@ -1717,7 +1738,7 @@
           <a:p>
             <a:fld id="{0082298D-10ED-4CEA-ABC9-062C01423615}" type="datetimeFigureOut">
               <a:rPr lang="es-ES" smtClean="0"/>
-              <a:t>07/06/2026</a:t>
+              <a:t>11/06/2026</a:t>
             </a:fld>
             <a:endParaRPr lang="es-ES"/>
           </a:p>
@@ -1992,7 +2013,7 @@
           <a:p>
             <a:fld id="{0082298D-10ED-4CEA-ABC9-062C01423615}" type="datetimeFigureOut">
               <a:rPr lang="es-ES" smtClean="0"/>
-              <a:t>07/06/2026</a:t>
+              <a:t>11/06/2026</a:t>
             </a:fld>
             <a:endParaRPr lang="es-ES"/>
           </a:p>
@@ -2257,7 +2278,7 @@
           <a:p>
             <a:fld id="{0082298D-10ED-4CEA-ABC9-062C01423615}" type="datetimeFigureOut">
               <a:rPr lang="es-ES" smtClean="0"/>
-              <a:t>07/06/2026</a:t>
+              <a:t>11/06/2026</a:t>
             </a:fld>
             <a:endParaRPr lang="es-ES"/>
           </a:p>
@@ -2669,7 +2690,7 @@
           <a:p>
             <a:fld id="{0082298D-10ED-4CEA-ABC9-062C01423615}" type="datetimeFigureOut">
               <a:rPr lang="es-ES" smtClean="0"/>
-              <a:t>07/06/2026</a:t>
+              <a:t>11/06/2026</a:t>
             </a:fld>
             <a:endParaRPr lang="es-ES"/>
           </a:p>
@@ -2810,7 +2831,7 @@
           <a:p>
             <a:fld id="{0082298D-10ED-4CEA-ABC9-062C01423615}" type="datetimeFigureOut">
               <a:rPr lang="es-ES" smtClean="0"/>
-              <a:t>07/06/2026</a:t>
+              <a:t>11/06/2026</a:t>
             </a:fld>
             <a:endParaRPr lang="es-ES"/>
           </a:p>
@@ -2923,7 +2944,7 @@
           <a:p>
             <a:fld id="{0082298D-10ED-4CEA-ABC9-062C01423615}" type="datetimeFigureOut">
               <a:rPr lang="es-ES" smtClean="0"/>
-              <a:t>07/06/2026</a:t>
+              <a:t>11/06/2026</a:t>
             </a:fld>
             <a:endParaRPr lang="es-ES"/>
           </a:p>
@@ -3234,7 +3255,7 @@
           <a:p>
             <a:fld id="{0082298D-10ED-4CEA-ABC9-062C01423615}" type="datetimeFigureOut">
               <a:rPr lang="es-ES" smtClean="0"/>
-              <a:t>07/06/2026</a:t>
+              <a:t>11/06/2026</a:t>
             </a:fld>
             <a:endParaRPr lang="es-ES"/>
           </a:p>
@@ -3522,7 +3543,7 @@
           <a:p>
             <a:fld id="{0082298D-10ED-4CEA-ABC9-062C01423615}" type="datetimeFigureOut">
               <a:rPr lang="es-ES" smtClean="0"/>
-              <a:t>07/06/2026</a:t>
+              <a:t>11/06/2026</a:t>
             </a:fld>
             <a:endParaRPr lang="es-ES"/>
           </a:p>
@@ -3763,7 +3784,7 @@
           <a:p>
             <a:fld id="{0082298D-10ED-4CEA-ABC9-062C01423615}" type="datetimeFigureOut">
               <a:rPr lang="es-ES" smtClean="0"/>
-              <a:t>07/06/2026</a:t>
+              <a:t>11/06/2026</a:t>
             </a:fld>
             <a:endParaRPr lang="es-ES"/>
           </a:p>
@@ -6044,6 +6065,173 @@
           </a:p>
         </p:txBody>
       </p:sp>
+      <p:pic>
+        <p:nvPicPr>
+          <p:cNvPr id="8" name="Imagen 7">
+            <a:extLst>
+              <a:ext uri="{FF2B5EF4-FFF2-40B4-BE49-F238E27FC236}">
+                <a16:creationId xmlns:a16="http://schemas.microsoft.com/office/drawing/2014/main" id="{8C6EB7B6-EF7B-9F01-8876-C4868E874E58}"/>
+              </a:ext>
+            </a:extLst>
+          </p:cNvPr>
+          <p:cNvPicPr>
+            <a:picLocks noChangeAspect="1"/>
+          </p:cNvPicPr>
+          <p:nvPr/>
+        </p:nvPicPr>
+        <p:blipFill>
+          <a:blip r:embed="rId3"/>
+          <a:stretch>
+            <a:fillRect/>
+          </a:stretch>
+        </p:blipFill>
+        <p:spPr>
+          <a:xfrm>
+            <a:off x="465940" y="1680983"/>
+            <a:ext cx="4791274" cy="1828143"/>
+          </a:xfrm>
+          <a:prstGeom prst="rect">
+            <a:avLst/>
+          </a:prstGeom>
+        </p:spPr>
+      </p:pic>
+      <p:pic>
+        <p:nvPicPr>
+          <p:cNvPr id="10" name="Imagen 9">
+            <a:extLst>
+              <a:ext uri="{FF2B5EF4-FFF2-40B4-BE49-F238E27FC236}">
+                <a16:creationId xmlns:a16="http://schemas.microsoft.com/office/drawing/2014/main" id="{BD8CBC2F-771D-9A14-E47F-458BEB6567C3}"/>
+              </a:ext>
+            </a:extLst>
+          </p:cNvPr>
+          <p:cNvPicPr>
+            <a:picLocks noChangeAspect="1"/>
+          </p:cNvPicPr>
+          <p:nvPr/>
+        </p:nvPicPr>
+        <p:blipFill>
+          <a:blip r:embed="rId4"/>
+          <a:stretch>
+            <a:fillRect/>
+          </a:stretch>
+        </p:blipFill>
+        <p:spPr>
+          <a:xfrm>
+            <a:off x="6934788" y="1737352"/>
+            <a:ext cx="4791272" cy="2022711"/>
+          </a:xfrm>
+          <a:prstGeom prst="rect">
+            <a:avLst/>
+          </a:prstGeom>
+        </p:spPr>
+      </p:pic>
+      <p:pic>
+        <p:nvPicPr>
+          <p:cNvPr id="12" name="Imagen 11">
+            <a:extLst>
+              <a:ext uri="{FF2B5EF4-FFF2-40B4-BE49-F238E27FC236}">
+                <a16:creationId xmlns:a16="http://schemas.microsoft.com/office/drawing/2014/main" id="{0ED724EC-C954-26BF-9BF9-A28892E77637}"/>
+              </a:ext>
+            </a:extLst>
+          </p:cNvPr>
+          <p:cNvPicPr>
+            <a:picLocks noChangeAspect="1"/>
+          </p:cNvPicPr>
+          <p:nvPr/>
+        </p:nvPicPr>
+        <p:blipFill>
+          <a:blip r:embed="rId5"/>
+          <a:stretch>
+            <a:fillRect/>
+          </a:stretch>
+        </p:blipFill>
+        <p:spPr>
+          <a:xfrm>
+            <a:off x="1178789" y="3695411"/>
+            <a:ext cx="3809540" cy="2265132"/>
+          </a:xfrm>
+          <a:prstGeom prst="rect">
+            <a:avLst/>
+          </a:prstGeom>
+        </p:spPr>
+      </p:pic>
+      <p:sp>
+        <p:nvSpPr>
+          <p:cNvPr id="13" name="CuadroTexto 12">
+            <a:extLst>
+              <a:ext uri="{FF2B5EF4-FFF2-40B4-BE49-F238E27FC236}">
+                <a16:creationId xmlns:a16="http://schemas.microsoft.com/office/drawing/2014/main" id="{2D6CB3A4-C5B7-4498-5957-13643EBFDCAC}"/>
+              </a:ext>
+            </a:extLst>
+          </p:cNvPr>
+          <p:cNvSpPr txBox="1"/>
+          <p:nvPr/>
+        </p:nvSpPr>
+        <p:spPr>
+          <a:xfrm>
+            <a:off x="5861304" y="4143543"/>
+            <a:ext cx="4636008" cy="954107"/>
+          </a:xfrm>
+          <a:prstGeom prst="rect">
+            <a:avLst/>
+          </a:prstGeom>
+          <a:noFill/>
+        </p:spPr>
+        <p:txBody>
+          <a:bodyPr wrap="square" rtlCol="0">
+            <a:spAutoFit/>
+          </a:bodyPr>
+          <a:lstStyle/>
+          <a:p>
+            <a:pPr marL="285750" indent="-285750">
+              <a:buFont typeface="Arial" panose="020B0604020202020204" pitchFamily="34" charset="0"/>
+              <a:buChar char="•"/>
+            </a:pPr>
+            <a:r>
+              <a:rPr lang="es-ES" sz="1400" dirty="0">
+                <a:latin typeface="Aptos" panose="020B0004020202020204" pitchFamily="34" charset="0"/>
+              </a:rPr>
+              <a:t>Configuración de su certificado</a:t>
+            </a:r>
+          </a:p>
+          <a:p>
+            <a:pPr marL="285750" indent="-285750">
+              <a:buFont typeface="Arial" panose="020B0604020202020204" pitchFamily="34" charset="0"/>
+              <a:buChar char="•"/>
+            </a:pPr>
+            <a:r>
+              <a:rPr lang="es-ES" sz="1400" dirty="0">
+                <a:latin typeface="Aptos" panose="020B0004020202020204" pitchFamily="34" charset="0"/>
+              </a:rPr>
+              <a:t>Selección de la votación</a:t>
+            </a:r>
+          </a:p>
+          <a:p>
+            <a:pPr marL="285750" indent="-285750">
+              <a:buFont typeface="Arial" panose="020B0604020202020204" pitchFamily="34" charset="0"/>
+              <a:buChar char="•"/>
+            </a:pPr>
+            <a:r>
+              <a:rPr lang="es-ES" sz="1400" dirty="0">
+                <a:latin typeface="Aptos" panose="020B0004020202020204" pitchFamily="34" charset="0"/>
+              </a:rPr>
+              <a:t>Selección de candidatura</a:t>
+            </a:r>
+          </a:p>
+          <a:p>
+            <a:pPr marL="285750" indent="-285750">
+              <a:buFont typeface="Arial" panose="020B0604020202020204" pitchFamily="34" charset="0"/>
+              <a:buChar char="•"/>
+            </a:pPr>
+            <a:r>
+              <a:rPr lang="es-ES" sz="1400" dirty="0">
+                <a:latin typeface="Aptos" panose="020B0004020202020204" pitchFamily="34" charset="0"/>
+              </a:rPr>
+              <a:t>Emisión del voto</a:t>
+            </a:r>
+          </a:p>
+        </p:txBody>
+      </p:sp>
     </p:spTree>
     <p:extLst>
       <p:ext uri="{BB962C8B-B14F-4D97-AF65-F5344CB8AC3E}">
@@ -6054,6 +6242,11 @@
   <p:clrMapOvr>
     <a:masterClrMapping/>
   </p:clrMapOvr>
+  <p:extLst>
+    <p:ext uri="{6950BFC3-D8DA-4A85-94F7-54DA5524770B}">
+      <p188:commentRel xmlns:p188="http://schemas.microsoft.com/office/powerpoint/2018/8/main" r:id="rId2"/>
+    </p:ext>
+  </p:extLst>
 </p:sld>
 </file>
 
@@ -6279,10 +6472,10 @@
       </p:sp>
       <p:pic>
         <p:nvPicPr>
-          <p:cNvPr id="9" name="Imagen 8">
-            <a:extLst>
-              <a:ext uri="{FF2B5EF4-FFF2-40B4-BE49-F238E27FC236}">
-                <a16:creationId xmlns:a16="http://schemas.microsoft.com/office/drawing/2014/main" id="{44050D42-AAB6-AFC0-8C0B-711A471E9362}"/>
+          <p:cNvPr id="13" name="Imagen 12">
+            <a:extLst>
+              <a:ext uri="{FF2B5EF4-FFF2-40B4-BE49-F238E27FC236}">
+                <a16:creationId xmlns:a16="http://schemas.microsoft.com/office/drawing/2014/main" id="{872ECD64-85CE-43B7-8CA7-30BD5FA830F0}"/>
               </a:ext>
             </a:extLst>
           </p:cNvPr>
@@ -6299,8 +6492,8 @@
         </p:blipFill>
         <p:spPr>
           <a:xfrm>
-            <a:off x="6096000" y="1690187"/>
-            <a:ext cx="5876704" cy="2150167"/>
+            <a:off x="498444" y="1690187"/>
+            <a:ext cx="5428250" cy="4139753"/>
           </a:xfrm>
           <a:prstGeom prst="rect">
             <a:avLst/>
@@ -6309,10 +6502,10 @@
       </p:pic>
       <p:pic>
         <p:nvPicPr>
-          <p:cNvPr id="13" name="Imagen 12">
-            <a:extLst>
-              <a:ext uri="{FF2B5EF4-FFF2-40B4-BE49-F238E27FC236}">
-                <a16:creationId xmlns:a16="http://schemas.microsoft.com/office/drawing/2014/main" id="{872ECD64-85CE-43B7-8CA7-30BD5FA830F0}"/>
+          <p:cNvPr id="8" name="Imagen 7">
+            <a:extLst>
+              <a:ext uri="{FF2B5EF4-FFF2-40B4-BE49-F238E27FC236}">
+                <a16:creationId xmlns:a16="http://schemas.microsoft.com/office/drawing/2014/main" id="{A555D0C2-72D9-8DEE-A92C-EF5B37F59166}"/>
               </a:ext>
             </a:extLst>
           </p:cNvPr>
@@ -6329,8 +6522,38 @@
         </p:blipFill>
         <p:spPr>
           <a:xfrm>
-            <a:off x="498444" y="1690187"/>
-            <a:ext cx="5428250" cy="4139753"/>
+            <a:off x="7376062" y="1625534"/>
+            <a:ext cx="4127090" cy="1558702"/>
+          </a:xfrm>
+          <a:prstGeom prst="rect">
+            <a:avLst/>
+          </a:prstGeom>
+        </p:spPr>
+      </p:pic>
+      <p:pic>
+        <p:nvPicPr>
+          <p:cNvPr id="11" name="Imagen 10">
+            <a:extLst>
+              <a:ext uri="{FF2B5EF4-FFF2-40B4-BE49-F238E27FC236}">
+                <a16:creationId xmlns:a16="http://schemas.microsoft.com/office/drawing/2014/main" id="{0AEA62AF-4A3E-191C-F156-C33A5792D2A6}"/>
+              </a:ext>
+            </a:extLst>
+          </p:cNvPr>
+          <p:cNvPicPr>
+            <a:picLocks noChangeAspect="1"/>
+          </p:cNvPicPr>
+          <p:nvPr/>
+        </p:nvPicPr>
+        <p:blipFill>
+          <a:blip r:embed="rId5"/>
+          <a:stretch>
+            <a:fillRect/>
+          </a:stretch>
+        </p:blipFill>
+        <p:spPr>
+          <a:xfrm>
+            <a:off x="7376062" y="3429000"/>
+            <a:ext cx="4127091" cy="1647050"/>
           </a:xfrm>
           <a:prstGeom prst="rect">
             <a:avLst/>

--- a/DocumentosTFG/PresentaciónTFG.pptx
+++ b/DocumentosTFG/PresentaciónTFG.pptx
@@ -7109,7 +7109,7 @@
             <a:pPr algn="ctr"/>
             <a:r>
               <a:rPr lang="es-ES" u="sng" dirty="0"/>
-              <a:t>LINEAS DE TRABAJO</a:t>
+              <a:t>LÍNEAS DE TRABAJO</a:t>
             </a:r>
           </a:p>
           <a:p>
@@ -7173,7 +7173,7 @@
             </a:r>
             <a:r>
               <a:rPr lang="es-ES" sz="1600" dirty="0"/>
-              <a:t>(no hay integración son sistemas externos de identidad o directorios)</a:t>
+              <a:t>(no hay integración con sistemas externos de identidad o directorios)</a:t>
             </a:r>
           </a:p>
           <a:p>
@@ -13967,7 +13967,7 @@
                   <a:schemeClr val="bg1"/>
                 </a:solidFill>
               </a:rPr>
-              <a:t>TECNOLOGIAS USADAS</a:t>
+              <a:t>TECNOLOGÍAS USADAS</a:t>
             </a:r>
           </a:p>
         </p:txBody>
@@ -14810,7 +14810,7 @@
             <a:pPr algn="ctr"/>
             <a:r>
               <a:rPr lang="es-ES" dirty="0"/>
-              <a:t>HMTL | CSS | JS</a:t>
+              <a:t>HTML | CSS | JS</a:t>
             </a:r>
           </a:p>
         </p:txBody>
@@ -14889,7 +14889,7 @@
             <a:pPr algn="ctr"/>
             <a:r>
               <a:rPr lang="es-ES" u="sng" dirty="0"/>
-              <a:t>X.059</a:t>
+              <a:t>X.509</a:t>
             </a:r>
           </a:p>
           <a:p>

--- a/DocumentosTFG/PresentaciónTFG.pptx
+++ b/DocumentosTFG/PresentaciónTFG.pptx
@@ -5,7 +5,7 @@
     <p:sldMasterId id="2147483648" r:id="rId1"/>
   </p:sldMasterIdLst>
   <p:notesMasterIdLst>
-    <p:notesMasterId r:id="rId19"/>
+    <p:notesMasterId r:id="rId17"/>
   </p:notesMasterIdLst>
   <p:sldIdLst>
     <p:sldId id="257" r:id="rId2"/>
@@ -14,17 +14,15 @@
     <p:sldId id="259" r:id="rId5"/>
     <p:sldId id="260" r:id="rId6"/>
     <p:sldId id="261" r:id="rId7"/>
-    <p:sldId id="265" r:id="rId8"/>
-    <p:sldId id="264" r:id="rId9"/>
-    <p:sldId id="263" r:id="rId10"/>
-    <p:sldId id="270" r:id="rId11"/>
-    <p:sldId id="266" r:id="rId12"/>
-    <p:sldId id="262" r:id="rId13"/>
-    <p:sldId id="271" r:id="rId14"/>
-    <p:sldId id="272" r:id="rId15"/>
-    <p:sldId id="268" r:id="rId16"/>
-    <p:sldId id="267" r:id="rId17"/>
-    <p:sldId id="269" r:id="rId18"/>
+    <p:sldId id="263" r:id="rId8"/>
+    <p:sldId id="270" r:id="rId9"/>
+    <p:sldId id="266" r:id="rId10"/>
+    <p:sldId id="262" r:id="rId11"/>
+    <p:sldId id="271" r:id="rId12"/>
+    <p:sldId id="272" r:id="rId13"/>
+    <p:sldId id="268" r:id="rId14"/>
+    <p:sldId id="267" r:id="rId15"/>
+    <p:sldId id="269" r:id="rId16"/>
   </p:sldIdLst>
   <p:sldSz cx="12192000" cy="6858000"/>
   <p:notesSz cx="6858000" cy="9144000"/>
@@ -305,51 +303,6 @@
 </p188:cmLst>
 </file>
 
-<file path=ppt/comments/modernComment_108_B89D4196.xml><?xml version="1.0" encoding="utf-8"?>
-<p188:cmLst xmlns:a="http://schemas.openxmlformats.org/drawingml/2006/main" xmlns:r="http://schemas.openxmlformats.org/officeDocument/2006/relationships" xmlns:p188="http://schemas.microsoft.com/office/powerpoint/2018/8/main">
-  <p188:cm id="{18A787C8-413D-4755-B4E6-E64EC5ED8096}" authorId="{D46F2EB9-8792-1B5E-E482-6287A72B49A3}" created="2026-06-06T12:09:00.629">
-    <pc:sldMkLst xmlns:pc="http://schemas.microsoft.com/office/powerpoint/2013/main/command">
-      <pc:docMk/>
-      <pc:sldMk cId="3097313686" sldId="264"/>
-    </pc:sldMkLst>
-    <p188:txBody>
-      <a:bodyPr/>
-      <a:lstStyle/>
-      <a:p>
-        <a:r>
-          <a:rPr lang="es-ES"/>
-          <a:t>El modelo de datos se articula alrededor de la votación como entidad principal. Sobre ella se relacionan el censo de participantes, las candidaturas presentadas y los órganos responsables del proceso, representados por la Junta y la Mesa Electoral. Durante la fase de votación se registran los votos emitidos y, posteriormente, se generan los resultados.</a:t>
-        </a:r>
-      </a:p>
-    </p188:txBody>
-  </p188:cm>
-</p188:cmLst>
-</file>
-
-<file path=ppt/comments/modernComment_109_17BD686.xml><?xml version="1.0" encoding="utf-8"?>
-<p188:cmLst xmlns:a="http://schemas.openxmlformats.org/drawingml/2006/main" xmlns:r="http://schemas.openxmlformats.org/officeDocument/2006/relationships" xmlns:p188="http://schemas.microsoft.com/office/powerpoint/2018/8/main">
-  <p188:cm id="{AF7C5CE4-8EF8-4313-9FA1-31A6B09E286E}" authorId="{D46F2EB9-8792-1B5E-E482-6287A72B49A3}" created="2026-06-06T11:33:20.033">
-    <pc:sldMkLst xmlns:pc="http://schemas.microsoft.com/office/powerpoint/2013/main/command">
-      <pc:docMk/>
-      <pc:sldMk cId="24893062" sldId="265"/>
-    </pc:sldMkLst>
-    <p188:txBody>
-      <a:bodyPr/>
-      <a:lstStyle/>
-      <a:p>
-        <a:r>
-          <a:rPr lang="es-ES"/>
-          <a:t>TeleVotApp incorpora mecanismos de autenticación, firma y validación basados en certificados digitales para proteger el proceso electoral. 
-El sistema verifica la identidad de los usuarios antes de permitir cualquier operación dentro del proceso electoral.
-Los certificados permiten  garantizar la procedencia en determinadas operaciones críticas.
-Los mecanismos de validación permiten verificar que la información no ha sido alterada durante el proceso.</a:t>
-        </a:r>
-      </a:p>
-    </p188:txBody>
-  </p188:cm>
-</p188:cmLst>
-</file>
-
 <file path=ppt/comments/modernComment_10A_3C6B7EE4.xml><?xml version="1.0" encoding="utf-8"?>
 <p188:cmLst xmlns:a="http://schemas.openxmlformats.org/drawingml/2006/main" xmlns:r="http://schemas.openxmlformats.org/officeDocument/2006/relationships" xmlns:p188="http://schemas.microsoft.com/office/powerpoint/2018/8/main">
   <p188:cm id="{62F3073F-5546-436F-BDDD-46EB7FE09003}" authorId="{D46F2EB9-8792-1B5E-E482-6287A72B49A3}" created="2026-06-07T20:24:40.052">
@@ -538,7 +491,7 @@
           <a:p>
             <a:fld id="{F033DA4F-E9E2-486B-9E28-2A3AE3321793}" type="datetimeFigureOut">
               <a:rPr lang="es-ES" smtClean="0"/>
-              <a:t>11/06/2026</a:t>
+              <a:t>08/07/2026</a:t>
             </a:fld>
             <a:endParaRPr lang="es-ES"/>
           </a:p>
@@ -1134,7 +1087,7 @@
           <a:p>
             <a:fld id="{0082298D-10ED-4CEA-ABC9-062C01423615}" type="datetimeFigureOut">
               <a:rPr lang="es-ES" smtClean="0"/>
-              <a:t>11/06/2026</a:t>
+              <a:t>08/07/2026</a:t>
             </a:fld>
             <a:endParaRPr lang="es-ES"/>
           </a:p>
@@ -1332,7 +1285,7 @@
           <a:p>
             <a:fld id="{0082298D-10ED-4CEA-ABC9-062C01423615}" type="datetimeFigureOut">
               <a:rPr lang="es-ES" smtClean="0"/>
-              <a:t>11/06/2026</a:t>
+              <a:t>08/07/2026</a:t>
             </a:fld>
             <a:endParaRPr lang="es-ES"/>
           </a:p>
@@ -1540,7 +1493,7 @@
           <a:p>
             <a:fld id="{0082298D-10ED-4CEA-ABC9-062C01423615}" type="datetimeFigureOut">
               <a:rPr lang="es-ES" smtClean="0"/>
-              <a:t>11/06/2026</a:t>
+              <a:t>08/07/2026</a:t>
             </a:fld>
             <a:endParaRPr lang="es-ES"/>
           </a:p>
@@ -1738,7 +1691,7 @@
           <a:p>
             <a:fld id="{0082298D-10ED-4CEA-ABC9-062C01423615}" type="datetimeFigureOut">
               <a:rPr lang="es-ES" smtClean="0"/>
-              <a:t>11/06/2026</a:t>
+              <a:t>08/07/2026</a:t>
             </a:fld>
             <a:endParaRPr lang="es-ES"/>
           </a:p>
@@ -2013,7 +1966,7 @@
           <a:p>
             <a:fld id="{0082298D-10ED-4CEA-ABC9-062C01423615}" type="datetimeFigureOut">
               <a:rPr lang="es-ES" smtClean="0"/>
-              <a:t>11/06/2026</a:t>
+              <a:t>08/07/2026</a:t>
             </a:fld>
             <a:endParaRPr lang="es-ES"/>
           </a:p>
@@ -2278,7 +2231,7 @@
           <a:p>
             <a:fld id="{0082298D-10ED-4CEA-ABC9-062C01423615}" type="datetimeFigureOut">
               <a:rPr lang="es-ES" smtClean="0"/>
-              <a:t>11/06/2026</a:t>
+              <a:t>08/07/2026</a:t>
             </a:fld>
             <a:endParaRPr lang="es-ES"/>
           </a:p>
@@ -2690,7 +2643,7 @@
           <a:p>
             <a:fld id="{0082298D-10ED-4CEA-ABC9-062C01423615}" type="datetimeFigureOut">
               <a:rPr lang="es-ES" smtClean="0"/>
-              <a:t>11/06/2026</a:t>
+              <a:t>08/07/2026</a:t>
             </a:fld>
             <a:endParaRPr lang="es-ES"/>
           </a:p>
@@ -2831,7 +2784,7 @@
           <a:p>
             <a:fld id="{0082298D-10ED-4CEA-ABC9-062C01423615}" type="datetimeFigureOut">
               <a:rPr lang="es-ES" smtClean="0"/>
-              <a:t>11/06/2026</a:t>
+              <a:t>08/07/2026</a:t>
             </a:fld>
             <a:endParaRPr lang="es-ES"/>
           </a:p>
@@ -2944,7 +2897,7 @@
           <a:p>
             <a:fld id="{0082298D-10ED-4CEA-ABC9-062C01423615}" type="datetimeFigureOut">
               <a:rPr lang="es-ES" smtClean="0"/>
-              <a:t>11/06/2026</a:t>
+              <a:t>08/07/2026</a:t>
             </a:fld>
             <a:endParaRPr lang="es-ES"/>
           </a:p>
@@ -3255,7 +3208,7 @@
           <a:p>
             <a:fld id="{0082298D-10ED-4CEA-ABC9-062C01423615}" type="datetimeFigureOut">
               <a:rPr lang="es-ES" smtClean="0"/>
-              <a:t>11/06/2026</a:t>
+              <a:t>08/07/2026</a:t>
             </a:fld>
             <a:endParaRPr lang="es-ES"/>
           </a:p>
@@ -3543,7 +3496,7 @@
           <a:p>
             <a:fld id="{0082298D-10ED-4CEA-ABC9-062C01423615}" type="datetimeFigureOut">
               <a:rPr lang="es-ES" smtClean="0"/>
-              <a:t>11/06/2026</a:t>
+              <a:t>08/07/2026</a:t>
             </a:fld>
             <a:endParaRPr lang="es-ES"/>
           </a:p>
@@ -3784,7 +3737,7 @@
           <a:p>
             <a:fld id="{0082298D-10ED-4CEA-ABC9-062C01423615}" type="datetimeFigureOut">
               <a:rPr lang="es-ES" smtClean="0"/>
-              <a:t>11/06/2026</a:t>
+              <a:t>08/07/2026</a:t>
             </a:fld>
             <a:endParaRPr lang="es-ES"/>
           </a:p>
@@ -4670,7 +4623,7 @@
         <p:cNvPr id="1" name="">
           <a:extLst>
             <a:ext uri="{FF2B5EF4-FFF2-40B4-BE49-F238E27FC236}">
-              <a16:creationId xmlns:a16="http://schemas.microsoft.com/office/drawing/2014/main" id="{B3F586A0-935D-00F7-871A-F59A9A09855B}"/>
+              <a16:creationId xmlns:a16="http://schemas.microsoft.com/office/drawing/2014/main" id="{272AA4EC-5B7A-B93F-4ADF-F34E48C58F17}"/>
             </a:ext>
           </a:extLst>
         </p:cNvPr>
@@ -4690,7 +4643,7 @@
           <p:cNvPr id="2" name="Título 1">
             <a:extLst>
               <a:ext uri="{FF2B5EF4-FFF2-40B4-BE49-F238E27FC236}">
-                <a16:creationId xmlns:a16="http://schemas.microsoft.com/office/drawing/2014/main" id="{4F114534-3DF0-38C0-C265-42555F2E6F79}"/>
+                <a16:creationId xmlns:a16="http://schemas.microsoft.com/office/drawing/2014/main" id="{6AD03EB7-BEDB-8C36-0116-1DA233FAB1E9}"/>
               </a:ext>
             </a:extLst>
           </p:cNvPr>
@@ -4732,7 +4685,7 @@
           <p:cNvPr id="3" name="Subtítulo 2">
             <a:extLst>
               <a:ext uri="{FF2B5EF4-FFF2-40B4-BE49-F238E27FC236}">
-                <a16:creationId xmlns:a16="http://schemas.microsoft.com/office/drawing/2014/main" id="{8928A8A2-C319-52FF-8A26-0D73C41C4EA3}"/>
+                <a16:creationId xmlns:a16="http://schemas.microsoft.com/office/drawing/2014/main" id="{E71D93C8-D036-A4DE-BF7E-3D8C0CABB1D9}"/>
               </a:ext>
             </a:extLst>
           </p:cNvPr>
@@ -4769,7 +4722,7 @@
           <p:cNvPr id="4" name="Marcador de pie de página 3">
             <a:extLst>
               <a:ext uri="{FF2B5EF4-FFF2-40B4-BE49-F238E27FC236}">
-                <a16:creationId xmlns:a16="http://schemas.microsoft.com/office/drawing/2014/main" id="{F8CE5244-8ECC-7F62-787F-39C14CCB70A8}"/>
+                <a16:creationId xmlns:a16="http://schemas.microsoft.com/office/drawing/2014/main" id="{A69FC579-8A69-EC3E-02BE-E1F1F16E4E88}"/>
               </a:ext>
             </a:extLst>
           </p:cNvPr>
@@ -4814,7 +4767,7 @@
           <p:cNvPr id="6" name="Conector recto 5">
             <a:extLst>
               <a:ext uri="{FF2B5EF4-FFF2-40B4-BE49-F238E27FC236}">
-                <a16:creationId xmlns:a16="http://schemas.microsoft.com/office/drawing/2014/main" id="{D5A69C07-E5DC-D0EC-67F1-5E26484CC348}"/>
+                <a16:creationId xmlns:a16="http://schemas.microsoft.com/office/drawing/2014/main" id="{3D25F27E-E40B-996D-CA76-CE3987D3E824}"/>
               </a:ext>
             </a:extLst>
           </p:cNvPr>
@@ -4849,10 +4802,10 @@
       </p:cxnSp>
       <p:pic>
         <p:nvPicPr>
-          <p:cNvPr id="7" name="Imagen 6">
-            <a:extLst>
-              <a:ext uri="{FF2B5EF4-FFF2-40B4-BE49-F238E27FC236}">
-                <a16:creationId xmlns:a16="http://schemas.microsoft.com/office/drawing/2014/main" id="{2C8CCB4F-A945-5DFC-D3A2-21AE3FC11C70}"/>
+          <p:cNvPr id="9" name="Imagen 8">
+            <a:extLst>
+              <a:ext uri="{FF2B5EF4-FFF2-40B4-BE49-F238E27FC236}">
+                <a16:creationId xmlns:a16="http://schemas.microsoft.com/office/drawing/2014/main" id="{C408A967-FC76-F135-AEAD-630AF635A3D2}"/>
               </a:ext>
             </a:extLst>
           </p:cNvPr>
@@ -4862,15 +4815,15 @@
           <p:nvPr/>
         </p:nvPicPr>
         <p:blipFill>
-          <a:blip r:embed="rId2"/>
+          <a:blip r:embed="rId3"/>
           <a:stretch>
             <a:fillRect/>
           </a:stretch>
         </p:blipFill>
         <p:spPr>
           <a:xfrm>
-            <a:off x="1094540" y="1847264"/>
-            <a:ext cx="5001460" cy="3776527"/>
+            <a:off x="610683" y="1533108"/>
+            <a:ext cx="2891470" cy="2591001"/>
           </a:xfrm>
           <a:prstGeom prst="rect">
             <a:avLst/>
@@ -4879,10 +4832,10 @@
       </p:pic>
       <p:sp>
         <p:nvSpPr>
-          <p:cNvPr id="5" name="CuadroTexto 4">
-            <a:extLst>
-              <a:ext uri="{FF2B5EF4-FFF2-40B4-BE49-F238E27FC236}">
-                <a16:creationId xmlns:a16="http://schemas.microsoft.com/office/drawing/2014/main" id="{A4896098-DCDC-C51D-382D-5B3B7C272BCB}"/>
+          <p:cNvPr id="10" name="CuadroTexto 9">
+            <a:extLst>
+              <a:ext uri="{FF2B5EF4-FFF2-40B4-BE49-F238E27FC236}">
+                <a16:creationId xmlns:a16="http://schemas.microsoft.com/office/drawing/2014/main" id="{3DCD5232-DA81-BF2D-B6C2-A558B81A6A5D}"/>
               </a:ext>
             </a:extLst>
           </p:cNvPr>
@@ -4891,7 +4844,7 @@
         </p:nvSpPr>
         <p:spPr>
           <a:xfrm>
-            <a:off x="4370832" y="1315829"/>
+            <a:off x="3794760" y="1163776"/>
             <a:ext cx="7708392" cy="369332"/>
           </a:xfrm>
           <a:prstGeom prst="rect">
@@ -4907,17 +4860,77 @@
           <a:p>
             <a:r>
               <a:rPr lang="es-ES" b="1" u="sng" dirty="0"/>
-              <a:t>GESTIÓN ELECTORAL COMPLETA</a:t>
-            </a:r>
-          </a:p>
-        </p:txBody>
-      </p:sp>
-      <p:sp>
-        <p:nvSpPr>
-          <p:cNvPr id="8" name="CuadroTexto 7">
-            <a:extLst>
-              <a:ext uri="{FF2B5EF4-FFF2-40B4-BE49-F238E27FC236}">
-                <a16:creationId xmlns:a16="http://schemas.microsoft.com/office/drawing/2014/main" id="{9A6B987D-24F5-6E84-ACD9-4FEEF5E3DD34}"/>
+              <a:t>CONTROL DE ACCESO BASADO EN ROLES</a:t>
+            </a:r>
+          </a:p>
+        </p:txBody>
+      </p:sp>
+      <p:pic>
+        <p:nvPicPr>
+          <p:cNvPr id="12" name="Imagen 11">
+            <a:extLst>
+              <a:ext uri="{FF2B5EF4-FFF2-40B4-BE49-F238E27FC236}">
+                <a16:creationId xmlns:a16="http://schemas.microsoft.com/office/drawing/2014/main" id="{3F07DCCB-358C-8DE3-F1C8-F8995960B550}"/>
+              </a:ext>
+            </a:extLst>
+          </p:cNvPr>
+          <p:cNvPicPr>
+            <a:picLocks noChangeAspect="1"/>
+          </p:cNvPicPr>
+          <p:nvPr/>
+        </p:nvPicPr>
+        <p:blipFill>
+          <a:blip r:embed="rId4"/>
+          <a:stretch>
+            <a:fillRect/>
+          </a:stretch>
+        </p:blipFill>
+        <p:spPr>
+          <a:xfrm>
+            <a:off x="3532204" y="4013665"/>
+            <a:ext cx="4086701" cy="2278032"/>
+          </a:xfrm>
+          <a:prstGeom prst="rect">
+            <a:avLst/>
+          </a:prstGeom>
+        </p:spPr>
+      </p:pic>
+      <p:pic>
+        <p:nvPicPr>
+          <p:cNvPr id="14" name="Imagen 13">
+            <a:extLst>
+              <a:ext uri="{FF2B5EF4-FFF2-40B4-BE49-F238E27FC236}">
+                <a16:creationId xmlns:a16="http://schemas.microsoft.com/office/drawing/2014/main" id="{04A2DDEC-B0A0-102D-1E3B-38A7343F8F9E}"/>
+              </a:ext>
+            </a:extLst>
+          </p:cNvPr>
+          <p:cNvPicPr>
+            <a:picLocks noChangeAspect="1"/>
+          </p:cNvPicPr>
+          <p:nvPr/>
+        </p:nvPicPr>
+        <p:blipFill>
+          <a:blip r:embed="rId5"/>
+          <a:stretch>
+            <a:fillRect/>
+          </a:stretch>
+        </p:blipFill>
+        <p:spPr>
+          <a:xfrm>
+            <a:off x="7648956" y="1533108"/>
+            <a:ext cx="4248956" cy="2591002"/>
+          </a:xfrm>
+          <a:prstGeom prst="rect">
+            <a:avLst/>
+          </a:prstGeom>
+        </p:spPr>
+      </p:pic>
+      <p:sp>
+        <p:nvSpPr>
+          <p:cNvPr id="15" name="CuadroTexto 14">
+            <a:extLst>
+              <a:ext uri="{FF2B5EF4-FFF2-40B4-BE49-F238E27FC236}">
+                <a16:creationId xmlns:a16="http://schemas.microsoft.com/office/drawing/2014/main" id="{2A94456A-47CF-E4DE-7D09-FC514097382F}"/>
               </a:ext>
             </a:extLst>
           </p:cNvPr>
@@ -4926,8 +4939,8 @@
         </p:nvSpPr>
         <p:spPr>
           <a:xfrm>
-            <a:off x="6647688" y="2679748"/>
-            <a:ext cx="5001460" cy="2031325"/>
+            <a:off x="3678508" y="2299126"/>
+            <a:ext cx="4086701" cy="1323439"/>
           </a:xfrm>
           <a:prstGeom prst="rect">
             <a:avLst/>
@@ -4945,8 +4958,8 @@
               <a:buChar char="•"/>
             </a:pPr>
             <a:r>
-              <a:rPr lang="es-ES" dirty="0"/>
-              <a:t>Administración de censos</a:t>
+              <a:rPr lang="es-ES" sz="1600" dirty="0"/>
+              <a:t>Interfaces específicas por rol</a:t>
             </a:r>
           </a:p>
           <a:p>
@@ -4954,7 +4967,10 @@
               <a:buFont typeface="Arial" panose="020B0604020202020204" pitchFamily="34" charset="0"/>
               <a:buChar char="•"/>
             </a:pPr>
-            <a:endParaRPr lang="es-ES" dirty="0"/>
+            <a:r>
+              <a:rPr lang="es-ES" sz="1600" dirty="0"/>
+              <a:t>Separación de responsabilidades</a:t>
+            </a:r>
           </a:p>
           <a:p>
             <a:pPr marL="285750" indent="-285750">
@@ -4962,8 +4978,8 @@
               <a:buChar char="•"/>
             </a:pPr>
             <a:r>
-              <a:rPr lang="es-ES" dirty="0"/>
-              <a:t>Configuración de votaciones</a:t>
+              <a:rPr lang="es-ES" sz="1600" dirty="0"/>
+              <a:t>Control de permisos</a:t>
             </a:r>
           </a:p>
           <a:p>
@@ -4971,47 +4987,35 @@
               <a:buFont typeface="Arial" panose="020B0604020202020204" pitchFamily="34" charset="0"/>
               <a:buChar char="•"/>
             </a:pPr>
-            <a:endParaRPr lang="es-ES" dirty="0"/>
+            <a:r>
+              <a:rPr lang="es-ES" sz="1600" dirty="0"/>
+              <a:t>Acceso restringido a funciones autorizadas</a:t>
+            </a:r>
           </a:p>
           <a:p>
             <a:pPr marL="285750" indent="-285750">
               <a:buFont typeface="Arial" panose="020B0604020202020204" pitchFamily="34" charset="0"/>
               <a:buChar char="•"/>
             </a:pPr>
-            <a:r>
-              <a:rPr lang="es-ES" dirty="0"/>
-              <a:t>Gestión de incidencias</a:t>
-            </a:r>
-          </a:p>
-          <a:p>
-            <a:pPr marL="285750" indent="-285750">
-              <a:buFont typeface="Arial" panose="020B0604020202020204" pitchFamily="34" charset="0"/>
-              <a:buChar char="•"/>
-            </a:pPr>
-            <a:endParaRPr lang="es-ES" dirty="0"/>
-          </a:p>
-          <a:p>
-            <a:pPr marL="285750" indent="-285750">
-              <a:buFont typeface="Arial" panose="020B0604020202020204" pitchFamily="34" charset="0"/>
-              <a:buChar char="•"/>
-            </a:pPr>
-            <a:r>
-              <a:rPr lang="es-ES" dirty="0"/>
-              <a:t>Supervisión del proceso</a:t>
-            </a:r>
+            <a:endParaRPr lang="es-ES" sz="1600" dirty="0"/>
           </a:p>
         </p:txBody>
       </p:sp>
     </p:spTree>
     <p:extLst>
       <p:ext uri="{BB962C8B-B14F-4D97-AF65-F5344CB8AC3E}">
-        <p14:creationId xmlns:p14="http://schemas.microsoft.com/office/powerpoint/2010/main" val="2624962926"/>
+        <p14:creationId xmlns:p14="http://schemas.microsoft.com/office/powerpoint/2010/main" val="3687730176"/>
       </p:ext>
     </p:extLst>
   </p:cSld>
   <p:clrMapOvr>
     <a:masterClrMapping/>
   </p:clrMapOvr>
+  <p:extLst>
+    <p:ext uri="{6950BFC3-D8DA-4A85-94F7-54DA5524770B}">
+      <p188:commentRel xmlns:p188="http://schemas.microsoft.com/office/powerpoint/2018/8/main" r:id="rId2"/>
+    </p:ext>
+  </p:extLst>
 </p:sld>
 </file>
 
@@ -5023,7 +5027,7 @@
         <p:cNvPr id="1" name="">
           <a:extLst>
             <a:ext uri="{FF2B5EF4-FFF2-40B4-BE49-F238E27FC236}">
-              <a16:creationId xmlns:a16="http://schemas.microsoft.com/office/drawing/2014/main" id="{3FC1A57B-9976-0CD5-E4BC-A91EB082CF66}"/>
+              <a16:creationId xmlns:a16="http://schemas.microsoft.com/office/drawing/2014/main" id="{F4208DAE-B2B4-99D4-F539-3CEBCDEE7B34}"/>
             </a:ext>
           </a:extLst>
         </p:cNvPr>
@@ -5043,7 +5047,7 @@
           <p:cNvPr id="2" name="Título 1">
             <a:extLst>
               <a:ext uri="{FF2B5EF4-FFF2-40B4-BE49-F238E27FC236}">
-                <a16:creationId xmlns:a16="http://schemas.microsoft.com/office/drawing/2014/main" id="{6A8F7A7C-7D9D-648E-3AD3-0327C3C13040}"/>
+                <a16:creationId xmlns:a16="http://schemas.microsoft.com/office/drawing/2014/main" id="{BBB6C88A-CDC0-40AA-EB99-E0DD19A8AAC3}"/>
               </a:ext>
             </a:extLst>
           </p:cNvPr>
@@ -5085,7 +5089,7 @@
           <p:cNvPr id="3" name="Subtítulo 2">
             <a:extLst>
               <a:ext uri="{FF2B5EF4-FFF2-40B4-BE49-F238E27FC236}">
-                <a16:creationId xmlns:a16="http://schemas.microsoft.com/office/drawing/2014/main" id="{7FC253B7-A570-136C-0934-1D4FBEE15448}"/>
+                <a16:creationId xmlns:a16="http://schemas.microsoft.com/office/drawing/2014/main" id="{63AA4CDE-CD6F-0255-41FB-32C2D22958DA}"/>
               </a:ext>
             </a:extLst>
           </p:cNvPr>
@@ -5122,7 +5126,7 @@
           <p:cNvPr id="4" name="Marcador de pie de página 3">
             <a:extLst>
               <a:ext uri="{FF2B5EF4-FFF2-40B4-BE49-F238E27FC236}">
-                <a16:creationId xmlns:a16="http://schemas.microsoft.com/office/drawing/2014/main" id="{1FCAECFE-CB12-3728-2D15-EE1D2C418862}"/>
+                <a16:creationId xmlns:a16="http://schemas.microsoft.com/office/drawing/2014/main" id="{85ED76F5-1924-5DDC-DCD3-7154CA0F8042}"/>
               </a:ext>
             </a:extLst>
           </p:cNvPr>
@@ -5167,7 +5171,7 @@
           <p:cNvPr id="6" name="Conector recto 5">
             <a:extLst>
               <a:ext uri="{FF2B5EF4-FFF2-40B4-BE49-F238E27FC236}">
-                <a16:creationId xmlns:a16="http://schemas.microsoft.com/office/drawing/2014/main" id="{3D1A3339-8558-E5CD-7798-2150B71AF339}"/>
+                <a16:creationId xmlns:a16="http://schemas.microsoft.com/office/drawing/2014/main" id="{16DD4947-AA00-C944-7F34-00B67700CDF1}"/>
               </a:ext>
             </a:extLst>
           </p:cNvPr>
@@ -5205,7 +5209,7 @@
           <p:cNvPr id="5" name="CuadroTexto 4">
             <a:extLst>
               <a:ext uri="{FF2B5EF4-FFF2-40B4-BE49-F238E27FC236}">
-                <a16:creationId xmlns:a16="http://schemas.microsoft.com/office/drawing/2014/main" id="{3387F61D-3390-09A4-D6E6-F454377C6186}"/>
+                <a16:creationId xmlns:a16="http://schemas.microsoft.com/office/drawing/2014/main" id="{EDEA73A0-6C1E-76AC-8C3B-5A9EC6D93884}"/>
               </a:ext>
             </a:extLst>
           </p:cNvPr>
@@ -5214,7 +5218,7 @@
         </p:nvSpPr>
         <p:spPr>
           <a:xfrm>
-            <a:off x="4233672" y="1184679"/>
+            <a:off x="3712464" y="1296319"/>
             <a:ext cx="7708392" cy="369332"/>
           </a:xfrm>
           <a:prstGeom prst="rect">
@@ -5230,7 +5234,7 @@
           <a:p>
             <a:r>
               <a:rPr lang="es-ES" b="1" u="sng" dirty="0"/>
-              <a:t>CONFIGURACIÓN DE LA VOTACIÓN</a:t>
+              <a:t>PROCESO DE VOTACIÓN CERTIFICADO</a:t>
             </a:r>
           </a:p>
         </p:txBody>
@@ -5240,7 +5244,7 @@
           <p:cNvPr id="8" name="Imagen 7">
             <a:extLst>
               <a:ext uri="{FF2B5EF4-FFF2-40B4-BE49-F238E27FC236}">
-                <a16:creationId xmlns:a16="http://schemas.microsoft.com/office/drawing/2014/main" id="{7A09DBED-27F6-41F4-F011-74663529C6E2}"/>
+                <a16:creationId xmlns:a16="http://schemas.microsoft.com/office/drawing/2014/main" id="{8C6EB7B6-EF7B-9F01-8876-C4868E874E58}"/>
               </a:ext>
             </a:extLst>
           </p:cNvPr>
@@ -5257,8 +5261,8 @@
         </p:blipFill>
         <p:spPr>
           <a:xfrm>
-            <a:off x="329534" y="1685161"/>
-            <a:ext cx="4370482" cy="3293483"/>
+            <a:off x="465940" y="1680983"/>
+            <a:ext cx="4791274" cy="1828143"/>
           </a:xfrm>
           <a:prstGeom prst="rect">
             <a:avLst/>
@@ -5270,7 +5274,7 @@
           <p:cNvPr id="10" name="Imagen 9">
             <a:extLst>
               <a:ext uri="{FF2B5EF4-FFF2-40B4-BE49-F238E27FC236}">
-                <a16:creationId xmlns:a16="http://schemas.microsoft.com/office/drawing/2014/main" id="{944DC394-B4DF-AFEF-223D-FB8D4A26C38F}"/>
+                <a16:creationId xmlns:a16="http://schemas.microsoft.com/office/drawing/2014/main" id="{BD8CBC2F-771D-9A14-E47F-458BEB6567C3}"/>
               </a:ext>
             </a:extLst>
           </p:cNvPr>
@@ -5287,8 +5291,8 @@
         </p:blipFill>
         <p:spPr>
           <a:xfrm>
-            <a:off x="7843081" y="1308823"/>
-            <a:ext cx="3922671" cy="2648200"/>
+            <a:off x="6934788" y="1737352"/>
+            <a:ext cx="4791272" cy="2022711"/>
           </a:xfrm>
           <a:prstGeom prst="rect">
             <a:avLst/>
@@ -5300,7 +5304,7 @@
           <p:cNvPr id="12" name="Imagen 11">
             <a:extLst>
               <a:ext uri="{FF2B5EF4-FFF2-40B4-BE49-F238E27FC236}">
-                <a16:creationId xmlns:a16="http://schemas.microsoft.com/office/drawing/2014/main" id="{3C2D88BA-DE13-2EFA-D2AA-4C2562DD9260}"/>
+                <a16:creationId xmlns:a16="http://schemas.microsoft.com/office/drawing/2014/main" id="{0ED724EC-C954-26BF-9BF9-A28892E77637}"/>
               </a:ext>
             </a:extLst>
           </p:cNvPr>
@@ -5317,8 +5321,8 @@
         </p:blipFill>
         <p:spPr>
           <a:xfrm>
-            <a:off x="9729151" y="3914967"/>
-            <a:ext cx="2036601" cy="2310233"/>
+            <a:off x="1178789" y="3695411"/>
+            <a:ext cx="3809540" cy="2265132"/>
           </a:xfrm>
           <a:prstGeom prst="rect">
             <a:avLst/>
@@ -5327,10 +5331,10 @@
       </p:pic>
       <p:sp>
         <p:nvSpPr>
-          <p:cNvPr id="14" name="CuadroTexto 13">
-            <a:extLst>
-              <a:ext uri="{FF2B5EF4-FFF2-40B4-BE49-F238E27FC236}">
-                <a16:creationId xmlns:a16="http://schemas.microsoft.com/office/drawing/2014/main" id="{17E5B7D4-0F14-40C5-59E5-04352784E88B}"/>
+          <p:cNvPr id="13" name="CuadroTexto 12">
+            <a:extLst>
+              <a:ext uri="{FF2B5EF4-FFF2-40B4-BE49-F238E27FC236}">
+                <a16:creationId xmlns:a16="http://schemas.microsoft.com/office/drawing/2014/main" id="{2D6CB3A4-C5B7-4498-5957-13643EBFDCAC}"/>
               </a:ext>
             </a:extLst>
           </p:cNvPr>
@@ -5339,8 +5343,8 @@
         </p:nvSpPr>
         <p:spPr>
           <a:xfrm>
-            <a:off x="5383365" y="4403327"/>
-            <a:ext cx="4745736" cy="1384995"/>
+            <a:off x="5861304" y="4143543"/>
+            <a:ext cx="4636008" cy="954107"/>
           </a:xfrm>
           <a:prstGeom prst="rect">
             <a:avLst/>
@@ -5361,7 +5365,7 @@
               <a:rPr lang="es-ES" sz="1400" dirty="0">
                 <a:latin typeface="Aptos" panose="020B0004020202020204" pitchFamily="34" charset="0"/>
               </a:rPr>
-              <a:t>Configuración del calendario electoral</a:t>
+              <a:t>Configuración de su certificado</a:t>
             </a:r>
           </a:p>
           <a:p>
@@ -5373,7 +5377,7 @@
               <a:rPr lang="es-ES" sz="1400" dirty="0">
                 <a:latin typeface="Aptos" panose="020B0004020202020204" pitchFamily="34" charset="0"/>
               </a:rPr>
-              <a:t>Asociación de censos y participantes</a:t>
+              <a:t>Selección de la votación</a:t>
             </a:r>
           </a:p>
           <a:p>
@@ -5385,7 +5389,7 @@
               <a:rPr lang="es-ES" sz="1400" dirty="0">
                 <a:latin typeface="Aptos" panose="020B0004020202020204" pitchFamily="34" charset="0"/>
               </a:rPr>
-              <a:t>Creación y gestión de candidaturas</a:t>
+              <a:t>Selección de candidatura</a:t>
             </a:r>
           </a:p>
           <a:p>
@@ -5397,36 +5401,15 @@
               <a:rPr lang="es-ES" sz="1400" dirty="0">
                 <a:latin typeface="Aptos" panose="020B0004020202020204" pitchFamily="34" charset="0"/>
               </a:rPr>
-              <a:t>Asignación del director de campaña</a:t>
-            </a:r>
-          </a:p>
-          <a:p>
-            <a:pPr marL="285750" indent="-285750">
-              <a:buFont typeface="Arial" panose="020B0604020202020204" pitchFamily="34" charset="0"/>
-              <a:buChar char="•"/>
-            </a:pPr>
-            <a:r>
-              <a:rPr lang="es-ES" sz="1400" dirty="0">
-                <a:latin typeface="Aptos" panose="020B0004020202020204" pitchFamily="34" charset="0"/>
-              </a:rPr>
-              <a:t>Activación y control de la votación</a:t>
-            </a:r>
-          </a:p>
-          <a:p>
-            <a:pPr marL="285750" indent="-285750">
-              <a:buFont typeface="Arial" panose="020B0604020202020204" pitchFamily="34" charset="0"/>
-              <a:buChar char="•"/>
-            </a:pPr>
-            <a:endParaRPr lang="es-ES" sz="1400" dirty="0">
-              <a:latin typeface="Aptos" panose="020B0004020202020204" pitchFamily="34" charset="0"/>
-            </a:endParaRPr>
+              <a:t>Emisión del voto</a:t>
+            </a:r>
           </a:p>
         </p:txBody>
       </p:sp>
     </p:spTree>
     <p:extLst>
       <p:ext uri="{BB962C8B-B14F-4D97-AF65-F5344CB8AC3E}">
-        <p14:creationId xmlns:p14="http://schemas.microsoft.com/office/powerpoint/2010/main" val="1013677796"/>
+        <p14:creationId xmlns:p14="http://schemas.microsoft.com/office/powerpoint/2010/main" val="1753145512"/>
       </p:ext>
     </p:extLst>
   </p:cSld>
@@ -5449,7 +5432,7 @@
         <p:cNvPr id="1" name="">
           <a:extLst>
             <a:ext uri="{FF2B5EF4-FFF2-40B4-BE49-F238E27FC236}">
-              <a16:creationId xmlns:a16="http://schemas.microsoft.com/office/drawing/2014/main" id="{272AA4EC-5B7A-B93F-4ADF-F34E48C58F17}"/>
+              <a16:creationId xmlns:a16="http://schemas.microsoft.com/office/drawing/2014/main" id="{DE659D7B-A3BF-7B5D-61F7-2A651D80E99A}"/>
             </a:ext>
           </a:extLst>
         </p:cNvPr>
@@ -5469,7 +5452,7 @@
           <p:cNvPr id="2" name="Título 1">
             <a:extLst>
               <a:ext uri="{FF2B5EF4-FFF2-40B4-BE49-F238E27FC236}">
-                <a16:creationId xmlns:a16="http://schemas.microsoft.com/office/drawing/2014/main" id="{6AD03EB7-BEDB-8C36-0116-1DA233FAB1E9}"/>
+                <a16:creationId xmlns:a16="http://schemas.microsoft.com/office/drawing/2014/main" id="{2DE22ECD-3D1C-663C-96A0-88547DB0A2FC}"/>
               </a:ext>
             </a:extLst>
           </p:cNvPr>
@@ -5511,7 +5494,7 @@
           <p:cNvPr id="3" name="Subtítulo 2">
             <a:extLst>
               <a:ext uri="{FF2B5EF4-FFF2-40B4-BE49-F238E27FC236}">
-                <a16:creationId xmlns:a16="http://schemas.microsoft.com/office/drawing/2014/main" id="{E71D93C8-D036-A4DE-BF7E-3D8C0CABB1D9}"/>
+                <a16:creationId xmlns:a16="http://schemas.microsoft.com/office/drawing/2014/main" id="{B45ACB47-D320-3B7A-4716-CCDC133DFA54}"/>
               </a:ext>
             </a:extLst>
           </p:cNvPr>
@@ -5548,7 +5531,7 @@
           <p:cNvPr id="4" name="Marcador de pie de página 3">
             <a:extLst>
               <a:ext uri="{FF2B5EF4-FFF2-40B4-BE49-F238E27FC236}">
-                <a16:creationId xmlns:a16="http://schemas.microsoft.com/office/drawing/2014/main" id="{A69FC579-8A69-EC3E-02BE-E1F1F16E4E88}"/>
+                <a16:creationId xmlns:a16="http://schemas.microsoft.com/office/drawing/2014/main" id="{431C6093-B680-E4DA-F701-C3F4DE6F0E64}"/>
               </a:ext>
             </a:extLst>
           </p:cNvPr>
@@ -5593,7 +5576,7 @@
           <p:cNvPr id="6" name="Conector recto 5">
             <a:extLst>
               <a:ext uri="{FF2B5EF4-FFF2-40B4-BE49-F238E27FC236}">
-                <a16:creationId xmlns:a16="http://schemas.microsoft.com/office/drawing/2014/main" id="{3D25F27E-E40B-996D-CA76-CE3987D3E824}"/>
+                <a16:creationId xmlns:a16="http://schemas.microsoft.com/office/drawing/2014/main" id="{B6C4A70F-B523-E45B-4452-49041183929E}"/>
               </a:ext>
             </a:extLst>
           </p:cNvPr>
@@ -5626,12 +5609,47 @@
           </a:fontRef>
         </p:style>
       </p:cxnSp>
+      <p:sp>
+        <p:nvSpPr>
+          <p:cNvPr id="5" name="CuadroTexto 4">
+            <a:extLst>
+              <a:ext uri="{FF2B5EF4-FFF2-40B4-BE49-F238E27FC236}">
+                <a16:creationId xmlns:a16="http://schemas.microsoft.com/office/drawing/2014/main" id="{E03AC3D8-4E57-FD52-61B2-5EF717ECB7CB}"/>
+              </a:ext>
+            </a:extLst>
+          </p:cNvPr>
+          <p:cNvSpPr txBox="1"/>
+          <p:nvPr/>
+        </p:nvSpPr>
+        <p:spPr>
+          <a:xfrm>
+            <a:off x="3794760" y="1163776"/>
+            <a:ext cx="7708392" cy="369332"/>
+          </a:xfrm>
+          <a:prstGeom prst="rect">
+            <a:avLst/>
+          </a:prstGeom>
+          <a:noFill/>
+        </p:spPr>
+        <p:txBody>
+          <a:bodyPr wrap="square" rtlCol="0">
+            <a:spAutoFit/>
+          </a:bodyPr>
+          <a:lstStyle/>
+          <a:p>
+            <a:r>
+              <a:rPr lang="es-ES" b="1" u="sng" dirty="0"/>
+              <a:t>RECUENTO Y PUBLICACIÓN DE RESULTADOS</a:t>
+            </a:r>
+          </a:p>
+        </p:txBody>
+      </p:sp>
       <p:pic>
         <p:nvPicPr>
-          <p:cNvPr id="9" name="Imagen 8">
-            <a:extLst>
-              <a:ext uri="{FF2B5EF4-FFF2-40B4-BE49-F238E27FC236}">
-                <a16:creationId xmlns:a16="http://schemas.microsoft.com/office/drawing/2014/main" id="{C408A967-FC76-F135-AEAD-630AF635A3D2}"/>
+          <p:cNvPr id="13" name="Imagen 12">
+            <a:extLst>
+              <a:ext uri="{FF2B5EF4-FFF2-40B4-BE49-F238E27FC236}">
+                <a16:creationId xmlns:a16="http://schemas.microsoft.com/office/drawing/2014/main" id="{872ECD64-85CE-43B7-8CA7-30BD5FA830F0}"/>
               </a:ext>
             </a:extLst>
           </p:cNvPr>
@@ -5648,55 +5666,20 @@
         </p:blipFill>
         <p:spPr>
           <a:xfrm>
-            <a:off x="610683" y="1533108"/>
-            <a:ext cx="2891470" cy="2591001"/>
+            <a:off x="498444" y="1690187"/>
+            <a:ext cx="5428250" cy="4139753"/>
           </a:xfrm>
           <a:prstGeom prst="rect">
             <a:avLst/>
           </a:prstGeom>
         </p:spPr>
       </p:pic>
-      <p:sp>
-        <p:nvSpPr>
-          <p:cNvPr id="10" name="CuadroTexto 9">
-            <a:extLst>
-              <a:ext uri="{FF2B5EF4-FFF2-40B4-BE49-F238E27FC236}">
-                <a16:creationId xmlns:a16="http://schemas.microsoft.com/office/drawing/2014/main" id="{3DCD5232-DA81-BF2D-B6C2-A558B81A6A5D}"/>
-              </a:ext>
-            </a:extLst>
-          </p:cNvPr>
-          <p:cNvSpPr txBox="1"/>
-          <p:nvPr/>
-        </p:nvSpPr>
-        <p:spPr>
-          <a:xfrm>
-            <a:off x="3794760" y="1163776"/>
-            <a:ext cx="7708392" cy="369332"/>
-          </a:xfrm>
-          <a:prstGeom prst="rect">
-            <a:avLst/>
-          </a:prstGeom>
-          <a:noFill/>
-        </p:spPr>
-        <p:txBody>
-          <a:bodyPr wrap="square" rtlCol="0">
-            <a:spAutoFit/>
-          </a:bodyPr>
-          <a:lstStyle/>
-          <a:p>
-            <a:r>
-              <a:rPr lang="es-ES" b="1" u="sng" dirty="0"/>
-              <a:t>CONTROL DE ACCESO BASADO EN ROLES</a:t>
-            </a:r>
-          </a:p>
-        </p:txBody>
-      </p:sp>
       <p:pic>
         <p:nvPicPr>
-          <p:cNvPr id="12" name="Imagen 11">
-            <a:extLst>
-              <a:ext uri="{FF2B5EF4-FFF2-40B4-BE49-F238E27FC236}">
-                <a16:creationId xmlns:a16="http://schemas.microsoft.com/office/drawing/2014/main" id="{3F07DCCB-358C-8DE3-F1C8-F8995960B550}"/>
+          <p:cNvPr id="8" name="Imagen 7">
+            <a:extLst>
+              <a:ext uri="{FF2B5EF4-FFF2-40B4-BE49-F238E27FC236}">
+                <a16:creationId xmlns:a16="http://schemas.microsoft.com/office/drawing/2014/main" id="{A555D0C2-72D9-8DEE-A92C-EF5B37F59166}"/>
               </a:ext>
             </a:extLst>
           </p:cNvPr>
@@ -5713,8 +5696,8 @@
         </p:blipFill>
         <p:spPr>
           <a:xfrm>
-            <a:off x="3532204" y="4013665"/>
-            <a:ext cx="4086701" cy="2278032"/>
+            <a:off x="7376062" y="1625534"/>
+            <a:ext cx="4127090" cy="1558702"/>
           </a:xfrm>
           <a:prstGeom prst="rect">
             <a:avLst/>
@@ -5723,10 +5706,10 @@
       </p:pic>
       <p:pic>
         <p:nvPicPr>
-          <p:cNvPr id="14" name="Imagen 13">
-            <a:extLst>
-              <a:ext uri="{FF2B5EF4-FFF2-40B4-BE49-F238E27FC236}">
-                <a16:creationId xmlns:a16="http://schemas.microsoft.com/office/drawing/2014/main" id="{04A2DDEC-B0A0-102D-1E3B-38A7343F8F9E}"/>
+          <p:cNvPr id="11" name="Imagen 10">
+            <a:extLst>
+              <a:ext uri="{FF2B5EF4-FFF2-40B4-BE49-F238E27FC236}">
+                <a16:creationId xmlns:a16="http://schemas.microsoft.com/office/drawing/2014/main" id="{0AEA62AF-4A3E-191C-F156-C33A5792D2A6}"/>
               </a:ext>
             </a:extLst>
           </p:cNvPr>
@@ -5743,94 +5726,18 @@
         </p:blipFill>
         <p:spPr>
           <a:xfrm>
-            <a:off x="7648956" y="1533108"/>
-            <a:ext cx="4248956" cy="2591002"/>
+            <a:off x="7376062" y="3429000"/>
+            <a:ext cx="4127091" cy="1647050"/>
           </a:xfrm>
           <a:prstGeom prst="rect">
             <a:avLst/>
           </a:prstGeom>
         </p:spPr>
       </p:pic>
-      <p:sp>
-        <p:nvSpPr>
-          <p:cNvPr id="15" name="CuadroTexto 14">
-            <a:extLst>
-              <a:ext uri="{FF2B5EF4-FFF2-40B4-BE49-F238E27FC236}">
-                <a16:creationId xmlns:a16="http://schemas.microsoft.com/office/drawing/2014/main" id="{2A94456A-47CF-E4DE-7D09-FC514097382F}"/>
-              </a:ext>
-            </a:extLst>
-          </p:cNvPr>
-          <p:cNvSpPr txBox="1"/>
-          <p:nvPr/>
-        </p:nvSpPr>
-        <p:spPr>
-          <a:xfrm>
-            <a:off x="3678508" y="2299126"/>
-            <a:ext cx="4086701" cy="1323439"/>
-          </a:xfrm>
-          <a:prstGeom prst="rect">
-            <a:avLst/>
-          </a:prstGeom>
-          <a:noFill/>
-        </p:spPr>
-        <p:txBody>
-          <a:bodyPr wrap="square" rtlCol="0">
-            <a:spAutoFit/>
-          </a:bodyPr>
-          <a:lstStyle/>
-          <a:p>
-            <a:pPr marL="285750" indent="-285750">
-              <a:buFont typeface="Arial" panose="020B0604020202020204" pitchFamily="34" charset="0"/>
-              <a:buChar char="•"/>
-            </a:pPr>
-            <a:r>
-              <a:rPr lang="es-ES" sz="1600" dirty="0"/>
-              <a:t>Interfaces específicas por rol</a:t>
-            </a:r>
-          </a:p>
-          <a:p>
-            <a:pPr marL="285750" indent="-285750">
-              <a:buFont typeface="Arial" panose="020B0604020202020204" pitchFamily="34" charset="0"/>
-              <a:buChar char="•"/>
-            </a:pPr>
-            <a:r>
-              <a:rPr lang="es-ES" sz="1600" dirty="0"/>
-              <a:t>Separación de responsabilidades</a:t>
-            </a:r>
-          </a:p>
-          <a:p>
-            <a:pPr marL="285750" indent="-285750">
-              <a:buFont typeface="Arial" panose="020B0604020202020204" pitchFamily="34" charset="0"/>
-              <a:buChar char="•"/>
-            </a:pPr>
-            <a:r>
-              <a:rPr lang="es-ES" sz="1600" dirty="0"/>
-              <a:t>Control de permisos</a:t>
-            </a:r>
-          </a:p>
-          <a:p>
-            <a:pPr marL="285750" indent="-285750">
-              <a:buFont typeface="Arial" panose="020B0604020202020204" pitchFamily="34" charset="0"/>
-              <a:buChar char="•"/>
-            </a:pPr>
-            <a:r>
-              <a:rPr lang="es-ES" sz="1600" dirty="0"/>
-              <a:t>Acceso restringido a funciones autorizadas</a:t>
-            </a:r>
-          </a:p>
-          <a:p>
-            <a:pPr marL="285750" indent="-285750">
-              <a:buFont typeface="Arial" panose="020B0604020202020204" pitchFamily="34" charset="0"/>
-              <a:buChar char="•"/>
-            </a:pPr>
-            <a:endParaRPr lang="es-ES" sz="1600" dirty="0"/>
-          </a:p>
-        </p:txBody>
-      </p:sp>
     </p:spTree>
     <p:extLst>
       <p:ext uri="{BB962C8B-B14F-4D97-AF65-F5344CB8AC3E}">
-        <p14:creationId xmlns:p14="http://schemas.microsoft.com/office/powerpoint/2010/main" val="3687730176"/>
+        <p14:creationId xmlns:p14="http://schemas.microsoft.com/office/powerpoint/2010/main" val="66927452"/>
       </p:ext>
     </p:extLst>
   </p:cSld>
@@ -5853,739 +5760,6 @@
         <p:cNvPr id="1" name="">
           <a:extLst>
             <a:ext uri="{FF2B5EF4-FFF2-40B4-BE49-F238E27FC236}">
-              <a16:creationId xmlns:a16="http://schemas.microsoft.com/office/drawing/2014/main" id="{F4208DAE-B2B4-99D4-F539-3CEBCDEE7B34}"/>
-            </a:ext>
-          </a:extLst>
-        </p:cNvPr>
-        <p:cNvGrpSpPr/>
-        <p:nvPr/>
-      </p:nvGrpSpPr>
-      <p:grpSpPr>
-        <a:xfrm>
-          <a:off x="0" y="0"/>
-          <a:ext cx="0" cy="0"/>
-          <a:chOff x="0" y="0"/>
-          <a:chExt cx="0" cy="0"/>
-        </a:xfrm>
-      </p:grpSpPr>
-      <p:sp>
-        <p:nvSpPr>
-          <p:cNvPr id="2" name="Título 1">
-            <a:extLst>
-              <a:ext uri="{FF2B5EF4-FFF2-40B4-BE49-F238E27FC236}">
-                <a16:creationId xmlns:a16="http://schemas.microsoft.com/office/drawing/2014/main" id="{BBB6C88A-CDC0-40AA-EB99-E0DD19A8AAC3}"/>
-              </a:ext>
-            </a:extLst>
-          </p:cNvPr>
-          <p:cNvSpPr>
-            <a:spLocks noGrp="1"/>
-          </p:cNvSpPr>
-          <p:nvPr>
-            <p:ph type="ctrTitle"/>
-          </p:nvPr>
-        </p:nvSpPr>
-        <p:spPr>
-          <a:xfrm>
-            <a:off x="1547091" y="489524"/>
-            <a:ext cx="9097818" cy="609600"/>
-          </a:xfrm>
-          <a:solidFill>
-            <a:srgbClr val="1F4E79"/>
-          </a:solidFill>
-        </p:spPr>
-        <p:txBody>
-          <a:bodyPr>
-            <a:noAutofit/>
-          </a:bodyPr>
-          <a:lstStyle/>
-          <a:p>
-            <a:r>
-              <a:rPr lang="es-ES" sz="4400" dirty="0">
-                <a:solidFill>
-                  <a:schemeClr val="bg1"/>
-                </a:solidFill>
-              </a:rPr>
-              <a:t>RESULTADOS OBTENIDOS</a:t>
-            </a:r>
-          </a:p>
-        </p:txBody>
-      </p:sp>
-      <p:sp>
-        <p:nvSpPr>
-          <p:cNvPr id="3" name="Subtítulo 2">
-            <a:extLst>
-              <a:ext uri="{FF2B5EF4-FFF2-40B4-BE49-F238E27FC236}">
-                <a16:creationId xmlns:a16="http://schemas.microsoft.com/office/drawing/2014/main" id="{63AA4CDE-CD6F-0255-41FB-32C2D22958DA}"/>
-              </a:ext>
-            </a:extLst>
-          </p:cNvPr>
-          <p:cNvSpPr>
-            <a:spLocks noGrp="1"/>
-          </p:cNvSpPr>
-          <p:nvPr>
-            <p:ph type="subTitle" idx="1"/>
-          </p:nvPr>
-        </p:nvSpPr>
-        <p:spPr>
-          <a:xfrm>
-            <a:off x="1477818" y="257128"/>
-            <a:ext cx="9144000" cy="223161"/>
-          </a:xfrm>
-        </p:spPr>
-        <p:txBody>
-          <a:bodyPr>
-            <a:noAutofit/>
-          </a:bodyPr>
-          <a:lstStyle/>
-          <a:p>
-            <a:r>
-              <a:rPr lang="es-ES" sz="1200" dirty="0">
-                <a:latin typeface="Aptos" panose="020B0004020202020204" pitchFamily="34" charset="0"/>
-              </a:rPr>
-              <a:t>TeleVotApp – Sistema de Votación Telemática Certificada</a:t>
-            </a:r>
-          </a:p>
-        </p:txBody>
-      </p:sp>
-      <p:sp>
-        <p:nvSpPr>
-          <p:cNvPr id="4" name="Marcador de pie de página 3">
-            <a:extLst>
-              <a:ext uri="{FF2B5EF4-FFF2-40B4-BE49-F238E27FC236}">
-                <a16:creationId xmlns:a16="http://schemas.microsoft.com/office/drawing/2014/main" id="{85ED76F5-1924-5DDC-DCD3-7154CA0F8042}"/>
-              </a:ext>
-            </a:extLst>
-          </p:cNvPr>
-          <p:cNvSpPr>
-            <a:spLocks noGrp="1"/>
-          </p:cNvSpPr>
-          <p:nvPr>
-            <p:ph type="ftr" sz="quarter" idx="11"/>
-          </p:nvPr>
-        </p:nvSpPr>
-        <p:spPr>
-          <a:xfrm>
-            <a:off x="258618" y="6356350"/>
-            <a:ext cx="11582400" cy="365125"/>
-          </a:xfrm>
-          <a:solidFill>
-            <a:schemeClr val="bg1">
-              <a:lumMod val="95000"/>
-            </a:schemeClr>
-          </a:solidFill>
-        </p:spPr>
-        <p:txBody>
-          <a:bodyPr/>
-          <a:lstStyle/>
-          <a:p>
-            <a:pPr algn="r"/>
-            <a:r>
-              <a:rPr lang="es-ES" dirty="0"/>
-              <a:t>       Samir Alonso García  |  TFG Ingeniería informática                                                                                                                                                                                                                                    </a:t>
-            </a:r>
-            <a:fld id="{3445E56A-E3DC-453B-8218-65FD7A4793C7}" type="slidenum">
-              <a:rPr lang="es-ES" smtClean="0"/>
-              <a:pPr algn="r"/>
-              <a:t>13</a:t>
-            </a:fld>
-            <a:endParaRPr lang="es-ES" dirty="0"/>
-          </a:p>
-        </p:txBody>
-      </p:sp>
-      <p:cxnSp>
-        <p:nvCxnSpPr>
-          <p:cNvPr id="6" name="Conector recto 5">
-            <a:extLst>
-              <a:ext uri="{FF2B5EF4-FFF2-40B4-BE49-F238E27FC236}">
-                <a16:creationId xmlns:a16="http://schemas.microsoft.com/office/drawing/2014/main" id="{16DD4947-AA00-C944-7F34-00B67700CDF1}"/>
-              </a:ext>
-            </a:extLst>
-          </p:cNvPr>
-          <p:cNvCxnSpPr>
-            <a:cxnSpLocks/>
-          </p:cNvCxnSpPr>
-          <p:nvPr/>
-        </p:nvCxnSpPr>
-        <p:spPr>
-          <a:xfrm>
-            <a:off x="0" y="1163776"/>
-            <a:ext cx="12192000" cy="0"/>
-          </a:xfrm>
-          <a:prstGeom prst="line">
-            <a:avLst/>
-          </a:prstGeom>
-        </p:spPr>
-        <p:style>
-          <a:lnRef idx="1">
-            <a:schemeClr val="accent1"/>
-          </a:lnRef>
-          <a:fillRef idx="0">
-            <a:schemeClr val="accent1"/>
-          </a:fillRef>
-          <a:effectRef idx="0">
-            <a:schemeClr val="accent1"/>
-          </a:effectRef>
-          <a:fontRef idx="minor">
-            <a:schemeClr val="tx1"/>
-          </a:fontRef>
-        </p:style>
-      </p:cxnSp>
-      <p:sp>
-        <p:nvSpPr>
-          <p:cNvPr id="5" name="CuadroTexto 4">
-            <a:extLst>
-              <a:ext uri="{FF2B5EF4-FFF2-40B4-BE49-F238E27FC236}">
-                <a16:creationId xmlns:a16="http://schemas.microsoft.com/office/drawing/2014/main" id="{EDEA73A0-6C1E-76AC-8C3B-5A9EC6D93884}"/>
-              </a:ext>
-            </a:extLst>
-          </p:cNvPr>
-          <p:cNvSpPr txBox="1"/>
-          <p:nvPr/>
-        </p:nvSpPr>
-        <p:spPr>
-          <a:xfrm>
-            <a:off x="3712464" y="1296319"/>
-            <a:ext cx="7708392" cy="369332"/>
-          </a:xfrm>
-          <a:prstGeom prst="rect">
-            <a:avLst/>
-          </a:prstGeom>
-          <a:noFill/>
-        </p:spPr>
-        <p:txBody>
-          <a:bodyPr wrap="square" rtlCol="0">
-            <a:spAutoFit/>
-          </a:bodyPr>
-          <a:lstStyle/>
-          <a:p>
-            <a:r>
-              <a:rPr lang="es-ES" b="1" u="sng" dirty="0"/>
-              <a:t>PROCESO DE VOTACIÓN CERTIFICADO</a:t>
-            </a:r>
-          </a:p>
-        </p:txBody>
-      </p:sp>
-      <p:pic>
-        <p:nvPicPr>
-          <p:cNvPr id="8" name="Imagen 7">
-            <a:extLst>
-              <a:ext uri="{FF2B5EF4-FFF2-40B4-BE49-F238E27FC236}">
-                <a16:creationId xmlns:a16="http://schemas.microsoft.com/office/drawing/2014/main" id="{8C6EB7B6-EF7B-9F01-8876-C4868E874E58}"/>
-              </a:ext>
-            </a:extLst>
-          </p:cNvPr>
-          <p:cNvPicPr>
-            <a:picLocks noChangeAspect="1"/>
-          </p:cNvPicPr>
-          <p:nvPr/>
-        </p:nvPicPr>
-        <p:blipFill>
-          <a:blip r:embed="rId3"/>
-          <a:stretch>
-            <a:fillRect/>
-          </a:stretch>
-        </p:blipFill>
-        <p:spPr>
-          <a:xfrm>
-            <a:off x="465940" y="1680983"/>
-            <a:ext cx="4791274" cy="1828143"/>
-          </a:xfrm>
-          <a:prstGeom prst="rect">
-            <a:avLst/>
-          </a:prstGeom>
-        </p:spPr>
-      </p:pic>
-      <p:pic>
-        <p:nvPicPr>
-          <p:cNvPr id="10" name="Imagen 9">
-            <a:extLst>
-              <a:ext uri="{FF2B5EF4-FFF2-40B4-BE49-F238E27FC236}">
-                <a16:creationId xmlns:a16="http://schemas.microsoft.com/office/drawing/2014/main" id="{BD8CBC2F-771D-9A14-E47F-458BEB6567C3}"/>
-              </a:ext>
-            </a:extLst>
-          </p:cNvPr>
-          <p:cNvPicPr>
-            <a:picLocks noChangeAspect="1"/>
-          </p:cNvPicPr>
-          <p:nvPr/>
-        </p:nvPicPr>
-        <p:blipFill>
-          <a:blip r:embed="rId4"/>
-          <a:stretch>
-            <a:fillRect/>
-          </a:stretch>
-        </p:blipFill>
-        <p:spPr>
-          <a:xfrm>
-            <a:off x="6934788" y="1737352"/>
-            <a:ext cx="4791272" cy="2022711"/>
-          </a:xfrm>
-          <a:prstGeom prst="rect">
-            <a:avLst/>
-          </a:prstGeom>
-        </p:spPr>
-      </p:pic>
-      <p:pic>
-        <p:nvPicPr>
-          <p:cNvPr id="12" name="Imagen 11">
-            <a:extLst>
-              <a:ext uri="{FF2B5EF4-FFF2-40B4-BE49-F238E27FC236}">
-                <a16:creationId xmlns:a16="http://schemas.microsoft.com/office/drawing/2014/main" id="{0ED724EC-C954-26BF-9BF9-A28892E77637}"/>
-              </a:ext>
-            </a:extLst>
-          </p:cNvPr>
-          <p:cNvPicPr>
-            <a:picLocks noChangeAspect="1"/>
-          </p:cNvPicPr>
-          <p:nvPr/>
-        </p:nvPicPr>
-        <p:blipFill>
-          <a:blip r:embed="rId5"/>
-          <a:stretch>
-            <a:fillRect/>
-          </a:stretch>
-        </p:blipFill>
-        <p:spPr>
-          <a:xfrm>
-            <a:off x="1178789" y="3695411"/>
-            <a:ext cx="3809540" cy="2265132"/>
-          </a:xfrm>
-          <a:prstGeom prst="rect">
-            <a:avLst/>
-          </a:prstGeom>
-        </p:spPr>
-      </p:pic>
-      <p:sp>
-        <p:nvSpPr>
-          <p:cNvPr id="13" name="CuadroTexto 12">
-            <a:extLst>
-              <a:ext uri="{FF2B5EF4-FFF2-40B4-BE49-F238E27FC236}">
-                <a16:creationId xmlns:a16="http://schemas.microsoft.com/office/drawing/2014/main" id="{2D6CB3A4-C5B7-4498-5957-13643EBFDCAC}"/>
-              </a:ext>
-            </a:extLst>
-          </p:cNvPr>
-          <p:cNvSpPr txBox="1"/>
-          <p:nvPr/>
-        </p:nvSpPr>
-        <p:spPr>
-          <a:xfrm>
-            <a:off x="5861304" y="4143543"/>
-            <a:ext cx="4636008" cy="954107"/>
-          </a:xfrm>
-          <a:prstGeom prst="rect">
-            <a:avLst/>
-          </a:prstGeom>
-          <a:noFill/>
-        </p:spPr>
-        <p:txBody>
-          <a:bodyPr wrap="square" rtlCol="0">
-            <a:spAutoFit/>
-          </a:bodyPr>
-          <a:lstStyle/>
-          <a:p>
-            <a:pPr marL="285750" indent="-285750">
-              <a:buFont typeface="Arial" panose="020B0604020202020204" pitchFamily="34" charset="0"/>
-              <a:buChar char="•"/>
-            </a:pPr>
-            <a:r>
-              <a:rPr lang="es-ES" sz="1400" dirty="0">
-                <a:latin typeface="Aptos" panose="020B0004020202020204" pitchFamily="34" charset="0"/>
-              </a:rPr>
-              <a:t>Configuración de su certificado</a:t>
-            </a:r>
-          </a:p>
-          <a:p>
-            <a:pPr marL="285750" indent="-285750">
-              <a:buFont typeface="Arial" panose="020B0604020202020204" pitchFamily="34" charset="0"/>
-              <a:buChar char="•"/>
-            </a:pPr>
-            <a:r>
-              <a:rPr lang="es-ES" sz="1400" dirty="0">
-                <a:latin typeface="Aptos" panose="020B0004020202020204" pitchFamily="34" charset="0"/>
-              </a:rPr>
-              <a:t>Selección de la votación</a:t>
-            </a:r>
-          </a:p>
-          <a:p>
-            <a:pPr marL="285750" indent="-285750">
-              <a:buFont typeface="Arial" panose="020B0604020202020204" pitchFamily="34" charset="0"/>
-              <a:buChar char="•"/>
-            </a:pPr>
-            <a:r>
-              <a:rPr lang="es-ES" sz="1400" dirty="0">
-                <a:latin typeface="Aptos" panose="020B0004020202020204" pitchFamily="34" charset="0"/>
-              </a:rPr>
-              <a:t>Selección de candidatura</a:t>
-            </a:r>
-          </a:p>
-          <a:p>
-            <a:pPr marL="285750" indent="-285750">
-              <a:buFont typeface="Arial" panose="020B0604020202020204" pitchFamily="34" charset="0"/>
-              <a:buChar char="•"/>
-            </a:pPr>
-            <a:r>
-              <a:rPr lang="es-ES" sz="1400" dirty="0">
-                <a:latin typeface="Aptos" panose="020B0004020202020204" pitchFamily="34" charset="0"/>
-              </a:rPr>
-              <a:t>Emisión del voto</a:t>
-            </a:r>
-          </a:p>
-        </p:txBody>
-      </p:sp>
-    </p:spTree>
-    <p:extLst>
-      <p:ext uri="{BB962C8B-B14F-4D97-AF65-F5344CB8AC3E}">
-        <p14:creationId xmlns:p14="http://schemas.microsoft.com/office/powerpoint/2010/main" val="1753145512"/>
-      </p:ext>
-    </p:extLst>
-  </p:cSld>
-  <p:clrMapOvr>
-    <a:masterClrMapping/>
-  </p:clrMapOvr>
-  <p:extLst>
-    <p:ext uri="{6950BFC3-D8DA-4A85-94F7-54DA5524770B}">
-      <p188:commentRel xmlns:p188="http://schemas.microsoft.com/office/powerpoint/2018/8/main" r:id="rId2"/>
-    </p:ext>
-  </p:extLst>
-</p:sld>
-</file>
-
-<file path=ppt/slides/slide14.xml><?xml version="1.0" encoding="utf-8"?>
-<p:sld xmlns:a="http://schemas.openxmlformats.org/drawingml/2006/main" xmlns:r="http://schemas.openxmlformats.org/officeDocument/2006/relationships" xmlns:p="http://schemas.openxmlformats.org/presentationml/2006/main">
-  <p:cSld>
-    <p:spTree>
-      <p:nvGrpSpPr>
-        <p:cNvPr id="1" name="">
-          <a:extLst>
-            <a:ext uri="{FF2B5EF4-FFF2-40B4-BE49-F238E27FC236}">
-              <a16:creationId xmlns:a16="http://schemas.microsoft.com/office/drawing/2014/main" id="{DE659D7B-A3BF-7B5D-61F7-2A651D80E99A}"/>
-            </a:ext>
-          </a:extLst>
-        </p:cNvPr>
-        <p:cNvGrpSpPr/>
-        <p:nvPr/>
-      </p:nvGrpSpPr>
-      <p:grpSpPr>
-        <a:xfrm>
-          <a:off x="0" y="0"/>
-          <a:ext cx="0" cy="0"/>
-          <a:chOff x="0" y="0"/>
-          <a:chExt cx="0" cy="0"/>
-        </a:xfrm>
-      </p:grpSpPr>
-      <p:sp>
-        <p:nvSpPr>
-          <p:cNvPr id="2" name="Título 1">
-            <a:extLst>
-              <a:ext uri="{FF2B5EF4-FFF2-40B4-BE49-F238E27FC236}">
-                <a16:creationId xmlns:a16="http://schemas.microsoft.com/office/drawing/2014/main" id="{2DE22ECD-3D1C-663C-96A0-88547DB0A2FC}"/>
-              </a:ext>
-            </a:extLst>
-          </p:cNvPr>
-          <p:cNvSpPr>
-            <a:spLocks noGrp="1"/>
-          </p:cNvSpPr>
-          <p:nvPr>
-            <p:ph type="ctrTitle"/>
-          </p:nvPr>
-        </p:nvSpPr>
-        <p:spPr>
-          <a:xfrm>
-            <a:off x="1547091" y="489524"/>
-            <a:ext cx="9097818" cy="609600"/>
-          </a:xfrm>
-          <a:solidFill>
-            <a:srgbClr val="1F4E79"/>
-          </a:solidFill>
-        </p:spPr>
-        <p:txBody>
-          <a:bodyPr>
-            <a:noAutofit/>
-          </a:bodyPr>
-          <a:lstStyle/>
-          <a:p>
-            <a:r>
-              <a:rPr lang="es-ES" sz="4400" dirty="0">
-                <a:solidFill>
-                  <a:schemeClr val="bg1"/>
-                </a:solidFill>
-              </a:rPr>
-              <a:t>RESULTADOS OBTENIDOS</a:t>
-            </a:r>
-          </a:p>
-        </p:txBody>
-      </p:sp>
-      <p:sp>
-        <p:nvSpPr>
-          <p:cNvPr id="3" name="Subtítulo 2">
-            <a:extLst>
-              <a:ext uri="{FF2B5EF4-FFF2-40B4-BE49-F238E27FC236}">
-                <a16:creationId xmlns:a16="http://schemas.microsoft.com/office/drawing/2014/main" id="{B45ACB47-D320-3B7A-4716-CCDC133DFA54}"/>
-              </a:ext>
-            </a:extLst>
-          </p:cNvPr>
-          <p:cNvSpPr>
-            <a:spLocks noGrp="1"/>
-          </p:cNvSpPr>
-          <p:nvPr>
-            <p:ph type="subTitle" idx="1"/>
-          </p:nvPr>
-        </p:nvSpPr>
-        <p:spPr>
-          <a:xfrm>
-            <a:off x="1477818" y="257128"/>
-            <a:ext cx="9144000" cy="223161"/>
-          </a:xfrm>
-        </p:spPr>
-        <p:txBody>
-          <a:bodyPr>
-            <a:noAutofit/>
-          </a:bodyPr>
-          <a:lstStyle/>
-          <a:p>
-            <a:r>
-              <a:rPr lang="es-ES" sz="1200" dirty="0">
-                <a:latin typeface="Aptos" panose="020B0004020202020204" pitchFamily="34" charset="0"/>
-              </a:rPr>
-              <a:t>TeleVotApp – Sistema de Votación Telemática Certificada</a:t>
-            </a:r>
-          </a:p>
-        </p:txBody>
-      </p:sp>
-      <p:sp>
-        <p:nvSpPr>
-          <p:cNvPr id="4" name="Marcador de pie de página 3">
-            <a:extLst>
-              <a:ext uri="{FF2B5EF4-FFF2-40B4-BE49-F238E27FC236}">
-                <a16:creationId xmlns:a16="http://schemas.microsoft.com/office/drawing/2014/main" id="{431C6093-B680-E4DA-F701-C3F4DE6F0E64}"/>
-              </a:ext>
-            </a:extLst>
-          </p:cNvPr>
-          <p:cNvSpPr>
-            <a:spLocks noGrp="1"/>
-          </p:cNvSpPr>
-          <p:nvPr>
-            <p:ph type="ftr" sz="quarter" idx="11"/>
-          </p:nvPr>
-        </p:nvSpPr>
-        <p:spPr>
-          <a:xfrm>
-            <a:off x="258618" y="6356350"/>
-            <a:ext cx="11582400" cy="365125"/>
-          </a:xfrm>
-          <a:solidFill>
-            <a:schemeClr val="bg1">
-              <a:lumMod val="95000"/>
-            </a:schemeClr>
-          </a:solidFill>
-        </p:spPr>
-        <p:txBody>
-          <a:bodyPr/>
-          <a:lstStyle/>
-          <a:p>
-            <a:pPr algn="r"/>
-            <a:r>
-              <a:rPr lang="es-ES" dirty="0"/>
-              <a:t>       Samir Alonso García  |  TFG Ingeniería informática                                                                                                                                                                                                                                    </a:t>
-            </a:r>
-            <a:fld id="{3445E56A-E3DC-453B-8218-65FD7A4793C7}" type="slidenum">
-              <a:rPr lang="es-ES" smtClean="0"/>
-              <a:pPr algn="r"/>
-              <a:t>14</a:t>
-            </a:fld>
-            <a:endParaRPr lang="es-ES" dirty="0"/>
-          </a:p>
-        </p:txBody>
-      </p:sp>
-      <p:cxnSp>
-        <p:nvCxnSpPr>
-          <p:cNvPr id="6" name="Conector recto 5">
-            <a:extLst>
-              <a:ext uri="{FF2B5EF4-FFF2-40B4-BE49-F238E27FC236}">
-                <a16:creationId xmlns:a16="http://schemas.microsoft.com/office/drawing/2014/main" id="{B6C4A70F-B523-E45B-4452-49041183929E}"/>
-              </a:ext>
-            </a:extLst>
-          </p:cNvPr>
-          <p:cNvCxnSpPr>
-            <a:cxnSpLocks/>
-          </p:cNvCxnSpPr>
-          <p:nvPr/>
-        </p:nvCxnSpPr>
-        <p:spPr>
-          <a:xfrm>
-            <a:off x="0" y="1163776"/>
-            <a:ext cx="12192000" cy="0"/>
-          </a:xfrm>
-          <a:prstGeom prst="line">
-            <a:avLst/>
-          </a:prstGeom>
-        </p:spPr>
-        <p:style>
-          <a:lnRef idx="1">
-            <a:schemeClr val="accent1"/>
-          </a:lnRef>
-          <a:fillRef idx="0">
-            <a:schemeClr val="accent1"/>
-          </a:fillRef>
-          <a:effectRef idx="0">
-            <a:schemeClr val="accent1"/>
-          </a:effectRef>
-          <a:fontRef idx="minor">
-            <a:schemeClr val="tx1"/>
-          </a:fontRef>
-        </p:style>
-      </p:cxnSp>
-      <p:sp>
-        <p:nvSpPr>
-          <p:cNvPr id="5" name="CuadroTexto 4">
-            <a:extLst>
-              <a:ext uri="{FF2B5EF4-FFF2-40B4-BE49-F238E27FC236}">
-                <a16:creationId xmlns:a16="http://schemas.microsoft.com/office/drawing/2014/main" id="{E03AC3D8-4E57-FD52-61B2-5EF717ECB7CB}"/>
-              </a:ext>
-            </a:extLst>
-          </p:cNvPr>
-          <p:cNvSpPr txBox="1"/>
-          <p:nvPr/>
-        </p:nvSpPr>
-        <p:spPr>
-          <a:xfrm>
-            <a:off x="3794760" y="1163776"/>
-            <a:ext cx="7708392" cy="369332"/>
-          </a:xfrm>
-          <a:prstGeom prst="rect">
-            <a:avLst/>
-          </a:prstGeom>
-          <a:noFill/>
-        </p:spPr>
-        <p:txBody>
-          <a:bodyPr wrap="square" rtlCol="0">
-            <a:spAutoFit/>
-          </a:bodyPr>
-          <a:lstStyle/>
-          <a:p>
-            <a:r>
-              <a:rPr lang="es-ES" b="1" u="sng" dirty="0"/>
-              <a:t>RECUENTO Y PUBLICACIÓN DE RESULTADOS</a:t>
-            </a:r>
-          </a:p>
-        </p:txBody>
-      </p:sp>
-      <p:pic>
-        <p:nvPicPr>
-          <p:cNvPr id="13" name="Imagen 12">
-            <a:extLst>
-              <a:ext uri="{FF2B5EF4-FFF2-40B4-BE49-F238E27FC236}">
-                <a16:creationId xmlns:a16="http://schemas.microsoft.com/office/drawing/2014/main" id="{872ECD64-85CE-43B7-8CA7-30BD5FA830F0}"/>
-              </a:ext>
-            </a:extLst>
-          </p:cNvPr>
-          <p:cNvPicPr>
-            <a:picLocks noChangeAspect="1"/>
-          </p:cNvPicPr>
-          <p:nvPr/>
-        </p:nvPicPr>
-        <p:blipFill>
-          <a:blip r:embed="rId3"/>
-          <a:stretch>
-            <a:fillRect/>
-          </a:stretch>
-        </p:blipFill>
-        <p:spPr>
-          <a:xfrm>
-            <a:off x="498444" y="1690187"/>
-            <a:ext cx="5428250" cy="4139753"/>
-          </a:xfrm>
-          <a:prstGeom prst="rect">
-            <a:avLst/>
-          </a:prstGeom>
-        </p:spPr>
-      </p:pic>
-      <p:pic>
-        <p:nvPicPr>
-          <p:cNvPr id="8" name="Imagen 7">
-            <a:extLst>
-              <a:ext uri="{FF2B5EF4-FFF2-40B4-BE49-F238E27FC236}">
-                <a16:creationId xmlns:a16="http://schemas.microsoft.com/office/drawing/2014/main" id="{A555D0C2-72D9-8DEE-A92C-EF5B37F59166}"/>
-              </a:ext>
-            </a:extLst>
-          </p:cNvPr>
-          <p:cNvPicPr>
-            <a:picLocks noChangeAspect="1"/>
-          </p:cNvPicPr>
-          <p:nvPr/>
-        </p:nvPicPr>
-        <p:blipFill>
-          <a:blip r:embed="rId4"/>
-          <a:stretch>
-            <a:fillRect/>
-          </a:stretch>
-        </p:blipFill>
-        <p:spPr>
-          <a:xfrm>
-            <a:off x="7376062" y="1625534"/>
-            <a:ext cx="4127090" cy="1558702"/>
-          </a:xfrm>
-          <a:prstGeom prst="rect">
-            <a:avLst/>
-          </a:prstGeom>
-        </p:spPr>
-      </p:pic>
-      <p:pic>
-        <p:nvPicPr>
-          <p:cNvPr id="11" name="Imagen 10">
-            <a:extLst>
-              <a:ext uri="{FF2B5EF4-FFF2-40B4-BE49-F238E27FC236}">
-                <a16:creationId xmlns:a16="http://schemas.microsoft.com/office/drawing/2014/main" id="{0AEA62AF-4A3E-191C-F156-C33A5792D2A6}"/>
-              </a:ext>
-            </a:extLst>
-          </p:cNvPr>
-          <p:cNvPicPr>
-            <a:picLocks noChangeAspect="1"/>
-          </p:cNvPicPr>
-          <p:nvPr/>
-        </p:nvPicPr>
-        <p:blipFill>
-          <a:blip r:embed="rId5"/>
-          <a:stretch>
-            <a:fillRect/>
-          </a:stretch>
-        </p:blipFill>
-        <p:spPr>
-          <a:xfrm>
-            <a:off x="7376062" y="3429000"/>
-            <a:ext cx="4127091" cy="1647050"/>
-          </a:xfrm>
-          <a:prstGeom prst="rect">
-            <a:avLst/>
-          </a:prstGeom>
-        </p:spPr>
-      </p:pic>
-    </p:spTree>
-    <p:extLst>
-      <p:ext uri="{BB962C8B-B14F-4D97-AF65-F5344CB8AC3E}">
-        <p14:creationId xmlns:p14="http://schemas.microsoft.com/office/powerpoint/2010/main" val="66927452"/>
-      </p:ext>
-    </p:extLst>
-  </p:cSld>
-  <p:clrMapOvr>
-    <a:masterClrMapping/>
-  </p:clrMapOvr>
-  <p:extLst>
-    <p:ext uri="{6950BFC3-D8DA-4A85-94F7-54DA5524770B}">
-      <p188:commentRel xmlns:p188="http://schemas.microsoft.com/office/powerpoint/2018/8/main" r:id="rId2"/>
-    </p:ext>
-  </p:extLst>
-</p:sld>
-</file>
-
-<file path=ppt/slides/slide15.xml><?xml version="1.0" encoding="utf-8"?>
-<p:sld xmlns:a="http://schemas.openxmlformats.org/drawingml/2006/main" xmlns:r="http://schemas.openxmlformats.org/officeDocument/2006/relationships" xmlns:p="http://schemas.openxmlformats.org/presentationml/2006/main">
-  <p:cSld>
-    <p:spTree>
-      <p:nvGrpSpPr>
-        <p:cNvPr id="1" name="">
-          <a:extLst>
-            <a:ext uri="{FF2B5EF4-FFF2-40B4-BE49-F238E27FC236}">
               <a16:creationId xmlns:a16="http://schemas.microsoft.com/office/drawing/2014/main" id="{8950B6BF-3986-5A4B-BC48-F2B734D2FCE9}"/>
             </a:ext>
           </a:extLst>
@@ -6719,7 +5893,7 @@
             <a:fld id="{3445E56A-E3DC-453B-8218-65FD7A4793C7}" type="slidenum">
               <a:rPr lang="es-ES" smtClean="0"/>
               <a:pPr algn="r"/>
-              <a:t>15</a:t>
+              <a:t>13</a:t>
             </a:fld>
             <a:endParaRPr lang="es-ES" dirty="0"/>
           </a:p>
@@ -7332,7 +6506,7 @@
 </p:sld>
 </file>
 
-<file path=ppt/slides/slide16.xml><?xml version="1.0" encoding="utf-8"?>
+<file path=ppt/slides/slide14.xml><?xml version="1.0" encoding="utf-8"?>
 <p:sld xmlns:a="http://schemas.openxmlformats.org/drawingml/2006/main" xmlns:r="http://schemas.openxmlformats.org/officeDocument/2006/relationships" xmlns:p="http://schemas.openxmlformats.org/presentationml/2006/main">
   <p:cSld>
     <p:spTree>
@@ -7473,7 +6647,7 @@
             <a:fld id="{3445E56A-E3DC-453B-8218-65FD7A4793C7}" type="slidenum">
               <a:rPr lang="es-ES" smtClean="0"/>
               <a:pPr algn="r"/>
-              <a:t>16</a:t>
+              <a:t>14</a:t>
             </a:fld>
             <a:endParaRPr lang="es-ES" dirty="0"/>
           </a:p>
@@ -8178,7 +7352,7 @@
 </p:sld>
 </file>
 
-<file path=ppt/slides/slide17.xml><?xml version="1.0" encoding="utf-8"?>
+<file path=ppt/slides/slide15.xml><?xml version="1.0" encoding="utf-8"?>
 <p:sld xmlns:a="http://schemas.openxmlformats.org/drawingml/2006/main" xmlns:r="http://schemas.openxmlformats.org/officeDocument/2006/relationships" xmlns:p="http://schemas.openxmlformats.org/presentationml/2006/main">
   <p:cSld>
     <p:bg>
@@ -11236,7 +10410,7 @@
                   <a:schemeClr val="bg1"/>
                 </a:solidFill>
               </a:rPr>
-              <a:t>MODELO DE ROLES</a:t>
+              <a:t>MODELO DE ROLES Y SEGURIDAD</a:t>
             </a:r>
           </a:p>
         </p:txBody>
@@ -11383,223 +10557,20 @@
         </p:blipFill>
         <p:spPr>
           <a:xfrm>
-            <a:off x="1477818" y="1284754"/>
-            <a:ext cx="8963166" cy="5071596"/>
+            <a:off x="223845" y="1544215"/>
+            <a:ext cx="6421844" cy="3633649"/>
           </a:xfrm>
           <a:prstGeom prst="rect">
             <a:avLst/>
           </a:prstGeom>
         </p:spPr>
       </p:pic>
-    </p:spTree>
-    <p:extLst>
-      <p:ext uri="{BB962C8B-B14F-4D97-AF65-F5344CB8AC3E}">
-        <p14:creationId xmlns:p14="http://schemas.microsoft.com/office/powerpoint/2010/main" val="4218801790"/>
-      </p:ext>
-    </p:extLst>
-  </p:cSld>
-  <p:clrMapOvr>
-    <a:masterClrMapping/>
-  </p:clrMapOvr>
-  <p:extLst>
-    <p:ext uri="{6950BFC3-D8DA-4A85-94F7-54DA5524770B}">
-      <p188:commentRel xmlns:p188="http://schemas.microsoft.com/office/powerpoint/2018/8/main" r:id="rId2"/>
-    </p:ext>
-  </p:extLst>
-</p:sld>
-</file>
-
-<file path=ppt/slides/slide7.xml><?xml version="1.0" encoding="utf-8"?>
-<p:sld xmlns:a="http://schemas.openxmlformats.org/drawingml/2006/main" xmlns:r="http://schemas.openxmlformats.org/officeDocument/2006/relationships" xmlns:p="http://schemas.openxmlformats.org/presentationml/2006/main">
-  <p:cSld>
-    <p:spTree>
-      <p:nvGrpSpPr>
-        <p:cNvPr id="1" name="">
-          <a:extLst>
-            <a:ext uri="{FF2B5EF4-FFF2-40B4-BE49-F238E27FC236}">
-              <a16:creationId xmlns:a16="http://schemas.microsoft.com/office/drawing/2014/main" id="{8334DC24-0E27-9D63-7752-23AE901FCEF2}"/>
-            </a:ext>
-          </a:extLst>
-        </p:cNvPr>
-        <p:cNvGrpSpPr/>
-        <p:nvPr/>
-      </p:nvGrpSpPr>
-      <p:grpSpPr>
-        <a:xfrm>
-          <a:off x="0" y="0"/>
-          <a:ext cx="0" cy="0"/>
-          <a:chOff x="0" y="0"/>
-          <a:chExt cx="0" cy="0"/>
-        </a:xfrm>
-      </p:grpSpPr>
-      <p:sp>
-        <p:nvSpPr>
-          <p:cNvPr id="2" name="Título 1">
-            <a:extLst>
-              <a:ext uri="{FF2B5EF4-FFF2-40B4-BE49-F238E27FC236}">
-                <a16:creationId xmlns:a16="http://schemas.microsoft.com/office/drawing/2014/main" id="{FECFD2FB-F0B8-89F7-B9DB-39FC43F797EE}"/>
-              </a:ext>
-            </a:extLst>
-          </p:cNvPr>
-          <p:cNvSpPr>
-            <a:spLocks noGrp="1"/>
-          </p:cNvSpPr>
-          <p:nvPr>
-            <p:ph type="ctrTitle"/>
-          </p:nvPr>
-        </p:nvSpPr>
-        <p:spPr>
-          <a:xfrm>
-            <a:off x="1547091" y="489524"/>
-            <a:ext cx="9097818" cy="609600"/>
-          </a:xfrm>
-          <a:solidFill>
-            <a:srgbClr val="1F4E79"/>
-          </a:solidFill>
-        </p:spPr>
-        <p:txBody>
-          <a:bodyPr>
-            <a:noAutofit/>
-          </a:bodyPr>
-          <a:lstStyle/>
-          <a:p>
-            <a:r>
-              <a:rPr lang="es-ES" sz="4400" dirty="0">
-                <a:solidFill>
-                  <a:schemeClr val="bg1"/>
-                </a:solidFill>
-              </a:rPr>
-              <a:t>SEGURIDAD DEL PROCESO ELECTORAL</a:t>
-            </a:r>
-          </a:p>
-        </p:txBody>
-      </p:sp>
-      <p:sp>
-        <p:nvSpPr>
-          <p:cNvPr id="3" name="Subtítulo 2">
-            <a:extLst>
-              <a:ext uri="{FF2B5EF4-FFF2-40B4-BE49-F238E27FC236}">
-                <a16:creationId xmlns:a16="http://schemas.microsoft.com/office/drawing/2014/main" id="{DF39A1B1-A75D-8C23-D34C-24175835FEE1}"/>
-              </a:ext>
-            </a:extLst>
-          </p:cNvPr>
-          <p:cNvSpPr>
-            <a:spLocks noGrp="1"/>
-          </p:cNvSpPr>
-          <p:nvPr>
-            <p:ph type="subTitle" idx="1"/>
-          </p:nvPr>
-        </p:nvSpPr>
-        <p:spPr>
-          <a:xfrm>
-            <a:off x="1477818" y="257128"/>
-            <a:ext cx="9144000" cy="223161"/>
-          </a:xfrm>
-        </p:spPr>
-        <p:txBody>
-          <a:bodyPr>
-            <a:noAutofit/>
-          </a:bodyPr>
-          <a:lstStyle/>
-          <a:p>
-            <a:r>
-              <a:rPr lang="es-ES" sz="1200" dirty="0">
-                <a:latin typeface="Aptos" panose="020B0004020202020204" pitchFamily="34" charset="0"/>
-              </a:rPr>
-              <a:t>TeleVotApp – Sistema de Votación Telemática Certificada</a:t>
-            </a:r>
-          </a:p>
-        </p:txBody>
-      </p:sp>
-      <p:sp>
-        <p:nvSpPr>
-          <p:cNvPr id="4" name="Marcador de pie de página 3">
-            <a:extLst>
-              <a:ext uri="{FF2B5EF4-FFF2-40B4-BE49-F238E27FC236}">
-                <a16:creationId xmlns:a16="http://schemas.microsoft.com/office/drawing/2014/main" id="{05540954-E4DB-673D-EA4F-C7EBA2A500B4}"/>
-              </a:ext>
-            </a:extLst>
-          </p:cNvPr>
-          <p:cNvSpPr>
-            <a:spLocks noGrp="1"/>
-          </p:cNvSpPr>
-          <p:nvPr>
-            <p:ph type="ftr" sz="quarter" idx="11"/>
-          </p:nvPr>
-        </p:nvSpPr>
-        <p:spPr>
-          <a:xfrm>
-            <a:off x="258618" y="6356350"/>
-            <a:ext cx="11582400" cy="365125"/>
-          </a:xfrm>
-          <a:solidFill>
-            <a:schemeClr val="bg1">
-              <a:lumMod val="95000"/>
-            </a:schemeClr>
-          </a:solidFill>
-        </p:spPr>
-        <p:txBody>
-          <a:bodyPr/>
-          <a:lstStyle/>
-          <a:p>
-            <a:pPr algn="r"/>
-            <a:r>
-              <a:rPr lang="es-ES" dirty="0"/>
-              <a:t>       Samir Alonso García  |  TFG Ingeniería informática                                                                                                                                                                                                                                    </a:t>
-            </a:r>
-            <a:fld id="{3445E56A-E3DC-453B-8218-65FD7A4793C7}" type="slidenum">
-              <a:rPr lang="es-ES" smtClean="0"/>
-              <a:pPr algn="r"/>
-              <a:t>7</a:t>
-            </a:fld>
-            <a:endParaRPr lang="es-ES" dirty="0"/>
-          </a:p>
-        </p:txBody>
-      </p:sp>
-      <p:cxnSp>
-        <p:nvCxnSpPr>
-          <p:cNvPr id="6" name="Conector recto 5">
-            <a:extLst>
-              <a:ext uri="{FF2B5EF4-FFF2-40B4-BE49-F238E27FC236}">
-                <a16:creationId xmlns:a16="http://schemas.microsoft.com/office/drawing/2014/main" id="{70C80CD2-79D7-2699-EE88-548812B546B7}"/>
-              </a:ext>
-            </a:extLst>
-          </p:cNvPr>
-          <p:cNvCxnSpPr>
-            <a:cxnSpLocks/>
-          </p:cNvCxnSpPr>
-          <p:nvPr/>
-        </p:nvCxnSpPr>
-        <p:spPr>
-          <a:xfrm>
-            <a:off x="0" y="1163776"/>
-            <a:ext cx="12192000" cy="0"/>
-          </a:xfrm>
-          <a:prstGeom prst="line">
-            <a:avLst/>
-          </a:prstGeom>
-        </p:spPr>
-        <p:style>
-          <a:lnRef idx="1">
-            <a:schemeClr val="accent1"/>
-          </a:lnRef>
-          <a:fillRef idx="0">
-            <a:schemeClr val="accent1"/>
-          </a:fillRef>
-          <a:effectRef idx="0">
-            <a:schemeClr val="accent1"/>
-          </a:effectRef>
-          <a:fontRef idx="minor">
-            <a:schemeClr val="tx1"/>
-          </a:fontRef>
-        </p:style>
-      </p:cxnSp>
-      <p:sp>
-        <p:nvSpPr>
-          <p:cNvPr id="5" name="Rectángulo: esquinas redondeadas 4">
-            <a:extLst>
-              <a:ext uri="{FF2B5EF4-FFF2-40B4-BE49-F238E27FC236}">
-                <a16:creationId xmlns:a16="http://schemas.microsoft.com/office/drawing/2014/main" id="{60F71E1E-14B0-36AC-19FE-78D794354028}"/>
+      <p:sp>
+        <p:nvSpPr>
+          <p:cNvPr id="38" name="Rectángulo: esquinas redondeadas 37">
+            <a:extLst>
+              <a:ext uri="{FF2B5EF4-FFF2-40B4-BE49-F238E27FC236}">
+                <a16:creationId xmlns:a16="http://schemas.microsoft.com/office/drawing/2014/main" id="{5CEEEEA6-861D-42EC-1155-F2A89092F3EE}"/>
               </a:ext>
             </a:extLst>
           </p:cNvPr>
@@ -11608,7 +10579,7 @@
         </p:nvSpPr>
         <p:spPr>
           <a:xfrm>
-            <a:off x="1597873" y="1649570"/>
+            <a:off x="6000190" y="1276364"/>
             <a:ext cx="2091390" cy="951337"/>
           </a:xfrm>
           <a:prstGeom prst="roundRect">
@@ -11676,10 +10647,10 @@
       </p:sp>
       <p:sp>
         <p:nvSpPr>
-          <p:cNvPr id="7" name="CuadroTexto 6">
-            <a:extLst>
-              <a:ext uri="{FF2B5EF4-FFF2-40B4-BE49-F238E27FC236}">
-                <a16:creationId xmlns:a16="http://schemas.microsoft.com/office/drawing/2014/main" id="{AC18BB7F-5AE0-EC17-7EEB-C9059E57EC71}"/>
+          <p:cNvPr id="40" name="CuadroTexto 39">
+            <a:extLst>
+              <a:ext uri="{FF2B5EF4-FFF2-40B4-BE49-F238E27FC236}">
+                <a16:creationId xmlns:a16="http://schemas.microsoft.com/office/drawing/2014/main" id="{144B79F4-B887-9F2C-69CF-6434D3BAF6A5}"/>
               </a:ext>
             </a:extLst>
           </p:cNvPr>
@@ -11688,7 +10659,7 @@
         </p:nvSpPr>
         <p:spPr>
           <a:xfrm>
-            <a:off x="1662526" y="1751798"/>
+            <a:off x="6064843" y="1378592"/>
             <a:ext cx="1958109" cy="646331"/>
           </a:xfrm>
           <a:prstGeom prst="rect">
@@ -11716,10 +10687,10 @@
       </p:sp>
       <p:sp>
         <p:nvSpPr>
-          <p:cNvPr id="8" name="Rectángulo: esquinas redondeadas 7">
-            <a:extLst>
-              <a:ext uri="{FF2B5EF4-FFF2-40B4-BE49-F238E27FC236}">
-                <a16:creationId xmlns:a16="http://schemas.microsoft.com/office/drawing/2014/main" id="{6C5C6A8C-7266-1054-3675-21D403ECF2C2}"/>
+          <p:cNvPr id="42" name="Rectángulo: esquinas redondeadas 41">
+            <a:extLst>
+              <a:ext uri="{FF2B5EF4-FFF2-40B4-BE49-F238E27FC236}">
+                <a16:creationId xmlns:a16="http://schemas.microsoft.com/office/drawing/2014/main" id="{BFD6A3C4-21FC-BBBF-ACA5-3C263BD6F88D}"/>
               </a:ext>
             </a:extLst>
           </p:cNvPr>
@@ -11728,7 +10699,7 @@
         </p:nvSpPr>
         <p:spPr>
           <a:xfrm>
-            <a:off x="1597873" y="3086700"/>
+            <a:off x="6000190" y="2713494"/>
             <a:ext cx="2091390" cy="951337"/>
           </a:xfrm>
           <a:prstGeom prst="roundRect">
@@ -11796,10 +10767,10 @@
       </p:sp>
       <p:sp>
         <p:nvSpPr>
-          <p:cNvPr id="9" name="Rectángulo: esquinas redondeadas 8">
-            <a:extLst>
-              <a:ext uri="{FF2B5EF4-FFF2-40B4-BE49-F238E27FC236}">
-                <a16:creationId xmlns:a16="http://schemas.microsoft.com/office/drawing/2014/main" id="{8A30691C-6AED-C9E9-45DD-732AC3DD3F03}"/>
+          <p:cNvPr id="44" name="Rectángulo: esquinas redondeadas 43">
+            <a:extLst>
+              <a:ext uri="{FF2B5EF4-FFF2-40B4-BE49-F238E27FC236}">
+                <a16:creationId xmlns:a16="http://schemas.microsoft.com/office/drawing/2014/main" id="{751350EB-A7AB-A0E8-AE94-4E0EFEFA0FA1}"/>
               </a:ext>
             </a:extLst>
           </p:cNvPr>
@@ -11808,7 +10779,7 @@
         </p:nvSpPr>
         <p:spPr>
           <a:xfrm>
-            <a:off x="1595886" y="4523830"/>
+            <a:off x="5998203" y="4150624"/>
             <a:ext cx="2091390" cy="951337"/>
           </a:xfrm>
           <a:prstGeom prst="roundRect">
@@ -11876,10 +10847,10 @@
       </p:sp>
       <p:sp>
         <p:nvSpPr>
-          <p:cNvPr id="10" name="CuadroTexto 9">
-            <a:extLst>
-              <a:ext uri="{FF2B5EF4-FFF2-40B4-BE49-F238E27FC236}">
-                <a16:creationId xmlns:a16="http://schemas.microsoft.com/office/drawing/2014/main" id="{B2666165-574C-3072-AB90-F68C44B39900}"/>
+          <p:cNvPr id="46" name="CuadroTexto 45">
+            <a:extLst>
+              <a:ext uri="{FF2B5EF4-FFF2-40B4-BE49-F238E27FC236}">
+                <a16:creationId xmlns:a16="http://schemas.microsoft.com/office/drawing/2014/main" id="{411AC41B-0DDC-188B-D664-CFF17D4C54E1}"/>
               </a:ext>
             </a:extLst>
           </p:cNvPr>
@@ -11888,7 +10859,7 @@
         </p:nvSpPr>
         <p:spPr>
           <a:xfrm>
-            <a:off x="1838017" y="3195611"/>
+            <a:off x="6240334" y="2822405"/>
             <a:ext cx="1958109" cy="369332"/>
           </a:xfrm>
           <a:prstGeom prst="rect">
@@ -11911,10 +10882,10 @@
       </p:sp>
       <p:sp>
         <p:nvSpPr>
-          <p:cNvPr id="11" name="CuadroTexto 10">
-            <a:extLst>
-              <a:ext uri="{FF2B5EF4-FFF2-40B4-BE49-F238E27FC236}">
-                <a16:creationId xmlns:a16="http://schemas.microsoft.com/office/drawing/2014/main" id="{D61D61BF-D21E-D85B-0CFB-FFC5E87800D4}"/>
+          <p:cNvPr id="48" name="CuadroTexto 47">
+            <a:extLst>
+              <a:ext uri="{FF2B5EF4-FFF2-40B4-BE49-F238E27FC236}">
+                <a16:creationId xmlns:a16="http://schemas.microsoft.com/office/drawing/2014/main" id="{ACAC3E95-D755-9461-6BE6-9795A7524765}"/>
               </a:ext>
             </a:extLst>
           </p:cNvPr>
@@ -11923,7 +10894,7 @@
         </p:nvSpPr>
         <p:spPr>
           <a:xfrm>
-            <a:off x="2022745" y="4612922"/>
+            <a:off x="6425062" y="4239716"/>
             <a:ext cx="1958109" cy="369332"/>
           </a:xfrm>
           <a:prstGeom prst="rect">
@@ -11944,12 +10915,120 @@
           </a:p>
         </p:txBody>
       </p:sp>
-      <p:sp>
-        <p:nvSpPr>
-          <p:cNvPr id="12" name="Rectángulo: esquinas redondeadas 11">
-            <a:extLst>
-              <a:ext uri="{FF2B5EF4-FFF2-40B4-BE49-F238E27FC236}">
-                <a16:creationId xmlns:a16="http://schemas.microsoft.com/office/drawing/2014/main" id="{3E077C93-404B-CF65-98F4-FAF3DAB4FF58}"/>
+      <p:pic>
+        <p:nvPicPr>
+          <p:cNvPr id="50" name="Gráfico 49" descr="Bloquear contorno">
+            <a:extLst>
+              <a:ext uri="{FF2B5EF4-FFF2-40B4-BE49-F238E27FC236}">
+                <a16:creationId xmlns:a16="http://schemas.microsoft.com/office/drawing/2014/main" id="{1185EE04-0F4E-50DF-C9FB-30BA15648F6C}"/>
+              </a:ext>
+            </a:extLst>
+          </p:cNvPr>
+          <p:cNvPicPr>
+            <a:picLocks noChangeAspect="1"/>
+          </p:cNvPicPr>
+          <p:nvPr/>
+        </p:nvPicPr>
+        <p:blipFill>
+          <a:blip>
+            <a:extLst>
+              <a:ext uri="{96DAC541-7B7A-43D3-8B79-37D633B846F1}">
+                <asvg:svgBlip xmlns:asvg="http://schemas.microsoft.com/office/drawing/2016/SVG/main" r:embed="rId4"/>
+              </a:ext>
+            </a:extLst>
+          </a:blip>
+          <a:stretch>
+            <a:fillRect/>
+          </a:stretch>
+        </p:blipFill>
+        <p:spPr>
+          <a:xfrm>
+            <a:off x="6767227" y="1678185"/>
+            <a:ext cx="553340" cy="553340"/>
+          </a:xfrm>
+          <a:prstGeom prst="rect">
+            <a:avLst/>
+          </a:prstGeom>
+        </p:spPr>
+      </p:pic>
+      <p:pic>
+        <p:nvPicPr>
+          <p:cNvPr id="52" name="Gráfico 51" descr="Rollo de diplomas contorno">
+            <a:extLst>
+              <a:ext uri="{FF2B5EF4-FFF2-40B4-BE49-F238E27FC236}">
+                <a16:creationId xmlns:a16="http://schemas.microsoft.com/office/drawing/2014/main" id="{835125F5-4302-E494-714D-45493E6ACCE1}"/>
+              </a:ext>
+            </a:extLst>
+          </p:cNvPr>
+          <p:cNvPicPr>
+            <a:picLocks noChangeAspect="1"/>
+          </p:cNvPicPr>
+          <p:nvPr/>
+        </p:nvPicPr>
+        <p:blipFill>
+          <a:blip>
+            <a:extLst>
+              <a:ext uri="{96DAC541-7B7A-43D3-8B79-37D633B846F1}">
+                <asvg:svgBlip xmlns:asvg="http://schemas.microsoft.com/office/drawing/2016/SVG/main" r:embed="rId5"/>
+              </a:ext>
+            </a:extLst>
+          </a:blip>
+          <a:stretch>
+            <a:fillRect/>
+          </a:stretch>
+        </p:blipFill>
+        <p:spPr>
+          <a:xfrm>
+            <a:off x="6723231" y="3087555"/>
+            <a:ext cx="641332" cy="641332"/>
+          </a:xfrm>
+          <a:prstGeom prst="rect">
+            <a:avLst/>
+          </a:prstGeom>
+        </p:spPr>
+      </p:pic>
+      <p:pic>
+        <p:nvPicPr>
+          <p:cNvPr id="54" name="Gráfico 53" descr="Completado contorno">
+            <a:extLst>
+              <a:ext uri="{FF2B5EF4-FFF2-40B4-BE49-F238E27FC236}">
+                <a16:creationId xmlns:a16="http://schemas.microsoft.com/office/drawing/2014/main" id="{F6B4E2DB-AE47-5C30-1F57-16F251924257}"/>
+              </a:ext>
+            </a:extLst>
+          </p:cNvPr>
+          <p:cNvPicPr>
+            <a:picLocks noChangeAspect="1"/>
+          </p:cNvPicPr>
+          <p:nvPr/>
+        </p:nvPicPr>
+        <p:blipFill>
+          <a:blip>
+            <a:extLst>
+              <a:ext uri="{96DAC541-7B7A-43D3-8B79-37D633B846F1}">
+                <asvg:svgBlip xmlns:asvg="http://schemas.microsoft.com/office/drawing/2016/SVG/main" r:embed="rId6"/>
+              </a:ext>
+            </a:extLst>
+          </a:blip>
+          <a:stretch>
+            <a:fillRect/>
+          </a:stretch>
+        </p:blipFill>
+        <p:spPr>
+          <a:xfrm>
+            <a:off x="6656894" y="4378024"/>
+            <a:ext cx="914400" cy="914400"/>
+          </a:xfrm>
+          <a:prstGeom prst="rect">
+            <a:avLst/>
+          </a:prstGeom>
+        </p:spPr>
+      </p:pic>
+      <p:sp>
+        <p:nvSpPr>
+          <p:cNvPr id="56" name="Rectángulo: esquinas redondeadas 55">
+            <a:extLst>
+              <a:ext uri="{FF2B5EF4-FFF2-40B4-BE49-F238E27FC236}">
+                <a16:creationId xmlns:a16="http://schemas.microsoft.com/office/drawing/2014/main" id="{6CEF7A90-92FD-9150-3CE2-F7F7CAA9E5A4}"/>
               </a:ext>
             </a:extLst>
           </p:cNvPr>
@@ -11958,8 +11037,8 @@
         </p:nvSpPr>
         <p:spPr>
           <a:xfrm>
-            <a:off x="4761335" y="1637568"/>
-            <a:ext cx="5019965" cy="951337"/>
+            <a:off x="8681644" y="1285204"/>
+            <a:ext cx="2874376" cy="951337"/>
           </a:xfrm>
           <a:prstGeom prst="roundRect">
             <a:avLst/>
@@ -12020,10 +11099,10 @@
       </p:sp>
       <p:sp>
         <p:nvSpPr>
-          <p:cNvPr id="13" name="Rectángulo: esquinas redondeadas 12">
-            <a:extLst>
-              <a:ext uri="{FF2B5EF4-FFF2-40B4-BE49-F238E27FC236}">
-                <a16:creationId xmlns:a16="http://schemas.microsoft.com/office/drawing/2014/main" id="{2C4DBAEA-2E15-211E-46E0-E8B776CDB875}"/>
+          <p:cNvPr id="58" name="Rectángulo: esquinas redondeadas 57">
+            <a:extLst>
+              <a:ext uri="{FF2B5EF4-FFF2-40B4-BE49-F238E27FC236}">
+                <a16:creationId xmlns:a16="http://schemas.microsoft.com/office/drawing/2014/main" id="{432B2D97-8ED1-7765-8472-24CF3437BA4D}"/>
               </a:ext>
             </a:extLst>
           </p:cNvPr>
@@ -12032,8 +11111,8 @@
         </p:nvSpPr>
         <p:spPr>
           <a:xfrm>
-            <a:off x="4761335" y="3045622"/>
-            <a:ext cx="5019965" cy="951337"/>
+            <a:off x="8681644" y="2693258"/>
+            <a:ext cx="2874376" cy="951337"/>
           </a:xfrm>
           <a:prstGeom prst="roundRect">
             <a:avLst/>
@@ -12094,10 +11173,10 @@
       </p:sp>
       <p:sp>
         <p:nvSpPr>
-          <p:cNvPr id="14" name="Rectángulo: esquinas redondeadas 13">
-            <a:extLst>
-              <a:ext uri="{FF2B5EF4-FFF2-40B4-BE49-F238E27FC236}">
-                <a16:creationId xmlns:a16="http://schemas.microsoft.com/office/drawing/2014/main" id="{67FF3E9F-5104-713A-42D7-46C57ED3B322}"/>
+          <p:cNvPr id="60" name="Rectángulo: esquinas redondeadas 59">
+            <a:extLst>
+              <a:ext uri="{FF2B5EF4-FFF2-40B4-BE49-F238E27FC236}">
+                <a16:creationId xmlns:a16="http://schemas.microsoft.com/office/drawing/2014/main" id="{DDCAA6F6-622D-41D3-E3DE-00E926E8EF0A}"/>
               </a:ext>
             </a:extLst>
           </p:cNvPr>
@@ -12106,8 +11185,8 @@
         </p:nvSpPr>
         <p:spPr>
           <a:xfrm>
-            <a:off x="4761335" y="4538736"/>
-            <a:ext cx="5019966" cy="951337"/>
+            <a:off x="8681643" y="4186372"/>
+            <a:ext cx="2874377" cy="951337"/>
           </a:xfrm>
           <a:prstGeom prst="roundRect">
             <a:avLst/>
@@ -12168,10 +11247,10 @@
       </p:sp>
       <p:sp>
         <p:nvSpPr>
-          <p:cNvPr id="15" name="CuadroTexto 14">
-            <a:extLst>
-              <a:ext uri="{FF2B5EF4-FFF2-40B4-BE49-F238E27FC236}">
-                <a16:creationId xmlns:a16="http://schemas.microsoft.com/office/drawing/2014/main" id="{50E9E227-5778-D7E3-CE17-A27D516CEAAB}"/>
+          <p:cNvPr id="62" name="CuadroTexto 61">
+            <a:extLst>
+              <a:ext uri="{FF2B5EF4-FFF2-40B4-BE49-F238E27FC236}">
+                <a16:creationId xmlns:a16="http://schemas.microsoft.com/office/drawing/2014/main" id="{8409FA1B-EFBF-24AE-74E8-573E310E3CA3}"/>
               </a:ext>
             </a:extLst>
           </p:cNvPr>
@@ -12180,7 +11259,7 @@
         </p:nvSpPr>
         <p:spPr>
           <a:xfrm>
-            <a:off x="5158499" y="1751798"/>
+            <a:off x="9078807" y="1399434"/>
             <a:ext cx="5809673" cy="738664"/>
           </a:xfrm>
           <a:prstGeom prst="rect">
@@ -12233,10 +11312,10 @@
       </p:sp>
       <p:sp>
         <p:nvSpPr>
-          <p:cNvPr id="16" name="CuadroTexto 15">
-            <a:extLst>
-              <a:ext uri="{FF2B5EF4-FFF2-40B4-BE49-F238E27FC236}">
-                <a16:creationId xmlns:a16="http://schemas.microsoft.com/office/drawing/2014/main" id="{7E92CF24-17FE-B5FA-134C-6DAAE7F31AF8}"/>
+          <p:cNvPr id="64" name="CuadroTexto 63">
+            <a:extLst>
+              <a:ext uri="{FF2B5EF4-FFF2-40B4-BE49-F238E27FC236}">
+                <a16:creationId xmlns:a16="http://schemas.microsoft.com/office/drawing/2014/main" id="{DB85B500-E501-B85E-BE1B-310034A18CD3}"/>
               </a:ext>
             </a:extLst>
           </p:cNvPr>
@@ -12245,8 +11324,8 @@
         </p:nvSpPr>
         <p:spPr>
           <a:xfrm>
-            <a:off x="5158499" y="3168073"/>
-            <a:ext cx="5454074" cy="738664"/>
+            <a:off x="9078807" y="2815709"/>
+            <a:ext cx="3122942" cy="738664"/>
           </a:xfrm>
           <a:prstGeom prst="rect">
             <a:avLst/>
@@ -12298,10 +11377,10 @@
       </p:sp>
       <p:sp>
         <p:nvSpPr>
-          <p:cNvPr id="17" name="CuadroTexto 16">
-            <a:extLst>
-              <a:ext uri="{FF2B5EF4-FFF2-40B4-BE49-F238E27FC236}">
-                <a16:creationId xmlns:a16="http://schemas.microsoft.com/office/drawing/2014/main" id="{98424F8B-6ADE-A141-4816-6E650830CE4D}"/>
+          <p:cNvPr id="66" name="CuadroTexto 65">
+            <a:extLst>
+              <a:ext uri="{FF2B5EF4-FFF2-40B4-BE49-F238E27FC236}">
+                <a16:creationId xmlns:a16="http://schemas.microsoft.com/office/drawing/2014/main" id="{0FF3A43D-C92C-361D-B49D-069A734B9731}"/>
               </a:ext>
             </a:extLst>
           </p:cNvPr>
@@ -12310,7 +11389,7 @@
         </p:nvSpPr>
         <p:spPr>
           <a:xfrm>
-            <a:off x="5158498" y="4636206"/>
+            <a:off x="9078806" y="4283842"/>
             <a:ext cx="5546437" cy="738664"/>
           </a:xfrm>
           <a:prstGeom prst="rect">
@@ -12361,155 +11440,10 @@
           </a:p>
         </p:txBody>
       </p:sp>
-      <p:sp>
-        <p:nvSpPr>
-          <p:cNvPr id="18" name="CuadroTexto 17">
-            <a:extLst>
-              <a:ext uri="{FF2B5EF4-FFF2-40B4-BE49-F238E27FC236}">
-                <a16:creationId xmlns:a16="http://schemas.microsoft.com/office/drawing/2014/main" id="{175F19C3-216E-9F1A-BE42-84BE3C3A7EFA}"/>
-              </a:ext>
-            </a:extLst>
-          </p:cNvPr>
-          <p:cNvSpPr txBox="1"/>
-          <p:nvPr/>
-        </p:nvSpPr>
-        <p:spPr>
-          <a:xfrm>
-            <a:off x="1838017" y="5943026"/>
-            <a:ext cx="10086109" cy="261610"/>
-          </a:xfrm>
-          <a:prstGeom prst="rect">
-            <a:avLst/>
-          </a:prstGeom>
-          <a:noFill/>
-        </p:spPr>
-        <p:txBody>
-          <a:bodyPr wrap="square" rtlCol="0">
-            <a:spAutoFit/>
-          </a:bodyPr>
-          <a:lstStyle/>
-          <a:p>
-            <a:r>
-              <a:rPr lang="es-ES" sz="1100" dirty="0">
-                <a:latin typeface="Aptos" panose="020B0004020202020204" pitchFamily="34" charset="0"/>
-              </a:rPr>
-              <a:t>La seguridad del proceso electoral se apoya en mecanismos de autenticación, firma digital y validación basados en certificados.</a:t>
-            </a:r>
-          </a:p>
-        </p:txBody>
-      </p:sp>
-      <p:pic>
-        <p:nvPicPr>
-          <p:cNvPr id="20" name="Gráfico 19" descr="Bloquear contorno">
-            <a:extLst>
-              <a:ext uri="{FF2B5EF4-FFF2-40B4-BE49-F238E27FC236}">
-                <a16:creationId xmlns:a16="http://schemas.microsoft.com/office/drawing/2014/main" id="{F1EC0180-9239-07EB-6286-FB60EE92158C}"/>
-              </a:ext>
-            </a:extLst>
-          </p:cNvPr>
-          <p:cNvPicPr>
-            <a:picLocks noChangeAspect="1"/>
-          </p:cNvPicPr>
-          <p:nvPr/>
-        </p:nvPicPr>
-        <p:blipFill>
-          <a:blip>
-            <a:extLst>
-              <a:ext uri="{96DAC541-7B7A-43D3-8B79-37D633B846F1}">
-                <asvg:svgBlip xmlns:asvg="http://schemas.microsoft.com/office/drawing/2016/SVG/main" r:embed="rId3"/>
-              </a:ext>
-            </a:extLst>
-          </a:blip>
-          <a:stretch>
-            <a:fillRect/>
-          </a:stretch>
-        </p:blipFill>
-        <p:spPr>
-          <a:xfrm>
-            <a:off x="2364910" y="2051391"/>
-            <a:ext cx="553340" cy="553340"/>
-          </a:xfrm>
-          <a:prstGeom prst="rect">
-            <a:avLst/>
-          </a:prstGeom>
-        </p:spPr>
-      </p:pic>
-      <p:pic>
-        <p:nvPicPr>
-          <p:cNvPr id="22" name="Gráfico 21" descr="Rollo de diplomas contorno">
-            <a:extLst>
-              <a:ext uri="{FF2B5EF4-FFF2-40B4-BE49-F238E27FC236}">
-                <a16:creationId xmlns:a16="http://schemas.microsoft.com/office/drawing/2014/main" id="{F5FFD85F-6B43-C21E-32E6-2F116168382F}"/>
-              </a:ext>
-            </a:extLst>
-          </p:cNvPr>
-          <p:cNvPicPr>
-            <a:picLocks noChangeAspect="1"/>
-          </p:cNvPicPr>
-          <p:nvPr/>
-        </p:nvPicPr>
-        <p:blipFill>
-          <a:blip>
-            <a:extLst>
-              <a:ext uri="{96DAC541-7B7A-43D3-8B79-37D633B846F1}">
-                <asvg:svgBlip xmlns:asvg="http://schemas.microsoft.com/office/drawing/2016/SVG/main" r:embed="rId4"/>
-              </a:ext>
-            </a:extLst>
-          </a:blip>
-          <a:stretch>
-            <a:fillRect/>
-          </a:stretch>
-        </p:blipFill>
-        <p:spPr>
-          <a:xfrm>
-            <a:off x="2320914" y="3460761"/>
-            <a:ext cx="641332" cy="641332"/>
-          </a:xfrm>
-          <a:prstGeom prst="rect">
-            <a:avLst/>
-          </a:prstGeom>
-        </p:spPr>
-      </p:pic>
-      <p:pic>
-        <p:nvPicPr>
-          <p:cNvPr id="24" name="Gráfico 23" descr="Completado contorno">
-            <a:extLst>
-              <a:ext uri="{FF2B5EF4-FFF2-40B4-BE49-F238E27FC236}">
-                <a16:creationId xmlns:a16="http://schemas.microsoft.com/office/drawing/2014/main" id="{EC544670-72ED-147D-AB98-685236FF801B}"/>
-              </a:ext>
-            </a:extLst>
-          </p:cNvPr>
-          <p:cNvPicPr>
-            <a:picLocks noChangeAspect="1"/>
-          </p:cNvPicPr>
-          <p:nvPr/>
-        </p:nvPicPr>
-        <p:blipFill>
-          <a:blip>
-            <a:extLst>
-              <a:ext uri="{96DAC541-7B7A-43D3-8B79-37D633B846F1}">
-                <asvg:svgBlip xmlns:asvg="http://schemas.microsoft.com/office/drawing/2016/SVG/main" r:embed="rId5"/>
-              </a:ext>
-            </a:extLst>
-          </a:blip>
-          <a:stretch>
-            <a:fillRect/>
-          </a:stretch>
-        </p:blipFill>
-        <p:spPr>
-          <a:xfrm>
-            <a:off x="2254577" y="4751230"/>
-            <a:ext cx="914400" cy="914400"/>
-          </a:xfrm>
-          <a:prstGeom prst="rect">
-            <a:avLst/>
-          </a:prstGeom>
-        </p:spPr>
-      </p:pic>
     </p:spTree>
     <p:extLst>
       <p:ext uri="{BB962C8B-B14F-4D97-AF65-F5344CB8AC3E}">
-        <p14:creationId xmlns:p14="http://schemas.microsoft.com/office/powerpoint/2010/main" val="24893062"/>
+        <p14:creationId xmlns:p14="http://schemas.microsoft.com/office/powerpoint/2010/main" val="4218801790"/>
       </p:ext>
     </p:extLst>
   </p:cSld>
@@ -12524,7 +11458,7 @@
 </p:sld>
 </file>
 
-<file path=ppt/slides/slide8.xml><?xml version="1.0" encoding="utf-8"?>
+<file path=ppt/slides/slide7.xml><?xml version="1.0" encoding="utf-8"?>
 <p:sld xmlns:a="http://schemas.openxmlformats.org/drawingml/2006/main" xmlns:r="http://schemas.openxmlformats.org/officeDocument/2006/relationships" xmlns:p="http://schemas.openxmlformats.org/presentationml/2006/main">
   <p:cSld>
     <p:spTree>
@@ -12532,7 +11466,7 @@
         <p:cNvPr id="1" name="">
           <a:extLst>
             <a:ext uri="{FF2B5EF4-FFF2-40B4-BE49-F238E27FC236}">
-              <a16:creationId xmlns:a16="http://schemas.microsoft.com/office/drawing/2014/main" id="{57F45A8B-52BA-099F-6B31-2A1049CFFB96}"/>
+              <a16:creationId xmlns:a16="http://schemas.microsoft.com/office/drawing/2014/main" id="{8AE7A17F-1FEC-0683-E728-0295C65E3B87}"/>
             </a:ext>
           </a:extLst>
         </p:cNvPr>
@@ -12552,7 +11486,7 @@
           <p:cNvPr id="2" name="Título 1">
             <a:extLst>
               <a:ext uri="{FF2B5EF4-FFF2-40B4-BE49-F238E27FC236}">
-                <a16:creationId xmlns:a16="http://schemas.microsoft.com/office/drawing/2014/main" id="{E2AF54E9-9F9B-B9CD-5576-0842647BB9C8}"/>
+                <a16:creationId xmlns:a16="http://schemas.microsoft.com/office/drawing/2014/main" id="{3553FFDD-DFBF-BB49-68A7-5D12C8C1BF6D}"/>
               </a:ext>
             </a:extLst>
           </p:cNvPr>
@@ -12584,7 +11518,7 @@
                   <a:schemeClr val="bg1"/>
                 </a:solidFill>
               </a:rPr>
-              <a:t>DISEÑO DE DATOS</a:t>
+              <a:t>TECNOLOGÍAS USADAS</a:t>
             </a:r>
           </a:p>
         </p:txBody>
@@ -12594,7 +11528,7 @@
           <p:cNvPr id="3" name="Subtítulo 2">
             <a:extLst>
               <a:ext uri="{FF2B5EF4-FFF2-40B4-BE49-F238E27FC236}">
-                <a16:creationId xmlns:a16="http://schemas.microsoft.com/office/drawing/2014/main" id="{E0F7633C-D601-E20D-C3CB-89A879F99014}"/>
+                <a16:creationId xmlns:a16="http://schemas.microsoft.com/office/drawing/2014/main" id="{BF553C64-974B-742B-AB6C-841361121745}"/>
               </a:ext>
             </a:extLst>
           </p:cNvPr>
@@ -12631,7 +11565,7 @@
           <p:cNvPr id="4" name="Marcador de pie de página 3">
             <a:extLst>
               <a:ext uri="{FF2B5EF4-FFF2-40B4-BE49-F238E27FC236}">
-                <a16:creationId xmlns:a16="http://schemas.microsoft.com/office/drawing/2014/main" id="{84705272-3C91-0233-7FE1-9ADE3A6D96EC}"/>
+                <a16:creationId xmlns:a16="http://schemas.microsoft.com/office/drawing/2014/main" id="{EFD20C38-9A4A-61BC-2978-1843F850BC32}"/>
               </a:ext>
             </a:extLst>
           </p:cNvPr>
@@ -12665,7 +11599,7 @@
             <a:fld id="{3445E56A-E3DC-453B-8218-65FD7A4793C7}" type="slidenum">
               <a:rPr lang="es-ES" smtClean="0"/>
               <a:pPr algn="r"/>
-              <a:t>8</a:t>
+              <a:t>7</a:t>
             </a:fld>
             <a:endParaRPr lang="es-ES" dirty="0"/>
           </a:p>
@@ -12676,7 +11610,7 @@
           <p:cNvPr id="6" name="Conector recto 5">
             <a:extLst>
               <a:ext uri="{FF2B5EF4-FFF2-40B4-BE49-F238E27FC236}">
-                <a16:creationId xmlns:a16="http://schemas.microsoft.com/office/drawing/2014/main" id="{ABEBB849-6C73-C1A9-C176-098863E328D5}"/>
+                <a16:creationId xmlns:a16="http://schemas.microsoft.com/office/drawing/2014/main" id="{32A28680-3058-5733-D14B-C6A1CFC361BE}"/>
               </a:ext>
             </a:extLst>
           </p:cNvPr>
@@ -12709,12 +11643,59 @@
           </a:fontRef>
         </p:style>
       </p:cxnSp>
+      <p:pic>
+        <p:nvPicPr>
+          <p:cNvPr id="1026" name="Picture 2" descr="Python Logo PNG Transparent Background Images | pngteam.com">
+            <a:extLst>
+              <a:ext uri="{FF2B5EF4-FFF2-40B4-BE49-F238E27FC236}">
+                <a16:creationId xmlns:a16="http://schemas.microsoft.com/office/drawing/2014/main" id="{116F280B-A0A0-068D-B718-387F0A46283B}"/>
+              </a:ext>
+            </a:extLst>
+          </p:cNvPr>
+          <p:cNvPicPr>
+            <a:picLocks noChangeAspect="1" noChangeArrowheads="1"/>
+          </p:cNvPicPr>
+          <p:nvPr/>
+        </p:nvPicPr>
+        <p:blipFill>
+          <a:blip r:embed="rId3">
+            <a:extLst>
+              <a:ext uri="{28A0092B-C50C-407E-A947-70E740481C1C}">
+                <a14:useLocalDpi xmlns:a14="http://schemas.microsoft.com/office/drawing/2010/main" val="0"/>
+              </a:ext>
+            </a:extLst>
+          </a:blip>
+          <a:srcRect/>
+          <a:stretch>
+            <a:fillRect/>
+          </a:stretch>
+        </p:blipFill>
+        <p:spPr bwMode="auto">
+          <a:xfrm>
+            <a:off x="1592120" y="1662208"/>
+            <a:ext cx="960062" cy="960062"/>
+          </a:xfrm>
+          <a:prstGeom prst="rect">
+            <a:avLst/>
+          </a:prstGeom>
+          <a:noFill/>
+          <a:extLst>
+            <a:ext uri="{909E8E84-426E-40DD-AFC4-6F175D3DCCD1}">
+              <a14:hiddenFill xmlns:a14="http://schemas.microsoft.com/office/drawing/2010/main">
+                <a:solidFill>
+                  <a:srgbClr val="FFFFFF"/>
+                </a:solidFill>
+              </a14:hiddenFill>
+            </a:ext>
+          </a:extLst>
+        </p:spPr>
+      </p:pic>
       <p:sp>
         <p:nvSpPr>
           <p:cNvPr id="5" name="Rectángulo: esquinas redondeadas 4">
             <a:extLst>
               <a:ext uri="{FF2B5EF4-FFF2-40B4-BE49-F238E27FC236}">
-                <a16:creationId xmlns:a16="http://schemas.microsoft.com/office/drawing/2014/main" id="{7FD819D8-8237-AE11-D6AF-CC5D1EF64BC4}"/>
+                <a16:creationId xmlns:a16="http://schemas.microsoft.com/office/drawing/2014/main" id="{D6FC1150-A9C7-4E97-8F1D-D12948D37CFA}"/>
               </a:ext>
             </a:extLst>
           </p:cNvPr>
@@ -12723,93 +11704,8 @@
         </p:nvSpPr>
         <p:spPr>
           <a:xfrm>
-            <a:off x="4845794" y="2733964"/>
-            <a:ext cx="2027152" cy="708930"/>
-          </a:xfrm>
-          <a:prstGeom prst="roundRect">
-            <a:avLst/>
-          </a:prstGeom>
-        </p:spPr>
-        <p:style>
-          <a:lnRef idx="2">
-            <a:schemeClr val="accent1">
-              <a:shade val="15000"/>
-            </a:schemeClr>
-          </a:lnRef>
-          <a:fillRef idx="1">
-            <a:schemeClr val="accent1"/>
-          </a:fillRef>
-          <a:effectRef idx="0">
-            <a:schemeClr val="accent1"/>
-          </a:effectRef>
-          <a:fontRef idx="minor">
-            <a:schemeClr val="lt1"/>
-          </a:fontRef>
-        </p:style>
-        <p:txBody>
-          <a:bodyPr rtlCol="0" anchor="ctr"/>
-          <a:lstStyle/>
-          <a:p>
-            <a:pPr algn="ctr"/>
-            <a:endParaRPr lang="es-ES"/>
-          </a:p>
-        </p:txBody>
-      </p:sp>
-      <p:sp>
-        <p:nvSpPr>
-          <p:cNvPr id="7" name="CuadroTexto 6">
-            <a:extLst>
-              <a:ext uri="{FF2B5EF4-FFF2-40B4-BE49-F238E27FC236}">
-                <a16:creationId xmlns:a16="http://schemas.microsoft.com/office/drawing/2014/main" id="{94BE90FE-AE8C-CF73-FF14-30F69528A260}"/>
-              </a:ext>
-            </a:extLst>
-          </p:cNvPr>
-          <p:cNvSpPr txBox="1"/>
-          <p:nvPr/>
-        </p:nvSpPr>
-        <p:spPr>
-          <a:xfrm>
-            <a:off x="5285063" y="2903763"/>
-            <a:ext cx="1874520" cy="369332"/>
-          </a:xfrm>
-          <a:prstGeom prst="rect">
-            <a:avLst/>
-          </a:prstGeom>
-          <a:noFill/>
-        </p:spPr>
-        <p:txBody>
-          <a:bodyPr wrap="square" rtlCol="0">
-            <a:spAutoFit/>
-          </a:bodyPr>
-          <a:lstStyle/>
-          <a:p>
-            <a:r>
-              <a:rPr lang="es-ES" dirty="0">
-                <a:solidFill>
-                  <a:schemeClr val="bg1"/>
-                </a:solidFill>
-              </a:rPr>
-              <a:t>VOTACIÓN</a:t>
-            </a:r>
-          </a:p>
-        </p:txBody>
-      </p:sp>
-      <p:sp>
-        <p:nvSpPr>
-          <p:cNvPr id="11" name="Rectángulo: esquinas redondeadas 10">
-            <a:extLst>
-              <a:ext uri="{FF2B5EF4-FFF2-40B4-BE49-F238E27FC236}">
-                <a16:creationId xmlns:a16="http://schemas.microsoft.com/office/drawing/2014/main" id="{04034577-6BD3-95E1-101E-011BADB198D4}"/>
-              </a:ext>
-            </a:extLst>
-          </p:cNvPr>
-          <p:cNvSpPr/>
-          <p:nvPr/>
-        </p:nvSpPr>
-        <p:spPr>
-          <a:xfrm>
-            <a:off x="4922058" y="1995258"/>
-            <a:ext cx="1878030" cy="605579"/>
+            <a:off x="2837226" y="1664265"/>
+            <a:ext cx="2274270" cy="791314"/>
           </a:xfrm>
           <a:prstGeom prst="roundRect">
             <a:avLst/>
@@ -12868,12 +11764,59 @@
           </a:p>
         </p:txBody>
       </p:sp>
-      <p:sp>
-        <p:nvSpPr>
-          <p:cNvPr id="12" name="Rectángulo: esquinas redondeadas 11">
-            <a:extLst>
-              <a:ext uri="{FF2B5EF4-FFF2-40B4-BE49-F238E27FC236}">
-                <a16:creationId xmlns:a16="http://schemas.microsoft.com/office/drawing/2014/main" id="{6BEEC8FE-EC3C-E141-D183-FB3E9E0E0366}"/>
+      <p:pic>
+        <p:nvPicPr>
+          <p:cNvPr id="1028" name="Picture 4" descr="Django Community | Django">
+            <a:extLst>
+              <a:ext uri="{FF2B5EF4-FFF2-40B4-BE49-F238E27FC236}">
+                <a16:creationId xmlns:a16="http://schemas.microsoft.com/office/drawing/2014/main" id="{A2EAD331-470E-427D-1748-CCE33AA8A64D}"/>
+              </a:ext>
+            </a:extLst>
+          </p:cNvPr>
+          <p:cNvPicPr>
+            <a:picLocks noChangeAspect="1" noChangeArrowheads="1"/>
+          </p:cNvPicPr>
+          <p:nvPr/>
+        </p:nvPicPr>
+        <p:blipFill>
+          <a:blip r:embed="rId4">
+            <a:extLst>
+              <a:ext uri="{28A0092B-C50C-407E-A947-70E740481C1C}">
+                <a14:useLocalDpi xmlns:a14="http://schemas.microsoft.com/office/drawing/2010/main" val="0"/>
+              </a:ext>
+            </a:extLst>
+          </a:blip>
+          <a:srcRect/>
+          <a:stretch>
+            <a:fillRect/>
+          </a:stretch>
+        </p:blipFill>
+        <p:spPr bwMode="auto">
+          <a:xfrm>
+            <a:off x="1500389" y="3257463"/>
+            <a:ext cx="1140133" cy="518760"/>
+          </a:xfrm>
+          <a:prstGeom prst="rect">
+            <a:avLst/>
+          </a:prstGeom>
+          <a:noFill/>
+          <a:extLst>
+            <a:ext uri="{909E8E84-426E-40DD-AFC4-6F175D3DCCD1}">
+              <a14:hiddenFill xmlns:a14="http://schemas.microsoft.com/office/drawing/2010/main">
+                <a:solidFill>
+                  <a:srgbClr val="FFFFFF"/>
+                </a:solidFill>
+              </a14:hiddenFill>
+            </a:ext>
+          </a:extLst>
+        </p:spPr>
+      </p:pic>
+      <p:sp>
+        <p:nvSpPr>
+          <p:cNvPr id="7" name="Rectángulo: esquinas redondeadas 6">
+            <a:extLst>
+              <a:ext uri="{FF2B5EF4-FFF2-40B4-BE49-F238E27FC236}">
+                <a16:creationId xmlns:a16="http://schemas.microsoft.com/office/drawing/2014/main" id="{BABA0A59-518D-3251-ABD9-A2C25F52FA94}"/>
               </a:ext>
             </a:extLst>
           </p:cNvPr>
@@ -12882,8 +11825,8 @@
         </p:nvSpPr>
         <p:spPr>
           <a:xfrm>
-            <a:off x="4922058" y="1232892"/>
-            <a:ext cx="1878030" cy="614372"/>
+            <a:off x="2837226" y="3134640"/>
+            <a:ext cx="2274270" cy="791314"/>
           </a:xfrm>
           <a:prstGeom prst="roundRect">
             <a:avLst/>
@@ -12942,84 +11885,59 @@
           </a:p>
         </p:txBody>
       </p:sp>
-      <p:sp>
-        <p:nvSpPr>
-          <p:cNvPr id="26" name="CuadroTexto 25">
-            <a:extLst>
-              <a:ext uri="{FF2B5EF4-FFF2-40B4-BE49-F238E27FC236}">
-                <a16:creationId xmlns:a16="http://schemas.microsoft.com/office/drawing/2014/main" id="{BC52DEDE-64B5-E4E3-0EDE-059677202A67}"/>
-              </a:ext>
-            </a:extLst>
-          </p:cNvPr>
-          <p:cNvSpPr txBox="1"/>
+      <p:pic>
+        <p:nvPicPr>
+          <p:cNvPr id="1030" name="Picture 6" descr="Bootstrap Logo PNG Vector (EPS) Free Download">
+            <a:extLst>
+              <a:ext uri="{FF2B5EF4-FFF2-40B4-BE49-F238E27FC236}">
+                <a16:creationId xmlns:a16="http://schemas.microsoft.com/office/drawing/2014/main" id="{4B7EDCFA-A621-DA57-3199-B1FAA2FA7624}"/>
+              </a:ext>
+            </a:extLst>
+          </p:cNvPr>
+          <p:cNvPicPr>
+            <a:picLocks noChangeAspect="1" noChangeArrowheads="1"/>
+          </p:cNvPicPr>
           <p:nvPr/>
-        </p:nvSpPr>
-        <p:spPr>
-          <a:xfrm>
-            <a:off x="5385647" y="1376054"/>
-            <a:ext cx="950851" cy="338554"/>
+        </p:nvPicPr>
+        <p:blipFill>
+          <a:blip r:embed="rId5">
+            <a:extLst>
+              <a:ext uri="{28A0092B-C50C-407E-A947-70E740481C1C}">
+                <a14:useLocalDpi xmlns:a14="http://schemas.microsoft.com/office/drawing/2010/main" val="0"/>
+              </a:ext>
+            </a:extLst>
+          </a:blip>
+          <a:srcRect/>
+          <a:stretch>
+            <a:fillRect/>
+          </a:stretch>
+        </p:blipFill>
+        <p:spPr bwMode="auto">
+          <a:xfrm>
+            <a:off x="1436671" y="4261119"/>
+            <a:ext cx="1273473" cy="1273473"/>
           </a:xfrm>
           <a:prstGeom prst="rect">
             <a:avLst/>
           </a:prstGeom>
           <a:noFill/>
-        </p:spPr>
-        <p:txBody>
-          <a:bodyPr wrap="square" rtlCol="0">
-            <a:spAutoFit/>
-          </a:bodyPr>
-          <a:lstStyle/>
-          <a:p>
-            <a:pPr algn="ctr"/>
-            <a:r>
-              <a:rPr lang="es-ES" sz="1600" dirty="0"/>
-              <a:t>USUARIO</a:t>
-            </a:r>
-          </a:p>
-        </p:txBody>
-      </p:sp>
-      <p:sp>
-        <p:nvSpPr>
-          <p:cNvPr id="27" name="CuadroTexto 26">
-            <a:extLst>
-              <a:ext uri="{FF2B5EF4-FFF2-40B4-BE49-F238E27FC236}">
-                <a16:creationId xmlns:a16="http://schemas.microsoft.com/office/drawing/2014/main" id="{B73F5FC4-E146-263B-6AED-4E6C236611F0}"/>
-              </a:ext>
-            </a:extLst>
-          </p:cNvPr>
-          <p:cNvSpPr txBox="1"/>
-          <p:nvPr/>
-        </p:nvSpPr>
-        <p:spPr>
-          <a:xfrm>
-            <a:off x="5038112" y="2086754"/>
-            <a:ext cx="1645920" cy="338554"/>
-          </a:xfrm>
-          <a:prstGeom prst="rect">
-            <a:avLst/>
-          </a:prstGeom>
-          <a:noFill/>
-        </p:spPr>
-        <p:txBody>
-          <a:bodyPr wrap="square" rtlCol="0">
-            <a:spAutoFit/>
-          </a:bodyPr>
-          <a:lstStyle/>
-          <a:p>
-            <a:pPr algn="ctr"/>
-            <a:r>
-              <a:rPr lang="es-ES" sz="1600" dirty="0"/>
-              <a:t>CENSO</a:t>
-            </a:r>
-          </a:p>
-        </p:txBody>
-      </p:sp>
-      <p:sp>
-        <p:nvSpPr>
-          <p:cNvPr id="29" name="Rectángulo: esquinas redondeadas 28">
-            <a:extLst>
-              <a:ext uri="{FF2B5EF4-FFF2-40B4-BE49-F238E27FC236}">
-                <a16:creationId xmlns:a16="http://schemas.microsoft.com/office/drawing/2014/main" id="{71975A8C-BE31-97B8-BA12-2FA6A2C01691}"/>
+          <a:extLst>
+            <a:ext uri="{909E8E84-426E-40DD-AFC4-6F175D3DCCD1}">
+              <a14:hiddenFill xmlns:a14="http://schemas.microsoft.com/office/drawing/2010/main">
+                <a:solidFill>
+                  <a:srgbClr val="FFFFFF"/>
+                </a:solidFill>
+              </a14:hiddenFill>
+            </a:ext>
+          </a:extLst>
+        </p:spPr>
+      </p:pic>
+      <p:sp>
+        <p:nvSpPr>
+          <p:cNvPr id="8" name="Rectángulo: esquinas redondeadas 7">
+            <a:extLst>
+              <a:ext uri="{FF2B5EF4-FFF2-40B4-BE49-F238E27FC236}">
+                <a16:creationId xmlns:a16="http://schemas.microsoft.com/office/drawing/2014/main" id="{DA4373DD-6253-2B35-9EE3-5A1ADE53E1DB}"/>
               </a:ext>
             </a:extLst>
           </p:cNvPr>
@@ -13028,8 +11946,8 @@
         </p:nvSpPr>
         <p:spPr>
           <a:xfrm>
-            <a:off x="1828338" y="3633123"/>
-            <a:ext cx="1878030" cy="605579"/>
+            <a:off x="2837226" y="4502198"/>
+            <a:ext cx="2274270" cy="791314"/>
           </a:xfrm>
           <a:prstGeom prst="roundRect">
             <a:avLst/>
@@ -13088,12 +12006,59 @@
           </a:p>
         </p:txBody>
       </p:sp>
-      <p:sp>
-        <p:nvSpPr>
-          <p:cNvPr id="30" name="Rectángulo: esquinas redondeadas 29">
-            <a:extLst>
-              <a:ext uri="{FF2B5EF4-FFF2-40B4-BE49-F238E27FC236}">
-                <a16:creationId xmlns:a16="http://schemas.microsoft.com/office/drawing/2014/main" id="{AF67ADB8-5BE8-DD86-F50D-A1B2FD42BFC7}"/>
+      <p:pic>
+        <p:nvPicPr>
+          <p:cNvPr id="1032" name="Picture 8" descr="PostgreSQL — Fedora Developer Portal">
+            <a:extLst>
+              <a:ext uri="{FF2B5EF4-FFF2-40B4-BE49-F238E27FC236}">
+                <a16:creationId xmlns:a16="http://schemas.microsoft.com/office/drawing/2014/main" id="{6193CF88-9FCD-C72C-F39C-2C790902762A}"/>
+              </a:ext>
+            </a:extLst>
+          </p:cNvPr>
+          <p:cNvPicPr>
+            <a:picLocks noChangeAspect="1" noChangeArrowheads="1"/>
+          </p:cNvPicPr>
+          <p:nvPr/>
+        </p:nvPicPr>
+        <p:blipFill>
+          <a:blip r:embed="rId6">
+            <a:extLst>
+              <a:ext uri="{28A0092B-C50C-407E-A947-70E740481C1C}">
+                <a14:useLocalDpi xmlns:a14="http://schemas.microsoft.com/office/drawing/2010/main" val="0"/>
+              </a:ext>
+            </a:extLst>
+          </a:blip>
+          <a:srcRect/>
+          <a:stretch>
+            <a:fillRect/>
+          </a:stretch>
+        </p:blipFill>
+        <p:spPr bwMode="auto">
+          <a:xfrm>
+            <a:off x="6385560" y="1602721"/>
+            <a:ext cx="1093937" cy="1093937"/>
+          </a:xfrm>
+          <a:prstGeom prst="rect">
+            <a:avLst/>
+          </a:prstGeom>
+          <a:noFill/>
+          <a:extLst>
+            <a:ext uri="{909E8E84-426E-40DD-AFC4-6F175D3DCCD1}">
+              <a14:hiddenFill xmlns:a14="http://schemas.microsoft.com/office/drawing/2010/main">
+                <a:solidFill>
+                  <a:srgbClr val="FFFFFF"/>
+                </a:solidFill>
+              </a14:hiddenFill>
+            </a:ext>
+          </a:extLst>
+        </p:spPr>
+      </p:pic>
+      <p:sp>
+        <p:nvSpPr>
+          <p:cNvPr id="9" name="Rectángulo: esquinas redondeadas 8">
+            <a:extLst>
+              <a:ext uri="{FF2B5EF4-FFF2-40B4-BE49-F238E27FC236}">
+                <a16:creationId xmlns:a16="http://schemas.microsoft.com/office/drawing/2014/main" id="{28FB576E-CE74-7FA4-B5E7-E158D430E75A}"/>
               </a:ext>
             </a:extLst>
           </p:cNvPr>
@@ -13102,8 +12067,8 @@
         </p:nvSpPr>
         <p:spPr>
           <a:xfrm>
-            <a:off x="4922520" y="3619483"/>
-            <a:ext cx="1878030" cy="605579"/>
+            <a:off x="7626096" y="1662208"/>
+            <a:ext cx="2274270" cy="791314"/>
           </a:xfrm>
           <a:prstGeom prst="roundRect">
             <a:avLst/>
@@ -13162,12 +12127,48 @@
           </a:p>
         </p:txBody>
       </p:sp>
-      <p:sp>
-        <p:nvSpPr>
-          <p:cNvPr id="31" name="Rectángulo: esquinas redondeadas 30">
-            <a:extLst>
-              <a:ext uri="{FF2B5EF4-FFF2-40B4-BE49-F238E27FC236}">
-                <a16:creationId xmlns:a16="http://schemas.microsoft.com/office/drawing/2014/main" id="{A899FE7A-FD44-2FC1-B99E-26D25BFE52B6}"/>
+      <p:pic>
+        <p:nvPicPr>
+          <p:cNvPr id="11" name="Gráfico 10" descr="Rollo de diplomas contorno">
+            <a:extLst>
+              <a:ext uri="{FF2B5EF4-FFF2-40B4-BE49-F238E27FC236}">
+                <a16:creationId xmlns:a16="http://schemas.microsoft.com/office/drawing/2014/main" id="{1EF4DB79-2A87-F4A5-A7ED-CF5CDF8FD8F6}"/>
+              </a:ext>
+            </a:extLst>
+          </p:cNvPr>
+          <p:cNvPicPr>
+            <a:picLocks noChangeAspect="1"/>
+          </p:cNvPicPr>
+          <p:nvPr/>
+        </p:nvPicPr>
+        <p:blipFill>
+          <a:blip>
+            <a:extLst>
+              <a:ext uri="{96DAC541-7B7A-43D3-8B79-37D633B846F1}">
+                <asvg:svgBlip xmlns:asvg="http://schemas.microsoft.com/office/drawing/2016/SVG/main" r:embed="rId7"/>
+              </a:ext>
+            </a:extLst>
+          </a:blip>
+          <a:stretch>
+            <a:fillRect/>
+          </a:stretch>
+        </p:blipFill>
+        <p:spPr>
+          <a:xfrm>
+            <a:off x="6491945" y="3059643"/>
+            <a:ext cx="914400" cy="914400"/>
+          </a:xfrm>
+          <a:prstGeom prst="rect">
+            <a:avLst/>
+          </a:prstGeom>
+        </p:spPr>
+      </p:pic>
+      <p:sp>
+        <p:nvSpPr>
+          <p:cNvPr id="12" name="Rectángulo: esquinas redondeadas 11">
+            <a:extLst>
+              <a:ext uri="{FF2B5EF4-FFF2-40B4-BE49-F238E27FC236}">
+                <a16:creationId xmlns:a16="http://schemas.microsoft.com/office/drawing/2014/main" id="{0BC66794-3054-F238-C632-6356FAE3D174}"/>
               </a:ext>
             </a:extLst>
           </p:cNvPr>
@@ -13176,8 +12177,8 @@
         </p:nvSpPr>
         <p:spPr>
           <a:xfrm>
-            <a:off x="7980126" y="3614835"/>
-            <a:ext cx="1878030" cy="605579"/>
+            <a:off x="7626096" y="3087468"/>
+            <a:ext cx="2274270" cy="791314"/>
           </a:xfrm>
           <a:prstGeom prst="roundRect">
             <a:avLst/>
@@ -13238,158 +12239,10 @@
       </p:sp>
       <p:sp>
         <p:nvSpPr>
-          <p:cNvPr id="32" name="Rectángulo: esquinas redondeadas 31">
-            <a:extLst>
-              <a:ext uri="{FF2B5EF4-FFF2-40B4-BE49-F238E27FC236}">
-                <a16:creationId xmlns:a16="http://schemas.microsoft.com/office/drawing/2014/main" id="{97D1EFBF-8C46-B055-85A0-2FD8D9427E27}"/>
-              </a:ext>
-            </a:extLst>
-          </p:cNvPr>
-          <p:cNvSpPr/>
-          <p:nvPr/>
-        </p:nvSpPr>
-        <p:spPr>
-          <a:xfrm>
-            <a:off x="4931664" y="4593172"/>
-            <a:ext cx="1878030" cy="605579"/>
-          </a:xfrm>
-          <a:prstGeom prst="roundRect">
-            <a:avLst/>
-          </a:prstGeom>
-          <a:noFill/>
-          <a:ln w="44450">
-            <a:gradFill flip="none" rotWithShape="1">
-              <a:gsLst>
-                <a:gs pos="0">
-                  <a:schemeClr val="accent1">
-                    <a:lumMod val="0"/>
-                    <a:lumOff val="100000"/>
-                  </a:schemeClr>
-                </a:gs>
-                <a:gs pos="35000">
-                  <a:schemeClr val="accent1">
-                    <a:lumMod val="0"/>
-                    <a:lumOff val="100000"/>
-                  </a:schemeClr>
-                </a:gs>
-                <a:gs pos="100000">
-                  <a:schemeClr val="accent1">
-                    <a:lumMod val="100000"/>
-                  </a:schemeClr>
-                </a:gs>
-              </a:gsLst>
-              <a:path path="circle">
-                <a:fillToRect l="50000" t="-80000" r="50000" b="180000"/>
-              </a:path>
-              <a:tileRect/>
-            </a:gradFill>
-          </a:ln>
-        </p:spPr>
-        <p:style>
-          <a:lnRef idx="2">
-            <a:schemeClr val="accent1">
-              <a:shade val="15000"/>
-            </a:schemeClr>
-          </a:lnRef>
-          <a:fillRef idx="1">
-            <a:schemeClr val="accent1"/>
-          </a:fillRef>
-          <a:effectRef idx="0">
-            <a:schemeClr val="accent1"/>
-          </a:effectRef>
-          <a:fontRef idx="minor">
-            <a:schemeClr val="lt1"/>
-          </a:fontRef>
-        </p:style>
-        <p:txBody>
-          <a:bodyPr rtlCol="0" anchor="ctr"/>
-          <a:lstStyle/>
-          <a:p>
-            <a:pPr algn="ctr"/>
-            <a:endParaRPr lang="es-ES"/>
-          </a:p>
-        </p:txBody>
-      </p:sp>
-      <p:sp>
-        <p:nvSpPr>
-          <p:cNvPr id="33" name="Rectángulo: esquinas redondeadas 32">
-            <a:extLst>
-              <a:ext uri="{FF2B5EF4-FFF2-40B4-BE49-F238E27FC236}">
-                <a16:creationId xmlns:a16="http://schemas.microsoft.com/office/drawing/2014/main" id="{193B913A-7F19-A58B-5482-F5A90719A2E7}"/>
-              </a:ext>
-            </a:extLst>
-          </p:cNvPr>
-          <p:cNvSpPr/>
-          <p:nvPr/>
-        </p:nvSpPr>
-        <p:spPr>
-          <a:xfrm>
-            <a:off x="4931202" y="5476743"/>
-            <a:ext cx="1878030" cy="605579"/>
-          </a:xfrm>
-          <a:prstGeom prst="roundRect">
-            <a:avLst/>
-          </a:prstGeom>
-          <a:noFill/>
-          <a:ln w="44450">
-            <a:gradFill flip="none" rotWithShape="1">
-              <a:gsLst>
-                <a:gs pos="0">
-                  <a:schemeClr val="accent1">
-                    <a:lumMod val="0"/>
-                    <a:lumOff val="100000"/>
-                  </a:schemeClr>
-                </a:gs>
-                <a:gs pos="35000">
-                  <a:schemeClr val="accent1">
-                    <a:lumMod val="0"/>
-                    <a:lumOff val="100000"/>
-                  </a:schemeClr>
-                </a:gs>
-                <a:gs pos="100000">
-                  <a:schemeClr val="accent1">
-                    <a:lumMod val="100000"/>
-                  </a:schemeClr>
-                </a:gs>
-              </a:gsLst>
-              <a:path path="circle">
-                <a:fillToRect l="50000" t="-80000" r="50000" b="180000"/>
-              </a:path>
-              <a:tileRect/>
-            </a:gradFill>
-          </a:ln>
-        </p:spPr>
-        <p:style>
-          <a:lnRef idx="2">
-            <a:schemeClr val="accent1">
-              <a:shade val="15000"/>
-            </a:schemeClr>
-          </a:lnRef>
-          <a:fillRef idx="1">
-            <a:schemeClr val="accent1"/>
-          </a:fillRef>
-          <a:effectRef idx="0">
-            <a:schemeClr val="accent1"/>
-          </a:effectRef>
-          <a:fontRef idx="minor">
-            <a:schemeClr val="lt1"/>
-          </a:fontRef>
-        </p:style>
-        <p:txBody>
-          <a:bodyPr rtlCol="0" anchor="ctr"/>
-          <a:lstStyle/>
-          <a:p>
-            <a:pPr algn="ctr"/>
-            <a:endParaRPr lang="es-ES"/>
-          </a:p>
-        </p:txBody>
-      </p:sp>
-      <p:sp>
-        <p:nvSpPr>
-          <p:cNvPr id="34" name="CuadroTexto 33">
-            <a:extLst>
-              <a:ext uri="{FF2B5EF4-FFF2-40B4-BE49-F238E27FC236}">
-                <a16:creationId xmlns:a16="http://schemas.microsoft.com/office/drawing/2014/main" id="{B35A6948-9E56-0493-C25D-E16EC908351F}"/>
+          <p:cNvPr id="13" name="CuadroTexto 12">
+            <a:extLst>
+              <a:ext uri="{FF2B5EF4-FFF2-40B4-BE49-F238E27FC236}">
+                <a16:creationId xmlns:a16="http://schemas.microsoft.com/office/drawing/2014/main" id="{33CA9F0F-5213-4C59-373E-37F8293BEFA9}"/>
               </a:ext>
             </a:extLst>
           </p:cNvPr>
@@ -13398,8 +12251,8 @@
         </p:nvSpPr>
         <p:spPr>
           <a:xfrm>
-            <a:off x="1919778" y="3769456"/>
-            <a:ext cx="1878030" cy="338554"/>
+            <a:off x="2837226" y="1728216"/>
+            <a:ext cx="2274270" cy="646331"/>
           </a:xfrm>
           <a:prstGeom prst="rect">
             <a:avLst/>
@@ -13412,19 +12265,27 @@
           </a:bodyPr>
           <a:lstStyle/>
           <a:p>
-            <a:r>
-              <a:rPr lang="es-ES" sz="1600" dirty="0"/>
-              <a:t>JUNTA ELECTORAL</a:t>
-            </a:r>
-          </a:p>
-        </p:txBody>
-      </p:sp>
-      <p:sp>
-        <p:nvSpPr>
-          <p:cNvPr id="35" name="CuadroTexto 34">
-            <a:extLst>
-              <a:ext uri="{FF2B5EF4-FFF2-40B4-BE49-F238E27FC236}">
-                <a16:creationId xmlns:a16="http://schemas.microsoft.com/office/drawing/2014/main" id="{FD9902FF-D928-6AED-CAC1-E4BACEEBAED8}"/>
+            <a:pPr algn="ctr"/>
+            <a:r>
+              <a:rPr lang="es-ES" u="sng" dirty="0"/>
+              <a:t>Python</a:t>
+            </a:r>
+          </a:p>
+          <a:p>
+            <a:pPr algn="ctr"/>
+            <a:r>
+              <a:rPr lang="es-ES" dirty="0"/>
+              <a:t>Lenguaje principal</a:t>
+            </a:r>
+          </a:p>
+        </p:txBody>
+      </p:sp>
+      <p:sp>
+        <p:nvSpPr>
+          <p:cNvPr id="14" name="CuadroTexto 13">
+            <a:extLst>
+              <a:ext uri="{FF2B5EF4-FFF2-40B4-BE49-F238E27FC236}">
+                <a16:creationId xmlns:a16="http://schemas.microsoft.com/office/drawing/2014/main" id="{684B852D-604F-09AF-E8B3-190D98A5565E}"/>
               </a:ext>
             </a:extLst>
           </p:cNvPr>
@@ -13433,8 +12294,8 @@
         </p:nvSpPr>
         <p:spPr>
           <a:xfrm>
-            <a:off x="5138464" y="3758436"/>
-            <a:ext cx="1573000" cy="338554"/>
+            <a:off x="2837226" y="3257463"/>
+            <a:ext cx="2274270" cy="646331"/>
           </a:xfrm>
           <a:prstGeom prst="rect">
             <a:avLst/>
@@ -13447,19 +12308,27 @@
           </a:bodyPr>
           <a:lstStyle/>
           <a:p>
-            <a:r>
-              <a:rPr lang="es-ES" sz="1600" dirty="0"/>
-              <a:t>CANDIDATURA</a:t>
-            </a:r>
-          </a:p>
-        </p:txBody>
-      </p:sp>
-      <p:sp>
-        <p:nvSpPr>
-          <p:cNvPr id="36" name="CuadroTexto 35">
-            <a:extLst>
-              <a:ext uri="{FF2B5EF4-FFF2-40B4-BE49-F238E27FC236}">
-                <a16:creationId xmlns:a16="http://schemas.microsoft.com/office/drawing/2014/main" id="{4A8DACFD-FFCC-3592-B326-7270C79C9236}"/>
+            <a:pPr algn="ctr"/>
+            <a:r>
+              <a:rPr lang="es-ES" u="sng" dirty="0"/>
+              <a:t>Django</a:t>
+            </a:r>
+          </a:p>
+          <a:p>
+            <a:pPr algn="ctr"/>
+            <a:r>
+              <a:rPr lang="es-ES" dirty="0"/>
+              <a:t>Framework web</a:t>
+            </a:r>
+          </a:p>
+        </p:txBody>
+      </p:sp>
+      <p:sp>
+        <p:nvSpPr>
+          <p:cNvPr id="15" name="CuadroTexto 14">
+            <a:extLst>
+              <a:ext uri="{FF2B5EF4-FFF2-40B4-BE49-F238E27FC236}">
+                <a16:creationId xmlns:a16="http://schemas.microsoft.com/office/drawing/2014/main" id="{C988ACC9-990A-B5E2-D608-D7CEFE340BAC}"/>
               </a:ext>
             </a:extLst>
           </p:cNvPr>
@@ -13468,8 +12337,8 @@
         </p:nvSpPr>
         <p:spPr>
           <a:xfrm>
-            <a:off x="8065008" y="3758436"/>
-            <a:ext cx="1691640" cy="338554"/>
+            <a:off x="2837226" y="4572000"/>
+            <a:ext cx="2274270" cy="646331"/>
           </a:xfrm>
           <a:prstGeom prst="rect">
             <a:avLst/>
@@ -13482,19 +12351,27 @@
           </a:bodyPr>
           <a:lstStyle/>
           <a:p>
-            <a:r>
-              <a:rPr lang="es-ES" sz="1600" dirty="0"/>
-              <a:t>MESA ELECTORAL</a:t>
-            </a:r>
-          </a:p>
-        </p:txBody>
-      </p:sp>
-      <p:sp>
-        <p:nvSpPr>
-          <p:cNvPr id="37" name="CuadroTexto 36">
-            <a:extLst>
-              <a:ext uri="{FF2B5EF4-FFF2-40B4-BE49-F238E27FC236}">
-                <a16:creationId xmlns:a16="http://schemas.microsoft.com/office/drawing/2014/main" id="{F8496383-AAA9-779E-21A0-B09A8A9A6BB6}"/>
+            <a:pPr algn="ctr"/>
+            <a:r>
+              <a:rPr lang="es-ES" u="sng" dirty="0"/>
+              <a:t>Bootstrap</a:t>
+            </a:r>
+          </a:p>
+          <a:p>
+            <a:pPr algn="ctr"/>
+            <a:r>
+              <a:rPr lang="es-ES" dirty="0"/>
+              <a:t>HTML | CSS | JS</a:t>
+            </a:r>
+          </a:p>
+        </p:txBody>
+      </p:sp>
+      <p:sp>
+        <p:nvSpPr>
+          <p:cNvPr id="16" name="CuadroTexto 15">
+            <a:extLst>
+              <a:ext uri="{FF2B5EF4-FFF2-40B4-BE49-F238E27FC236}">
+                <a16:creationId xmlns:a16="http://schemas.microsoft.com/office/drawing/2014/main" id="{35BE79C1-226D-010E-E790-02226AC53E04}"/>
               </a:ext>
             </a:extLst>
           </p:cNvPr>
@@ -13503,8 +12380,8 @@
         </p:nvSpPr>
         <p:spPr>
           <a:xfrm>
-            <a:off x="5476846" y="4743579"/>
-            <a:ext cx="1554712" cy="338554"/>
+            <a:off x="7626096" y="1719072"/>
+            <a:ext cx="2274270" cy="646331"/>
           </a:xfrm>
           <a:prstGeom prst="rect">
             <a:avLst/>
@@ -13517,19 +12394,27 @@
           </a:bodyPr>
           <a:lstStyle/>
           <a:p>
-            <a:r>
-              <a:rPr lang="es-ES" sz="1600" dirty="0"/>
-              <a:t>VOTO</a:t>
-            </a:r>
-          </a:p>
-        </p:txBody>
-      </p:sp>
-      <p:sp>
-        <p:nvSpPr>
-          <p:cNvPr id="38" name="CuadroTexto 37">
-            <a:extLst>
-              <a:ext uri="{FF2B5EF4-FFF2-40B4-BE49-F238E27FC236}">
-                <a16:creationId xmlns:a16="http://schemas.microsoft.com/office/drawing/2014/main" id="{E4445891-0E48-CF27-7376-BA9146CA42D0}"/>
+            <a:pPr algn="ctr"/>
+            <a:r>
+              <a:rPr lang="es-ES" u="sng" dirty="0"/>
+              <a:t>PostgreSQL</a:t>
+            </a:r>
+          </a:p>
+          <a:p>
+            <a:pPr algn="ctr"/>
+            <a:r>
+              <a:rPr lang="es-ES" dirty="0"/>
+              <a:t>Motor de BD</a:t>
+            </a:r>
+          </a:p>
+        </p:txBody>
+      </p:sp>
+      <p:sp>
+        <p:nvSpPr>
+          <p:cNvPr id="17" name="CuadroTexto 16">
+            <a:extLst>
+              <a:ext uri="{FF2B5EF4-FFF2-40B4-BE49-F238E27FC236}">
+                <a16:creationId xmlns:a16="http://schemas.microsoft.com/office/drawing/2014/main" id="{C897A921-0908-B6E4-14B8-C24D299F1204}"/>
               </a:ext>
             </a:extLst>
           </p:cNvPr>
@@ -13538,8 +12423,8 @@
         </p:nvSpPr>
         <p:spPr>
           <a:xfrm>
-            <a:off x="5285063" y="5593361"/>
-            <a:ext cx="1463504" cy="338554"/>
+            <a:off x="7626096" y="3166023"/>
+            <a:ext cx="2274270" cy="646331"/>
           </a:xfrm>
           <a:prstGeom prst="rect">
             <a:avLst/>
@@ -13552,339 +12437,17 @@
           </a:bodyPr>
           <a:lstStyle/>
           <a:p>
-            <a:r>
-              <a:rPr lang="es-ES" sz="1600" dirty="0"/>
-              <a:t>RESULTADO</a:t>
-            </a:r>
-          </a:p>
-        </p:txBody>
-      </p:sp>
-      <p:cxnSp>
-        <p:nvCxnSpPr>
-          <p:cNvPr id="40" name="Conector recto de flecha 39">
-            <a:extLst>
-              <a:ext uri="{FF2B5EF4-FFF2-40B4-BE49-F238E27FC236}">
-                <a16:creationId xmlns:a16="http://schemas.microsoft.com/office/drawing/2014/main" id="{08832353-9C4C-7E7F-190B-F045A089E683}"/>
-              </a:ext>
-            </a:extLst>
-          </p:cNvPr>
-          <p:cNvCxnSpPr>
-            <a:stCxn id="12" idx="2"/>
-            <a:endCxn id="11" idx="0"/>
-          </p:cNvCxnSpPr>
-          <p:nvPr/>
-        </p:nvCxnSpPr>
-        <p:spPr>
-          <a:xfrm>
-            <a:off x="5861073" y="1847264"/>
-            <a:ext cx="0" cy="147994"/>
-          </a:xfrm>
-          <a:prstGeom prst="straightConnector1">
-            <a:avLst/>
-          </a:prstGeom>
-          <a:ln>
-            <a:tailEnd type="triangle"/>
-          </a:ln>
-        </p:spPr>
-        <p:style>
-          <a:lnRef idx="1">
-            <a:schemeClr val="accent1"/>
-          </a:lnRef>
-          <a:fillRef idx="0">
-            <a:schemeClr val="accent1"/>
-          </a:fillRef>
-          <a:effectRef idx="0">
-            <a:schemeClr val="accent1"/>
-          </a:effectRef>
-          <a:fontRef idx="minor">
-            <a:schemeClr val="tx1"/>
-          </a:fontRef>
-        </p:style>
-      </p:cxnSp>
-      <p:cxnSp>
-        <p:nvCxnSpPr>
-          <p:cNvPr id="42" name="Conector recto de flecha 41">
-            <a:extLst>
-              <a:ext uri="{FF2B5EF4-FFF2-40B4-BE49-F238E27FC236}">
-                <a16:creationId xmlns:a16="http://schemas.microsoft.com/office/drawing/2014/main" id="{5D7E0C76-0222-8995-6AEB-BA24A1FE977F}"/>
-              </a:ext>
-            </a:extLst>
-          </p:cNvPr>
-          <p:cNvCxnSpPr>
-            <a:stCxn id="11" idx="2"/>
-            <a:endCxn id="5" idx="0"/>
-          </p:cNvCxnSpPr>
-          <p:nvPr/>
-        </p:nvCxnSpPr>
-        <p:spPr>
-          <a:xfrm flipH="1">
-            <a:off x="5859370" y="2600837"/>
-            <a:ext cx="1703" cy="133127"/>
-          </a:xfrm>
-          <a:prstGeom prst="straightConnector1">
-            <a:avLst/>
-          </a:prstGeom>
-          <a:ln>
-            <a:tailEnd type="triangle"/>
-          </a:ln>
-        </p:spPr>
-        <p:style>
-          <a:lnRef idx="1">
-            <a:schemeClr val="accent1"/>
-          </a:lnRef>
-          <a:fillRef idx="0">
-            <a:schemeClr val="accent1"/>
-          </a:fillRef>
-          <a:effectRef idx="0">
-            <a:schemeClr val="accent1"/>
-          </a:effectRef>
-          <a:fontRef idx="minor">
-            <a:schemeClr val="tx1"/>
-          </a:fontRef>
-        </p:style>
-      </p:cxnSp>
-      <p:cxnSp>
-        <p:nvCxnSpPr>
-          <p:cNvPr id="44" name="Conector recto de flecha 43">
-            <a:extLst>
-              <a:ext uri="{FF2B5EF4-FFF2-40B4-BE49-F238E27FC236}">
-                <a16:creationId xmlns:a16="http://schemas.microsoft.com/office/drawing/2014/main" id="{91A73D71-EF67-FEF2-085B-06830E10693C}"/>
-              </a:ext>
-            </a:extLst>
-          </p:cNvPr>
-          <p:cNvCxnSpPr>
-            <a:stCxn id="5" idx="2"/>
-            <a:endCxn id="30" idx="0"/>
-          </p:cNvCxnSpPr>
-          <p:nvPr/>
-        </p:nvCxnSpPr>
-        <p:spPr>
-          <a:xfrm>
-            <a:off x="5859370" y="3442894"/>
-            <a:ext cx="2165" cy="176589"/>
-          </a:xfrm>
-          <a:prstGeom prst="straightConnector1">
-            <a:avLst/>
-          </a:prstGeom>
-          <a:ln>
-            <a:tailEnd type="triangle"/>
-          </a:ln>
-        </p:spPr>
-        <p:style>
-          <a:lnRef idx="1">
-            <a:schemeClr val="accent1"/>
-          </a:lnRef>
-          <a:fillRef idx="0">
-            <a:schemeClr val="accent1"/>
-          </a:fillRef>
-          <a:effectRef idx="0">
-            <a:schemeClr val="accent1"/>
-          </a:effectRef>
-          <a:fontRef idx="minor">
-            <a:schemeClr val="tx1"/>
-          </a:fontRef>
-        </p:style>
-      </p:cxnSp>
-      <p:cxnSp>
-        <p:nvCxnSpPr>
-          <p:cNvPr id="46" name="Conector recto de flecha 45">
-            <a:extLst>
-              <a:ext uri="{FF2B5EF4-FFF2-40B4-BE49-F238E27FC236}">
-                <a16:creationId xmlns:a16="http://schemas.microsoft.com/office/drawing/2014/main" id="{F19E2094-21E5-DDFD-B70E-8E00D9B756E9}"/>
-              </a:ext>
-            </a:extLst>
-          </p:cNvPr>
-          <p:cNvCxnSpPr>
-            <a:stCxn id="5" idx="1"/>
-            <a:endCxn id="29" idx="0"/>
-          </p:cNvCxnSpPr>
-          <p:nvPr/>
-        </p:nvCxnSpPr>
-        <p:spPr>
-          <a:xfrm flipH="1">
-            <a:off x="2767353" y="3088429"/>
-            <a:ext cx="2078441" cy="544694"/>
-          </a:xfrm>
-          <a:prstGeom prst="straightConnector1">
-            <a:avLst/>
-          </a:prstGeom>
-          <a:ln>
-            <a:tailEnd type="triangle"/>
-          </a:ln>
-        </p:spPr>
-        <p:style>
-          <a:lnRef idx="1">
-            <a:schemeClr val="accent1"/>
-          </a:lnRef>
-          <a:fillRef idx="0">
-            <a:schemeClr val="accent1"/>
-          </a:fillRef>
-          <a:effectRef idx="0">
-            <a:schemeClr val="accent1"/>
-          </a:effectRef>
-          <a:fontRef idx="minor">
-            <a:schemeClr val="tx1"/>
-          </a:fontRef>
-        </p:style>
-      </p:cxnSp>
-      <p:cxnSp>
-        <p:nvCxnSpPr>
-          <p:cNvPr id="48" name="Conector recto de flecha 47">
-            <a:extLst>
-              <a:ext uri="{FF2B5EF4-FFF2-40B4-BE49-F238E27FC236}">
-                <a16:creationId xmlns:a16="http://schemas.microsoft.com/office/drawing/2014/main" id="{7D3A4A2D-C677-7C11-87CD-6DCA7DA8B2D4}"/>
-              </a:ext>
-            </a:extLst>
-          </p:cNvPr>
-          <p:cNvCxnSpPr>
-            <a:endCxn id="31" idx="0"/>
-          </p:cNvCxnSpPr>
-          <p:nvPr/>
-        </p:nvCxnSpPr>
-        <p:spPr>
-          <a:xfrm>
-            <a:off x="6872946" y="3088429"/>
-            <a:ext cx="2046195" cy="526406"/>
-          </a:xfrm>
-          <a:prstGeom prst="straightConnector1">
-            <a:avLst/>
-          </a:prstGeom>
-          <a:ln>
-            <a:tailEnd type="triangle"/>
-          </a:ln>
-        </p:spPr>
-        <p:style>
-          <a:lnRef idx="1">
-            <a:schemeClr val="accent1"/>
-          </a:lnRef>
-          <a:fillRef idx="0">
-            <a:schemeClr val="accent1"/>
-          </a:fillRef>
-          <a:effectRef idx="0">
-            <a:schemeClr val="accent1"/>
-          </a:effectRef>
-          <a:fontRef idx="minor">
-            <a:schemeClr val="tx1"/>
-          </a:fontRef>
-        </p:style>
-      </p:cxnSp>
-      <p:cxnSp>
-        <p:nvCxnSpPr>
-          <p:cNvPr id="52" name="Conector recto de flecha 51">
-            <a:extLst>
-              <a:ext uri="{FF2B5EF4-FFF2-40B4-BE49-F238E27FC236}">
-                <a16:creationId xmlns:a16="http://schemas.microsoft.com/office/drawing/2014/main" id="{D6D8AD32-E20E-2049-E4DA-65C87291B70C}"/>
-              </a:ext>
-            </a:extLst>
-          </p:cNvPr>
-          <p:cNvCxnSpPr>
-            <a:stCxn id="30" idx="2"/>
-            <a:endCxn id="32" idx="0"/>
-          </p:cNvCxnSpPr>
-          <p:nvPr/>
-        </p:nvCxnSpPr>
-        <p:spPr>
-          <a:xfrm>
-            <a:off x="5861535" y="4225062"/>
-            <a:ext cx="9144" cy="368110"/>
-          </a:xfrm>
-          <a:prstGeom prst="straightConnector1">
-            <a:avLst/>
-          </a:prstGeom>
-          <a:ln>
-            <a:tailEnd type="triangle"/>
-          </a:ln>
-        </p:spPr>
-        <p:style>
-          <a:lnRef idx="1">
-            <a:schemeClr val="accent1"/>
-          </a:lnRef>
-          <a:fillRef idx="0">
-            <a:schemeClr val="accent1"/>
-          </a:fillRef>
-          <a:effectRef idx="0">
-            <a:schemeClr val="accent1"/>
-          </a:effectRef>
-          <a:fontRef idx="minor">
-            <a:schemeClr val="tx1"/>
-          </a:fontRef>
-        </p:style>
-      </p:cxnSp>
-      <p:cxnSp>
-        <p:nvCxnSpPr>
-          <p:cNvPr id="56" name="Conector recto de flecha 55">
-            <a:extLst>
-              <a:ext uri="{FF2B5EF4-FFF2-40B4-BE49-F238E27FC236}">
-                <a16:creationId xmlns:a16="http://schemas.microsoft.com/office/drawing/2014/main" id="{33D0ABF6-78D2-D45B-1929-82C6CEBDA909}"/>
-              </a:ext>
-            </a:extLst>
-          </p:cNvPr>
-          <p:cNvCxnSpPr>
-            <a:stCxn id="32" idx="2"/>
-            <a:endCxn id="33" idx="0"/>
-          </p:cNvCxnSpPr>
-          <p:nvPr/>
-        </p:nvCxnSpPr>
-        <p:spPr>
-          <a:xfrm flipH="1">
-            <a:off x="5870217" y="5198751"/>
-            <a:ext cx="462" cy="277992"/>
-          </a:xfrm>
-          <a:prstGeom prst="straightConnector1">
-            <a:avLst/>
-          </a:prstGeom>
-          <a:ln>
-            <a:tailEnd type="triangle"/>
-          </a:ln>
-        </p:spPr>
-        <p:style>
-          <a:lnRef idx="1">
-            <a:schemeClr val="accent1"/>
-          </a:lnRef>
-          <a:fillRef idx="0">
-            <a:schemeClr val="accent1"/>
-          </a:fillRef>
-          <a:effectRef idx="0">
-            <a:schemeClr val="accent1"/>
-          </a:effectRef>
-          <a:fontRef idx="minor">
-            <a:schemeClr val="tx1"/>
-          </a:fontRef>
-        </p:style>
-      </p:cxnSp>
-      <p:sp>
-        <p:nvSpPr>
-          <p:cNvPr id="57" name="CuadroTexto 56">
-            <a:extLst>
-              <a:ext uri="{FF2B5EF4-FFF2-40B4-BE49-F238E27FC236}">
-                <a16:creationId xmlns:a16="http://schemas.microsoft.com/office/drawing/2014/main" id="{D0D2C4F1-6653-E190-7744-08D80630C67C}"/>
-              </a:ext>
-            </a:extLst>
-          </p:cNvPr>
-          <p:cNvSpPr txBox="1"/>
-          <p:nvPr/>
-        </p:nvSpPr>
-        <p:spPr>
-          <a:xfrm>
-            <a:off x="1073558" y="6082322"/>
-            <a:ext cx="11220948" cy="276999"/>
-          </a:xfrm>
-          <a:prstGeom prst="rect">
-            <a:avLst/>
-          </a:prstGeom>
-          <a:noFill/>
-        </p:spPr>
-        <p:txBody>
-          <a:bodyPr wrap="square" rtlCol="0">
-            <a:spAutoFit/>
-          </a:bodyPr>
-          <a:lstStyle/>
-          <a:p>
-            <a:r>
-              <a:rPr lang="es-ES" sz="1200" dirty="0">
-                <a:latin typeface="Aptos" panose="020B0004020202020204" pitchFamily="34" charset="0"/>
-              </a:rPr>
-              <a:t>La entidad votación actúa como núcleo del modelo de datos, relacionando participantes, candidaturas, junta electoral, mesa electoral, votos y resultados.</a:t>
+            <a:pPr algn="ctr"/>
+            <a:r>
+              <a:rPr lang="es-ES" u="sng" dirty="0"/>
+              <a:t>X.509</a:t>
+            </a:r>
+          </a:p>
+          <a:p>
+            <a:pPr algn="ctr"/>
+            <a:r>
+              <a:rPr lang="es-ES" dirty="0"/>
+              <a:t>Firma y Validación</a:t>
             </a:r>
           </a:p>
         </p:txBody>
@@ -13892,7 +12455,7 @@
     </p:spTree>
     <p:extLst>
       <p:ext uri="{BB962C8B-B14F-4D97-AF65-F5344CB8AC3E}">
-        <p14:creationId xmlns:p14="http://schemas.microsoft.com/office/powerpoint/2010/main" val="3097313686"/>
+        <p14:creationId xmlns:p14="http://schemas.microsoft.com/office/powerpoint/2010/main" val="460483278"/>
       </p:ext>
     </p:extLst>
   </p:cSld>
@@ -13907,7 +12470,7 @@
 </p:sld>
 </file>
 
-<file path=ppt/slides/slide9.xml><?xml version="1.0" encoding="utf-8"?>
+<file path=ppt/slides/slide8.xml><?xml version="1.0" encoding="utf-8"?>
 <p:sld xmlns:a="http://schemas.openxmlformats.org/drawingml/2006/main" xmlns:r="http://schemas.openxmlformats.org/officeDocument/2006/relationships" xmlns:p="http://schemas.openxmlformats.org/presentationml/2006/main">
   <p:cSld>
     <p:spTree>
@@ -13915,7 +12478,7 @@
         <p:cNvPr id="1" name="">
           <a:extLst>
             <a:ext uri="{FF2B5EF4-FFF2-40B4-BE49-F238E27FC236}">
-              <a16:creationId xmlns:a16="http://schemas.microsoft.com/office/drawing/2014/main" id="{8AE7A17F-1FEC-0683-E728-0295C65E3B87}"/>
+              <a16:creationId xmlns:a16="http://schemas.microsoft.com/office/drawing/2014/main" id="{B3F586A0-935D-00F7-871A-F59A9A09855B}"/>
             </a:ext>
           </a:extLst>
         </p:cNvPr>
@@ -13935,7 +12498,7 @@
           <p:cNvPr id="2" name="Título 1">
             <a:extLst>
               <a:ext uri="{FF2B5EF4-FFF2-40B4-BE49-F238E27FC236}">
-                <a16:creationId xmlns:a16="http://schemas.microsoft.com/office/drawing/2014/main" id="{3553FFDD-DFBF-BB49-68A7-5D12C8C1BF6D}"/>
+                <a16:creationId xmlns:a16="http://schemas.microsoft.com/office/drawing/2014/main" id="{4F114534-3DF0-38C0-C265-42555F2E6F79}"/>
               </a:ext>
             </a:extLst>
           </p:cNvPr>
@@ -13967,7 +12530,7 @@
                   <a:schemeClr val="bg1"/>
                 </a:solidFill>
               </a:rPr>
-              <a:t>TECNOLOGÍAS USADAS</a:t>
+              <a:t>RESULTADOS OBTENIDOS</a:t>
             </a:r>
           </a:p>
         </p:txBody>
@@ -13977,7 +12540,7 @@
           <p:cNvPr id="3" name="Subtítulo 2">
             <a:extLst>
               <a:ext uri="{FF2B5EF4-FFF2-40B4-BE49-F238E27FC236}">
-                <a16:creationId xmlns:a16="http://schemas.microsoft.com/office/drawing/2014/main" id="{BF553C64-974B-742B-AB6C-841361121745}"/>
+                <a16:creationId xmlns:a16="http://schemas.microsoft.com/office/drawing/2014/main" id="{8928A8A2-C319-52FF-8A26-0D73C41C4EA3}"/>
               </a:ext>
             </a:extLst>
           </p:cNvPr>
@@ -14014,7 +12577,7 @@
           <p:cNvPr id="4" name="Marcador de pie de página 3">
             <a:extLst>
               <a:ext uri="{FF2B5EF4-FFF2-40B4-BE49-F238E27FC236}">
-                <a16:creationId xmlns:a16="http://schemas.microsoft.com/office/drawing/2014/main" id="{EFD20C38-9A4A-61BC-2978-1843F850BC32}"/>
+                <a16:creationId xmlns:a16="http://schemas.microsoft.com/office/drawing/2014/main" id="{F8CE5244-8ECC-7F62-787F-39C14CCB70A8}"/>
               </a:ext>
             </a:extLst>
           </p:cNvPr>
@@ -14048,7 +12611,7 @@
             <a:fld id="{3445E56A-E3DC-453B-8218-65FD7A4793C7}" type="slidenum">
               <a:rPr lang="es-ES" smtClean="0"/>
               <a:pPr algn="r"/>
-              <a:t>9</a:t>
+              <a:t>8</a:t>
             </a:fld>
             <a:endParaRPr lang="es-ES" dirty="0"/>
           </a:p>
@@ -14059,7 +12622,7 @@
           <p:cNvPr id="6" name="Conector recto 5">
             <a:extLst>
               <a:ext uri="{FF2B5EF4-FFF2-40B4-BE49-F238E27FC236}">
-                <a16:creationId xmlns:a16="http://schemas.microsoft.com/office/drawing/2014/main" id="{32A28680-3058-5733-D14B-C6A1CFC361BE}"/>
+                <a16:creationId xmlns:a16="http://schemas.microsoft.com/office/drawing/2014/main" id="{D5A69C07-E5DC-D0EC-67F1-5E26484CC348}"/>
               </a:ext>
             </a:extLst>
           </p:cNvPr>
@@ -14094,494 +12657,398 @@
       </p:cxnSp>
       <p:pic>
         <p:nvPicPr>
-          <p:cNvPr id="1026" name="Picture 2" descr="Python Logo PNG Transparent Background Images | pngteam.com">
-            <a:extLst>
-              <a:ext uri="{FF2B5EF4-FFF2-40B4-BE49-F238E27FC236}">
-                <a16:creationId xmlns:a16="http://schemas.microsoft.com/office/drawing/2014/main" id="{116F280B-A0A0-068D-B718-387F0A46283B}"/>
+          <p:cNvPr id="7" name="Imagen 6">
+            <a:extLst>
+              <a:ext uri="{FF2B5EF4-FFF2-40B4-BE49-F238E27FC236}">
+                <a16:creationId xmlns:a16="http://schemas.microsoft.com/office/drawing/2014/main" id="{2C8CCB4F-A945-5DFC-D3A2-21AE3FC11C70}"/>
               </a:ext>
             </a:extLst>
           </p:cNvPr>
           <p:cNvPicPr>
-            <a:picLocks noChangeAspect="1" noChangeArrowheads="1"/>
+            <a:picLocks noChangeAspect="1"/>
           </p:cNvPicPr>
           <p:nvPr/>
         </p:nvPicPr>
         <p:blipFill>
-          <a:blip r:embed="rId3">
-            <a:extLst>
-              <a:ext uri="{28A0092B-C50C-407E-A947-70E740481C1C}">
-                <a14:useLocalDpi xmlns:a14="http://schemas.microsoft.com/office/drawing/2010/main" val="0"/>
-              </a:ext>
-            </a:extLst>
-          </a:blip>
-          <a:srcRect/>
+          <a:blip r:embed="rId2"/>
           <a:stretch>
             <a:fillRect/>
           </a:stretch>
         </p:blipFill>
-        <p:spPr bwMode="auto">
-          <a:xfrm>
-            <a:off x="1592120" y="1662208"/>
-            <a:ext cx="960062" cy="960062"/>
+        <p:spPr>
+          <a:xfrm>
+            <a:off x="1094540" y="1847264"/>
+            <a:ext cx="5001460" cy="3776527"/>
           </a:xfrm>
           <a:prstGeom prst="rect">
             <a:avLst/>
           </a:prstGeom>
+        </p:spPr>
+      </p:pic>
+      <p:sp>
+        <p:nvSpPr>
+          <p:cNvPr id="5" name="CuadroTexto 4">
+            <a:extLst>
+              <a:ext uri="{FF2B5EF4-FFF2-40B4-BE49-F238E27FC236}">
+                <a16:creationId xmlns:a16="http://schemas.microsoft.com/office/drawing/2014/main" id="{A4896098-DCDC-C51D-382D-5B3B7C272BCB}"/>
+              </a:ext>
+            </a:extLst>
+          </p:cNvPr>
+          <p:cNvSpPr txBox="1"/>
+          <p:nvPr/>
+        </p:nvSpPr>
+        <p:spPr>
+          <a:xfrm>
+            <a:off x="4370832" y="1315829"/>
+            <a:ext cx="7708392" cy="369332"/>
+          </a:xfrm>
+          <a:prstGeom prst="rect">
+            <a:avLst/>
+          </a:prstGeom>
           <a:noFill/>
+        </p:spPr>
+        <p:txBody>
+          <a:bodyPr wrap="square" rtlCol="0">
+            <a:spAutoFit/>
+          </a:bodyPr>
+          <a:lstStyle/>
+          <a:p>
+            <a:r>
+              <a:rPr lang="es-ES" b="1" u="sng" dirty="0"/>
+              <a:t>GESTIÓN ELECTORAL COMPLETA</a:t>
+            </a:r>
+          </a:p>
+        </p:txBody>
+      </p:sp>
+      <p:sp>
+        <p:nvSpPr>
+          <p:cNvPr id="8" name="CuadroTexto 7">
+            <a:extLst>
+              <a:ext uri="{FF2B5EF4-FFF2-40B4-BE49-F238E27FC236}">
+                <a16:creationId xmlns:a16="http://schemas.microsoft.com/office/drawing/2014/main" id="{9A6B987D-24F5-6E84-ACD9-4FEEF5E3DD34}"/>
+              </a:ext>
+            </a:extLst>
+          </p:cNvPr>
+          <p:cNvSpPr txBox="1"/>
+          <p:nvPr/>
+        </p:nvSpPr>
+        <p:spPr>
+          <a:xfrm>
+            <a:off x="6647688" y="2679748"/>
+            <a:ext cx="5001460" cy="2031325"/>
+          </a:xfrm>
+          <a:prstGeom prst="rect">
+            <a:avLst/>
+          </a:prstGeom>
+          <a:noFill/>
+        </p:spPr>
+        <p:txBody>
+          <a:bodyPr wrap="square" rtlCol="0">
+            <a:spAutoFit/>
+          </a:bodyPr>
+          <a:lstStyle/>
+          <a:p>
+            <a:pPr marL="285750" indent="-285750">
+              <a:buFont typeface="Arial" panose="020B0604020202020204" pitchFamily="34" charset="0"/>
+              <a:buChar char="•"/>
+            </a:pPr>
+            <a:r>
+              <a:rPr lang="es-ES" dirty="0"/>
+              <a:t>Administración de censos</a:t>
+            </a:r>
+          </a:p>
+          <a:p>
+            <a:pPr marL="285750" indent="-285750">
+              <a:buFont typeface="Arial" panose="020B0604020202020204" pitchFamily="34" charset="0"/>
+              <a:buChar char="•"/>
+            </a:pPr>
+            <a:endParaRPr lang="es-ES" dirty="0"/>
+          </a:p>
+          <a:p>
+            <a:pPr marL="285750" indent="-285750">
+              <a:buFont typeface="Arial" panose="020B0604020202020204" pitchFamily="34" charset="0"/>
+              <a:buChar char="•"/>
+            </a:pPr>
+            <a:r>
+              <a:rPr lang="es-ES" dirty="0"/>
+              <a:t>Configuración de votaciones</a:t>
+            </a:r>
+          </a:p>
+          <a:p>
+            <a:pPr marL="285750" indent="-285750">
+              <a:buFont typeface="Arial" panose="020B0604020202020204" pitchFamily="34" charset="0"/>
+              <a:buChar char="•"/>
+            </a:pPr>
+            <a:endParaRPr lang="es-ES" dirty="0"/>
+          </a:p>
+          <a:p>
+            <a:pPr marL="285750" indent="-285750">
+              <a:buFont typeface="Arial" panose="020B0604020202020204" pitchFamily="34" charset="0"/>
+              <a:buChar char="•"/>
+            </a:pPr>
+            <a:r>
+              <a:rPr lang="es-ES" dirty="0"/>
+              <a:t>Gestión de incidencias</a:t>
+            </a:r>
+          </a:p>
+          <a:p>
+            <a:pPr marL="285750" indent="-285750">
+              <a:buFont typeface="Arial" panose="020B0604020202020204" pitchFamily="34" charset="0"/>
+              <a:buChar char="•"/>
+            </a:pPr>
+            <a:endParaRPr lang="es-ES" dirty="0"/>
+          </a:p>
+          <a:p>
+            <a:pPr marL="285750" indent="-285750">
+              <a:buFont typeface="Arial" panose="020B0604020202020204" pitchFamily="34" charset="0"/>
+              <a:buChar char="•"/>
+            </a:pPr>
+            <a:r>
+              <a:rPr lang="es-ES" dirty="0"/>
+              <a:t>Supervisión del proceso</a:t>
+            </a:r>
+          </a:p>
+        </p:txBody>
+      </p:sp>
+    </p:spTree>
+    <p:extLst>
+      <p:ext uri="{BB962C8B-B14F-4D97-AF65-F5344CB8AC3E}">
+        <p14:creationId xmlns:p14="http://schemas.microsoft.com/office/powerpoint/2010/main" val="2624962926"/>
+      </p:ext>
+    </p:extLst>
+  </p:cSld>
+  <p:clrMapOvr>
+    <a:masterClrMapping/>
+  </p:clrMapOvr>
+</p:sld>
+</file>
+
+<file path=ppt/slides/slide9.xml><?xml version="1.0" encoding="utf-8"?>
+<p:sld xmlns:a="http://schemas.openxmlformats.org/drawingml/2006/main" xmlns:r="http://schemas.openxmlformats.org/officeDocument/2006/relationships" xmlns:p="http://schemas.openxmlformats.org/presentationml/2006/main">
+  <p:cSld>
+    <p:spTree>
+      <p:nvGrpSpPr>
+        <p:cNvPr id="1" name="">
           <a:extLst>
-            <a:ext uri="{909E8E84-426E-40DD-AFC4-6F175D3DCCD1}">
-              <a14:hiddenFill xmlns:a14="http://schemas.microsoft.com/office/drawing/2010/main">
-                <a:solidFill>
-                  <a:srgbClr val="FFFFFF"/>
-                </a:solidFill>
-              </a14:hiddenFill>
+            <a:ext uri="{FF2B5EF4-FFF2-40B4-BE49-F238E27FC236}">
+              <a16:creationId xmlns:a16="http://schemas.microsoft.com/office/drawing/2014/main" id="{3FC1A57B-9976-0CD5-E4BC-A91EB082CF66}"/>
             </a:ext>
           </a:extLst>
-        </p:spPr>
-      </p:pic>
-      <p:sp>
-        <p:nvSpPr>
-          <p:cNvPr id="5" name="Rectángulo: esquinas redondeadas 4">
-            <a:extLst>
-              <a:ext uri="{FF2B5EF4-FFF2-40B4-BE49-F238E27FC236}">
-                <a16:creationId xmlns:a16="http://schemas.microsoft.com/office/drawing/2014/main" id="{D6FC1150-A9C7-4E97-8F1D-D12948D37CFA}"/>
-              </a:ext>
-            </a:extLst>
-          </p:cNvPr>
-          <p:cNvSpPr/>
+        </p:cNvPr>
+        <p:cNvGrpSpPr/>
+        <p:nvPr/>
+      </p:nvGrpSpPr>
+      <p:grpSpPr>
+        <a:xfrm>
+          <a:off x="0" y="0"/>
+          <a:ext cx="0" cy="0"/>
+          <a:chOff x="0" y="0"/>
+          <a:chExt cx="0" cy="0"/>
+        </a:xfrm>
+      </p:grpSpPr>
+      <p:sp>
+        <p:nvSpPr>
+          <p:cNvPr id="2" name="Título 1">
+            <a:extLst>
+              <a:ext uri="{FF2B5EF4-FFF2-40B4-BE49-F238E27FC236}">
+                <a16:creationId xmlns:a16="http://schemas.microsoft.com/office/drawing/2014/main" id="{6A8F7A7C-7D9D-648E-3AD3-0327C3C13040}"/>
+              </a:ext>
+            </a:extLst>
+          </p:cNvPr>
+          <p:cNvSpPr>
+            <a:spLocks noGrp="1"/>
+          </p:cNvSpPr>
+          <p:nvPr>
+            <p:ph type="ctrTitle"/>
+          </p:nvPr>
+        </p:nvSpPr>
+        <p:spPr>
+          <a:xfrm>
+            <a:off x="1547091" y="489524"/>
+            <a:ext cx="9097818" cy="609600"/>
+          </a:xfrm>
+          <a:solidFill>
+            <a:srgbClr val="1F4E79"/>
+          </a:solidFill>
+        </p:spPr>
+        <p:txBody>
+          <a:bodyPr>
+            <a:noAutofit/>
+          </a:bodyPr>
+          <a:lstStyle/>
+          <a:p>
+            <a:r>
+              <a:rPr lang="es-ES" sz="4400" dirty="0">
+                <a:solidFill>
+                  <a:schemeClr val="bg1"/>
+                </a:solidFill>
+              </a:rPr>
+              <a:t>RESULTADOS OBTENIDOS</a:t>
+            </a:r>
+          </a:p>
+        </p:txBody>
+      </p:sp>
+      <p:sp>
+        <p:nvSpPr>
+          <p:cNvPr id="3" name="Subtítulo 2">
+            <a:extLst>
+              <a:ext uri="{FF2B5EF4-FFF2-40B4-BE49-F238E27FC236}">
+                <a16:creationId xmlns:a16="http://schemas.microsoft.com/office/drawing/2014/main" id="{7FC253B7-A570-136C-0934-1D4FBEE15448}"/>
+              </a:ext>
+            </a:extLst>
+          </p:cNvPr>
+          <p:cNvSpPr>
+            <a:spLocks noGrp="1"/>
+          </p:cNvSpPr>
+          <p:nvPr>
+            <p:ph type="subTitle" idx="1"/>
+          </p:nvPr>
+        </p:nvSpPr>
+        <p:spPr>
+          <a:xfrm>
+            <a:off x="1477818" y="257128"/>
+            <a:ext cx="9144000" cy="223161"/>
+          </a:xfrm>
+        </p:spPr>
+        <p:txBody>
+          <a:bodyPr>
+            <a:noAutofit/>
+          </a:bodyPr>
+          <a:lstStyle/>
+          <a:p>
+            <a:r>
+              <a:rPr lang="es-ES" sz="1200" dirty="0">
+                <a:latin typeface="Aptos" panose="020B0004020202020204" pitchFamily="34" charset="0"/>
+              </a:rPr>
+              <a:t>TeleVotApp – Sistema de Votación Telemática Certificada</a:t>
+            </a:r>
+          </a:p>
+        </p:txBody>
+      </p:sp>
+      <p:sp>
+        <p:nvSpPr>
+          <p:cNvPr id="4" name="Marcador de pie de página 3">
+            <a:extLst>
+              <a:ext uri="{FF2B5EF4-FFF2-40B4-BE49-F238E27FC236}">
+                <a16:creationId xmlns:a16="http://schemas.microsoft.com/office/drawing/2014/main" id="{1FCAECFE-CB12-3728-2D15-EE1D2C418862}"/>
+              </a:ext>
+            </a:extLst>
+          </p:cNvPr>
+          <p:cNvSpPr>
+            <a:spLocks noGrp="1"/>
+          </p:cNvSpPr>
+          <p:nvPr>
+            <p:ph type="ftr" sz="quarter" idx="11"/>
+          </p:nvPr>
+        </p:nvSpPr>
+        <p:spPr>
+          <a:xfrm>
+            <a:off x="258618" y="6356350"/>
+            <a:ext cx="11582400" cy="365125"/>
+          </a:xfrm>
+          <a:solidFill>
+            <a:schemeClr val="bg1">
+              <a:lumMod val="95000"/>
+            </a:schemeClr>
+          </a:solidFill>
+        </p:spPr>
+        <p:txBody>
+          <a:bodyPr/>
+          <a:lstStyle/>
+          <a:p>
+            <a:pPr algn="r"/>
+            <a:r>
+              <a:rPr lang="es-ES" dirty="0"/>
+              <a:t>       Samir Alonso García  |  TFG Ingeniería informática                                                                                                                                                                                                                                    </a:t>
+            </a:r>
+            <a:fld id="{3445E56A-E3DC-453B-8218-65FD7A4793C7}" type="slidenum">
+              <a:rPr lang="es-ES" smtClean="0"/>
+              <a:pPr algn="r"/>
+              <a:t>9</a:t>
+            </a:fld>
+            <a:endParaRPr lang="es-ES" dirty="0"/>
+          </a:p>
+        </p:txBody>
+      </p:sp>
+      <p:cxnSp>
+        <p:nvCxnSpPr>
+          <p:cNvPr id="6" name="Conector recto 5">
+            <a:extLst>
+              <a:ext uri="{FF2B5EF4-FFF2-40B4-BE49-F238E27FC236}">
+                <a16:creationId xmlns:a16="http://schemas.microsoft.com/office/drawing/2014/main" id="{3D1A3339-8558-E5CD-7798-2150B71AF339}"/>
+              </a:ext>
+            </a:extLst>
+          </p:cNvPr>
+          <p:cNvCxnSpPr>
+            <a:cxnSpLocks/>
+          </p:cNvCxnSpPr>
           <p:nvPr/>
-        </p:nvSpPr>
-        <p:spPr>
-          <a:xfrm>
-            <a:off x="2837226" y="1664265"/>
-            <a:ext cx="2274270" cy="791314"/>
-          </a:xfrm>
-          <a:prstGeom prst="roundRect">
-            <a:avLst/>
-          </a:prstGeom>
-          <a:noFill/>
-          <a:ln w="44450">
-            <a:gradFill flip="none" rotWithShape="1">
-              <a:gsLst>
-                <a:gs pos="0">
-                  <a:schemeClr val="accent1">
-                    <a:lumMod val="0"/>
-                    <a:lumOff val="100000"/>
-                  </a:schemeClr>
-                </a:gs>
-                <a:gs pos="35000">
-                  <a:schemeClr val="accent1">
-                    <a:lumMod val="0"/>
-                    <a:lumOff val="100000"/>
-                  </a:schemeClr>
-                </a:gs>
-                <a:gs pos="100000">
-                  <a:schemeClr val="accent1">
-                    <a:lumMod val="100000"/>
-                  </a:schemeClr>
-                </a:gs>
-              </a:gsLst>
-              <a:path path="circle">
-                <a:fillToRect l="50000" t="-80000" r="50000" b="180000"/>
-              </a:path>
-              <a:tileRect/>
-            </a:gradFill>
-          </a:ln>
+        </p:nvCxnSpPr>
+        <p:spPr>
+          <a:xfrm>
+            <a:off x="0" y="1163776"/>
+            <a:ext cx="12192000" cy="0"/>
+          </a:xfrm>
+          <a:prstGeom prst="line">
+            <a:avLst/>
+          </a:prstGeom>
         </p:spPr>
         <p:style>
-          <a:lnRef idx="2">
-            <a:schemeClr val="accent1">
-              <a:shade val="15000"/>
-            </a:schemeClr>
+          <a:lnRef idx="1">
+            <a:schemeClr val="accent1"/>
           </a:lnRef>
-          <a:fillRef idx="1">
+          <a:fillRef idx="0">
             <a:schemeClr val="accent1"/>
           </a:fillRef>
           <a:effectRef idx="0">
             <a:schemeClr val="accent1"/>
           </a:effectRef>
           <a:fontRef idx="minor">
-            <a:schemeClr val="lt1"/>
+            <a:schemeClr val="tx1"/>
           </a:fontRef>
         </p:style>
-        <p:txBody>
-          <a:bodyPr rtlCol="0" anchor="ctr"/>
-          <a:lstStyle/>
-          <a:p>
-            <a:pPr algn="ctr"/>
-            <a:endParaRPr lang="es-ES"/>
+      </p:cxnSp>
+      <p:sp>
+        <p:nvSpPr>
+          <p:cNvPr id="5" name="CuadroTexto 4">
+            <a:extLst>
+              <a:ext uri="{FF2B5EF4-FFF2-40B4-BE49-F238E27FC236}">
+                <a16:creationId xmlns:a16="http://schemas.microsoft.com/office/drawing/2014/main" id="{3387F61D-3390-09A4-D6E6-F454377C6186}"/>
+              </a:ext>
+            </a:extLst>
+          </p:cNvPr>
+          <p:cNvSpPr txBox="1"/>
+          <p:nvPr/>
+        </p:nvSpPr>
+        <p:spPr>
+          <a:xfrm>
+            <a:off x="4233672" y="1184679"/>
+            <a:ext cx="7708392" cy="369332"/>
+          </a:xfrm>
+          <a:prstGeom prst="rect">
+            <a:avLst/>
+          </a:prstGeom>
+          <a:noFill/>
+        </p:spPr>
+        <p:txBody>
+          <a:bodyPr wrap="square" rtlCol="0">
+            <a:spAutoFit/>
+          </a:bodyPr>
+          <a:lstStyle/>
+          <a:p>
+            <a:r>
+              <a:rPr lang="es-ES" b="1" u="sng" dirty="0"/>
+              <a:t>CONFIGURACIÓN DE LA VOTACIÓN</a:t>
+            </a:r>
           </a:p>
         </p:txBody>
       </p:sp>
       <p:pic>
         <p:nvPicPr>
-          <p:cNvPr id="1028" name="Picture 4" descr="Django Community | Django">
-            <a:extLst>
-              <a:ext uri="{FF2B5EF4-FFF2-40B4-BE49-F238E27FC236}">
-                <a16:creationId xmlns:a16="http://schemas.microsoft.com/office/drawing/2014/main" id="{A2EAD331-470E-427D-1748-CCE33AA8A64D}"/>
-              </a:ext>
-            </a:extLst>
-          </p:cNvPr>
-          <p:cNvPicPr>
-            <a:picLocks noChangeAspect="1" noChangeArrowheads="1"/>
-          </p:cNvPicPr>
-          <p:nvPr/>
-        </p:nvPicPr>
-        <p:blipFill>
-          <a:blip r:embed="rId4">
-            <a:extLst>
-              <a:ext uri="{28A0092B-C50C-407E-A947-70E740481C1C}">
-                <a14:useLocalDpi xmlns:a14="http://schemas.microsoft.com/office/drawing/2010/main" val="0"/>
-              </a:ext>
-            </a:extLst>
-          </a:blip>
-          <a:srcRect/>
-          <a:stretch>
-            <a:fillRect/>
-          </a:stretch>
-        </p:blipFill>
-        <p:spPr bwMode="auto">
-          <a:xfrm>
-            <a:off x="1500389" y="3257463"/>
-            <a:ext cx="1140133" cy="518760"/>
-          </a:xfrm>
-          <a:prstGeom prst="rect">
-            <a:avLst/>
-          </a:prstGeom>
-          <a:noFill/>
-          <a:extLst>
-            <a:ext uri="{909E8E84-426E-40DD-AFC4-6F175D3DCCD1}">
-              <a14:hiddenFill xmlns:a14="http://schemas.microsoft.com/office/drawing/2010/main">
-                <a:solidFill>
-                  <a:srgbClr val="FFFFFF"/>
-                </a:solidFill>
-              </a14:hiddenFill>
-            </a:ext>
-          </a:extLst>
-        </p:spPr>
-      </p:pic>
-      <p:sp>
-        <p:nvSpPr>
-          <p:cNvPr id="7" name="Rectángulo: esquinas redondeadas 6">
-            <a:extLst>
-              <a:ext uri="{FF2B5EF4-FFF2-40B4-BE49-F238E27FC236}">
-                <a16:creationId xmlns:a16="http://schemas.microsoft.com/office/drawing/2014/main" id="{BABA0A59-518D-3251-ABD9-A2C25F52FA94}"/>
-              </a:ext>
-            </a:extLst>
-          </p:cNvPr>
-          <p:cNvSpPr/>
-          <p:nvPr/>
-        </p:nvSpPr>
-        <p:spPr>
-          <a:xfrm>
-            <a:off x="2837226" y="3134640"/>
-            <a:ext cx="2274270" cy="791314"/>
-          </a:xfrm>
-          <a:prstGeom prst="roundRect">
-            <a:avLst/>
-          </a:prstGeom>
-          <a:noFill/>
-          <a:ln w="44450">
-            <a:gradFill flip="none" rotWithShape="1">
-              <a:gsLst>
-                <a:gs pos="0">
-                  <a:schemeClr val="accent1">
-                    <a:lumMod val="0"/>
-                    <a:lumOff val="100000"/>
-                  </a:schemeClr>
-                </a:gs>
-                <a:gs pos="35000">
-                  <a:schemeClr val="accent1">
-                    <a:lumMod val="0"/>
-                    <a:lumOff val="100000"/>
-                  </a:schemeClr>
-                </a:gs>
-                <a:gs pos="100000">
-                  <a:schemeClr val="accent1">
-                    <a:lumMod val="100000"/>
-                  </a:schemeClr>
-                </a:gs>
-              </a:gsLst>
-              <a:path path="circle">
-                <a:fillToRect l="50000" t="-80000" r="50000" b="180000"/>
-              </a:path>
-              <a:tileRect/>
-            </a:gradFill>
-          </a:ln>
-        </p:spPr>
-        <p:style>
-          <a:lnRef idx="2">
-            <a:schemeClr val="accent1">
-              <a:shade val="15000"/>
-            </a:schemeClr>
-          </a:lnRef>
-          <a:fillRef idx="1">
-            <a:schemeClr val="accent1"/>
-          </a:fillRef>
-          <a:effectRef idx="0">
-            <a:schemeClr val="accent1"/>
-          </a:effectRef>
-          <a:fontRef idx="minor">
-            <a:schemeClr val="lt1"/>
-          </a:fontRef>
-        </p:style>
-        <p:txBody>
-          <a:bodyPr rtlCol="0" anchor="ctr"/>
-          <a:lstStyle/>
-          <a:p>
-            <a:pPr algn="ctr"/>
-            <a:endParaRPr lang="es-ES"/>
-          </a:p>
-        </p:txBody>
-      </p:sp>
-      <p:pic>
-        <p:nvPicPr>
-          <p:cNvPr id="1030" name="Picture 6" descr="Bootstrap Logo PNG Vector (EPS) Free Download">
-            <a:extLst>
-              <a:ext uri="{FF2B5EF4-FFF2-40B4-BE49-F238E27FC236}">
-                <a16:creationId xmlns:a16="http://schemas.microsoft.com/office/drawing/2014/main" id="{4B7EDCFA-A621-DA57-3199-B1FAA2FA7624}"/>
-              </a:ext>
-            </a:extLst>
-          </p:cNvPr>
-          <p:cNvPicPr>
-            <a:picLocks noChangeAspect="1" noChangeArrowheads="1"/>
-          </p:cNvPicPr>
-          <p:nvPr/>
-        </p:nvPicPr>
-        <p:blipFill>
-          <a:blip r:embed="rId5">
-            <a:extLst>
-              <a:ext uri="{28A0092B-C50C-407E-A947-70E740481C1C}">
-                <a14:useLocalDpi xmlns:a14="http://schemas.microsoft.com/office/drawing/2010/main" val="0"/>
-              </a:ext>
-            </a:extLst>
-          </a:blip>
-          <a:srcRect/>
-          <a:stretch>
-            <a:fillRect/>
-          </a:stretch>
-        </p:blipFill>
-        <p:spPr bwMode="auto">
-          <a:xfrm>
-            <a:off x="1436671" y="4261119"/>
-            <a:ext cx="1273473" cy="1273473"/>
-          </a:xfrm>
-          <a:prstGeom prst="rect">
-            <a:avLst/>
-          </a:prstGeom>
-          <a:noFill/>
-          <a:extLst>
-            <a:ext uri="{909E8E84-426E-40DD-AFC4-6F175D3DCCD1}">
-              <a14:hiddenFill xmlns:a14="http://schemas.microsoft.com/office/drawing/2010/main">
-                <a:solidFill>
-                  <a:srgbClr val="FFFFFF"/>
-                </a:solidFill>
-              </a14:hiddenFill>
-            </a:ext>
-          </a:extLst>
-        </p:spPr>
-      </p:pic>
-      <p:sp>
-        <p:nvSpPr>
-          <p:cNvPr id="8" name="Rectángulo: esquinas redondeadas 7">
-            <a:extLst>
-              <a:ext uri="{FF2B5EF4-FFF2-40B4-BE49-F238E27FC236}">
-                <a16:creationId xmlns:a16="http://schemas.microsoft.com/office/drawing/2014/main" id="{DA4373DD-6253-2B35-9EE3-5A1ADE53E1DB}"/>
-              </a:ext>
-            </a:extLst>
-          </p:cNvPr>
-          <p:cNvSpPr/>
-          <p:nvPr/>
-        </p:nvSpPr>
-        <p:spPr>
-          <a:xfrm>
-            <a:off x="2837226" y="4502198"/>
-            <a:ext cx="2274270" cy="791314"/>
-          </a:xfrm>
-          <a:prstGeom prst="roundRect">
-            <a:avLst/>
-          </a:prstGeom>
-          <a:noFill/>
-          <a:ln w="44450">
-            <a:gradFill flip="none" rotWithShape="1">
-              <a:gsLst>
-                <a:gs pos="0">
-                  <a:schemeClr val="accent1">
-                    <a:lumMod val="0"/>
-                    <a:lumOff val="100000"/>
-                  </a:schemeClr>
-                </a:gs>
-                <a:gs pos="35000">
-                  <a:schemeClr val="accent1">
-                    <a:lumMod val="0"/>
-                    <a:lumOff val="100000"/>
-                  </a:schemeClr>
-                </a:gs>
-                <a:gs pos="100000">
-                  <a:schemeClr val="accent1">
-                    <a:lumMod val="100000"/>
-                  </a:schemeClr>
-                </a:gs>
-              </a:gsLst>
-              <a:path path="circle">
-                <a:fillToRect l="50000" t="-80000" r="50000" b="180000"/>
-              </a:path>
-              <a:tileRect/>
-            </a:gradFill>
-          </a:ln>
-        </p:spPr>
-        <p:style>
-          <a:lnRef idx="2">
-            <a:schemeClr val="accent1">
-              <a:shade val="15000"/>
-            </a:schemeClr>
-          </a:lnRef>
-          <a:fillRef idx="1">
-            <a:schemeClr val="accent1"/>
-          </a:fillRef>
-          <a:effectRef idx="0">
-            <a:schemeClr val="accent1"/>
-          </a:effectRef>
-          <a:fontRef idx="minor">
-            <a:schemeClr val="lt1"/>
-          </a:fontRef>
-        </p:style>
-        <p:txBody>
-          <a:bodyPr rtlCol="0" anchor="ctr"/>
-          <a:lstStyle/>
-          <a:p>
-            <a:pPr algn="ctr"/>
-            <a:endParaRPr lang="es-ES"/>
-          </a:p>
-        </p:txBody>
-      </p:sp>
-      <p:pic>
-        <p:nvPicPr>
-          <p:cNvPr id="1032" name="Picture 8" descr="PostgreSQL — Fedora Developer Portal">
-            <a:extLst>
-              <a:ext uri="{FF2B5EF4-FFF2-40B4-BE49-F238E27FC236}">
-                <a16:creationId xmlns:a16="http://schemas.microsoft.com/office/drawing/2014/main" id="{6193CF88-9FCD-C72C-F39C-2C790902762A}"/>
-              </a:ext>
-            </a:extLst>
-          </p:cNvPr>
-          <p:cNvPicPr>
-            <a:picLocks noChangeAspect="1" noChangeArrowheads="1"/>
-          </p:cNvPicPr>
-          <p:nvPr/>
-        </p:nvPicPr>
-        <p:blipFill>
-          <a:blip r:embed="rId6">
-            <a:extLst>
-              <a:ext uri="{28A0092B-C50C-407E-A947-70E740481C1C}">
-                <a14:useLocalDpi xmlns:a14="http://schemas.microsoft.com/office/drawing/2010/main" val="0"/>
-              </a:ext>
-            </a:extLst>
-          </a:blip>
-          <a:srcRect/>
-          <a:stretch>
-            <a:fillRect/>
-          </a:stretch>
-        </p:blipFill>
-        <p:spPr bwMode="auto">
-          <a:xfrm>
-            <a:off x="6385560" y="1602721"/>
-            <a:ext cx="1093937" cy="1093937"/>
-          </a:xfrm>
-          <a:prstGeom prst="rect">
-            <a:avLst/>
-          </a:prstGeom>
-          <a:noFill/>
-          <a:extLst>
-            <a:ext uri="{909E8E84-426E-40DD-AFC4-6F175D3DCCD1}">
-              <a14:hiddenFill xmlns:a14="http://schemas.microsoft.com/office/drawing/2010/main">
-                <a:solidFill>
-                  <a:srgbClr val="FFFFFF"/>
-                </a:solidFill>
-              </a14:hiddenFill>
-            </a:ext>
-          </a:extLst>
-        </p:spPr>
-      </p:pic>
-      <p:sp>
-        <p:nvSpPr>
-          <p:cNvPr id="9" name="Rectángulo: esquinas redondeadas 8">
-            <a:extLst>
-              <a:ext uri="{FF2B5EF4-FFF2-40B4-BE49-F238E27FC236}">
-                <a16:creationId xmlns:a16="http://schemas.microsoft.com/office/drawing/2014/main" id="{28FB576E-CE74-7FA4-B5E7-E158D430E75A}"/>
-              </a:ext>
-            </a:extLst>
-          </p:cNvPr>
-          <p:cNvSpPr/>
-          <p:nvPr/>
-        </p:nvSpPr>
-        <p:spPr>
-          <a:xfrm>
-            <a:off x="7626096" y="1662208"/>
-            <a:ext cx="2274270" cy="791314"/>
-          </a:xfrm>
-          <a:prstGeom prst="roundRect">
-            <a:avLst/>
-          </a:prstGeom>
-          <a:noFill/>
-          <a:ln w="44450">
-            <a:gradFill flip="none" rotWithShape="1">
-              <a:gsLst>
-                <a:gs pos="0">
-                  <a:schemeClr val="accent1">
-                    <a:lumMod val="0"/>
-                    <a:lumOff val="100000"/>
-                  </a:schemeClr>
-                </a:gs>
-                <a:gs pos="35000">
-                  <a:schemeClr val="accent1">
-                    <a:lumMod val="0"/>
-                    <a:lumOff val="100000"/>
-                  </a:schemeClr>
-                </a:gs>
-                <a:gs pos="100000">
-                  <a:schemeClr val="accent1">
-                    <a:lumMod val="100000"/>
-                  </a:schemeClr>
-                </a:gs>
-              </a:gsLst>
-              <a:path path="circle">
-                <a:fillToRect l="50000" t="-80000" r="50000" b="180000"/>
-              </a:path>
-              <a:tileRect/>
-            </a:gradFill>
-          </a:ln>
-        </p:spPr>
-        <p:style>
-          <a:lnRef idx="2">
-            <a:schemeClr val="accent1">
-              <a:shade val="15000"/>
-            </a:schemeClr>
-          </a:lnRef>
-          <a:fillRef idx="1">
-            <a:schemeClr val="accent1"/>
-          </a:fillRef>
-          <a:effectRef idx="0">
-            <a:schemeClr val="accent1"/>
-          </a:effectRef>
-          <a:fontRef idx="minor">
-            <a:schemeClr val="lt1"/>
-          </a:fontRef>
-        </p:style>
-        <p:txBody>
-          <a:bodyPr rtlCol="0" anchor="ctr"/>
-          <a:lstStyle/>
-          <a:p>
-            <a:pPr algn="ctr"/>
-            <a:endParaRPr lang="es-ES"/>
-          </a:p>
-        </p:txBody>
-      </p:sp>
-      <p:pic>
-        <p:nvPicPr>
-          <p:cNvPr id="11" name="Gráfico 10" descr="Rollo de diplomas contorno">
-            <a:extLst>
-              <a:ext uri="{FF2B5EF4-FFF2-40B4-BE49-F238E27FC236}">
-                <a16:creationId xmlns:a16="http://schemas.microsoft.com/office/drawing/2014/main" id="{1EF4DB79-2A87-F4A5-A7ED-CF5CDF8FD8F6}"/>
+          <p:cNvPr id="8" name="Imagen 7">
+            <a:extLst>
+              <a:ext uri="{FF2B5EF4-FFF2-40B4-BE49-F238E27FC236}">
+                <a16:creationId xmlns:a16="http://schemas.microsoft.com/office/drawing/2014/main" id="{7A09DBED-27F6-41F4-F011-74663529C6E2}"/>
               </a:ext>
             </a:extLst>
           </p:cNvPr>
@@ -14591,107 +13058,87 @@
           <p:nvPr/>
         </p:nvPicPr>
         <p:blipFill>
-          <a:blip>
-            <a:extLst>
-              <a:ext uri="{96DAC541-7B7A-43D3-8B79-37D633B846F1}">
-                <asvg:svgBlip xmlns:asvg="http://schemas.microsoft.com/office/drawing/2016/SVG/main" r:embed="rId7"/>
-              </a:ext>
-            </a:extLst>
-          </a:blip>
+          <a:blip r:embed="rId3"/>
           <a:stretch>
             <a:fillRect/>
           </a:stretch>
         </p:blipFill>
         <p:spPr>
           <a:xfrm>
-            <a:off x="6491945" y="3059643"/>
-            <a:ext cx="914400" cy="914400"/>
+            <a:off x="329534" y="1685161"/>
+            <a:ext cx="4370482" cy="3293483"/>
           </a:xfrm>
           <a:prstGeom prst="rect">
             <a:avLst/>
           </a:prstGeom>
         </p:spPr>
       </p:pic>
-      <p:sp>
-        <p:nvSpPr>
-          <p:cNvPr id="12" name="Rectángulo: esquinas redondeadas 11">
-            <a:extLst>
-              <a:ext uri="{FF2B5EF4-FFF2-40B4-BE49-F238E27FC236}">
-                <a16:creationId xmlns:a16="http://schemas.microsoft.com/office/drawing/2014/main" id="{0BC66794-3054-F238-C632-6356FAE3D174}"/>
-              </a:ext>
-            </a:extLst>
-          </p:cNvPr>
-          <p:cNvSpPr/>
+      <p:pic>
+        <p:nvPicPr>
+          <p:cNvPr id="10" name="Imagen 9">
+            <a:extLst>
+              <a:ext uri="{FF2B5EF4-FFF2-40B4-BE49-F238E27FC236}">
+                <a16:creationId xmlns:a16="http://schemas.microsoft.com/office/drawing/2014/main" id="{944DC394-B4DF-AFEF-223D-FB8D4A26C38F}"/>
+              </a:ext>
+            </a:extLst>
+          </p:cNvPr>
+          <p:cNvPicPr>
+            <a:picLocks noChangeAspect="1"/>
+          </p:cNvPicPr>
           <p:nvPr/>
-        </p:nvSpPr>
-        <p:spPr>
-          <a:xfrm>
-            <a:off x="7626096" y="3087468"/>
-            <a:ext cx="2274270" cy="791314"/>
-          </a:xfrm>
-          <a:prstGeom prst="roundRect">
-            <a:avLst/>
-          </a:prstGeom>
-          <a:noFill/>
-          <a:ln w="44450">
-            <a:gradFill flip="none" rotWithShape="1">
-              <a:gsLst>
-                <a:gs pos="0">
-                  <a:schemeClr val="accent1">
-                    <a:lumMod val="0"/>
-                    <a:lumOff val="100000"/>
-                  </a:schemeClr>
-                </a:gs>
-                <a:gs pos="35000">
-                  <a:schemeClr val="accent1">
-                    <a:lumMod val="0"/>
-                    <a:lumOff val="100000"/>
-                  </a:schemeClr>
-                </a:gs>
-                <a:gs pos="100000">
-                  <a:schemeClr val="accent1">
-                    <a:lumMod val="100000"/>
-                  </a:schemeClr>
-                </a:gs>
-              </a:gsLst>
-              <a:path path="circle">
-                <a:fillToRect l="50000" t="-80000" r="50000" b="180000"/>
-              </a:path>
-              <a:tileRect/>
-            </a:gradFill>
-          </a:ln>
-        </p:spPr>
-        <p:style>
-          <a:lnRef idx="2">
-            <a:schemeClr val="accent1">
-              <a:shade val="15000"/>
-            </a:schemeClr>
-          </a:lnRef>
-          <a:fillRef idx="1">
-            <a:schemeClr val="accent1"/>
-          </a:fillRef>
-          <a:effectRef idx="0">
-            <a:schemeClr val="accent1"/>
-          </a:effectRef>
-          <a:fontRef idx="minor">
-            <a:schemeClr val="lt1"/>
-          </a:fontRef>
-        </p:style>
-        <p:txBody>
-          <a:bodyPr rtlCol="0" anchor="ctr"/>
-          <a:lstStyle/>
-          <a:p>
-            <a:pPr algn="ctr"/>
-            <a:endParaRPr lang="es-ES"/>
-          </a:p>
-        </p:txBody>
-      </p:sp>
-      <p:sp>
-        <p:nvSpPr>
-          <p:cNvPr id="13" name="CuadroTexto 12">
-            <a:extLst>
-              <a:ext uri="{FF2B5EF4-FFF2-40B4-BE49-F238E27FC236}">
-                <a16:creationId xmlns:a16="http://schemas.microsoft.com/office/drawing/2014/main" id="{33CA9F0F-5213-4C59-373E-37F8293BEFA9}"/>
+        </p:nvPicPr>
+        <p:blipFill>
+          <a:blip r:embed="rId4"/>
+          <a:stretch>
+            <a:fillRect/>
+          </a:stretch>
+        </p:blipFill>
+        <p:spPr>
+          <a:xfrm>
+            <a:off x="7843081" y="1308823"/>
+            <a:ext cx="3922671" cy="2648200"/>
+          </a:xfrm>
+          <a:prstGeom prst="rect">
+            <a:avLst/>
+          </a:prstGeom>
+        </p:spPr>
+      </p:pic>
+      <p:pic>
+        <p:nvPicPr>
+          <p:cNvPr id="12" name="Imagen 11">
+            <a:extLst>
+              <a:ext uri="{FF2B5EF4-FFF2-40B4-BE49-F238E27FC236}">
+                <a16:creationId xmlns:a16="http://schemas.microsoft.com/office/drawing/2014/main" id="{3C2D88BA-DE13-2EFA-D2AA-4C2562DD9260}"/>
+              </a:ext>
+            </a:extLst>
+          </p:cNvPr>
+          <p:cNvPicPr>
+            <a:picLocks noChangeAspect="1"/>
+          </p:cNvPicPr>
+          <p:nvPr/>
+        </p:nvPicPr>
+        <p:blipFill>
+          <a:blip r:embed="rId5"/>
+          <a:stretch>
+            <a:fillRect/>
+          </a:stretch>
+        </p:blipFill>
+        <p:spPr>
+          <a:xfrm>
+            <a:off x="9729151" y="3914967"/>
+            <a:ext cx="2036601" cy="2310233"/>
+          </a:xfrm>
+          <a:prstGeom prst="rect">
+            <a:avLst/>
+          </a:prstGeom>
+        </p:spPr>
+      </p:pic>
+      <p:sp>
+        <p:nvSpPr>
+          <p:cNvPr id="14" name="CuadroTexto 13">
+            <a:extLst>
+              <a:ext uri="{FF2B5EF4-FFF2-40B4-BE49-F238E27FC236}">
+                <a16:creationId xmlns:a16="http://schemas.microsoft.com/office/drawing/2014/main" id="{17E5B7D4-0F14-40C5-59E5-04352784E88B}"/>
               </a:ext>
             </a:extLst>
           </p:cNvPr>
@@ -14700,8 +13147,8 @@
         </p:nvSpPr>
         <p:spPr>
           <a:xfrm>
-            <a:off x="2837226" y="1728216"/>
-            <a:ext cx="2274270" cy="646331"/>
+            <a:off x="5383365" y="4403327"/>
+            <a:ext cx="4745736" cy="1384995"/>
           </a:xfrm>
           <a:prstGeom prst="rect">
             <a:avLst/>
@@ -14714,197 +13161,80 @@
           </a:bodyPr>
           <a:lstStyle/>
           <a:p>
-            <a:pPr algn="ctr"/>
-            <a:r>
-              <a:rPr lang="es-ES" u="sng" dirty="0"/>
-              <a:t>Python</a:t>
-            </a:r>
-          </a:p>
-          <a:p>
-            <a:pPr algn="ctr"/>
-            <a:r>
-              <a:rPr lang="es-ES" dirty="0"/>
-              <a:t>Lenguaje principal</a:t>
-            </a:r>
-          </a:p>
-        </p:txBody>
-      </p:sp>
-      <p:sp>
-        <p:nvSpPr>
-          <p:cNvPr id="14" name="CuadroTexto 13">
-            <a:extLst>
-              <a:ext uri="{FF2B5EF4-FFF2-40B4-BE49-F238E27FC236}">
-                <a16:creationId xmlns:a16="http://schemas.microsoft.com/office/drawing/2014/main" id="{684B852D-604F-09AF-E8B3-190D98A5565E}"/>
-              </a:ext>
-            </a:extLst>
-          </p:cNvPr>
-          <p:cNvSpPr txBox="1"/>
-          <p:nvPr/>
-        </p:nvSpPr>
-        <p:spPr>
-          <a:xfrm>
-            <a:off x="2837226" y="3257463"/>
-            <a:ext cx="2274270" cy="646331"/>
-          </a:xfrm>
-          <a:prstGeom prst="rect">
-            <a:avLst/>
-          </a:prstGeom>
-          <a:noFill/>
-        </p:spPr>
-        <p:txBody>
-          <a:bodyPr wrap="square" rtlCol="0">
-            <a:spAutoFit/>
-          </a:bodyPr>
-          <a:lstStyle/>
-          <a:p>
-            <a:pPr algn="ctr"/>
-            <a:r>
-              <a:rPr lang="es-ES" u="sng" dirty="0"/>
-              <a:t>Django</a:t>
-            </a:r>
-          </a:p>
-          <a:p>
-            <a:pPr algn="ctr"/>
-            <a:r>
-              <a:rPr lang="es-ES" dirty="0"/>
-              <a:t>Framework web</a:t>
-            </a:r>
-          </a:p>
-        </p:txBody>
-      </p:sp>
-      <p:sp>
-        <p:nvSpPr>
-          <p:cNvPr id="15" name="CuadroTexto 14">
-            <a:extLst>
-              <a:ext uri="{FF2B5EF4-FFF2-40B4-BE49-F238E27FC236}">
-                <a16:creationId xmlns:a16="http://schemas.microsoft.com/office/drawing/2014/main" id="{C988ACC9-990A-B5E2-D608-D7CEFE340BAC}"/>
-              </a:ext>
-            </a:extLst>
-          </p:cNvPr>
-          <p:cNvSpPr txBox="1"/>
-          <p:nvPr/>
-        </p:nvSpPr>
-        <p:spPr>
-          <a:xfrm>
-            <a:off x="2837226" y="4572000"/>
-            <a:ext cx="2274270" cy="646331"/>
-          </a:xfrm>
-          <a:prstGeom prst="rect">
-            <a:avLst/>
-          </a:prstGeom>
-          <a:noFill/>
-        </p:spPr>
-        <p:txBody>
-          <a:bodyPr wrap="square" rtlCol="0">
-            <a:spAutoFit/>
-          </a:bodyPr>
-          <a:lstStyle/>
-          <a:p>
-            <a:pPr algn="ctr"/>
-            <a:r>
-              <a:rPr lang="es-ES" u="sng" dirty="0"/>
-              <a:t>Bootstrap</a:t>
-            </a:r>
-          </a:p>
-          <a:p>
-            <a:pPr algn="ctr"/>
-            <a:r>
-              <a:rPr lang="es-ES" dirty="0"/>
-              <a:t>HTML | CSS | JS</a:t>
-            </a:r>
-          </a:p>
-        </p:txBody>
-      </p:sp>
-      <p:sp>
-        <p:nvSpPr>
-          <p:cNvPr id="16" name="CuadroTexto 15">
-            <a:extLst>
-              <a:ext uri="{FF2B5EF4-FFF2-40B4-BE49-F238E27FC236}">
-                <a16:creationId xmlns:a16="http://schemas.microsoft.com/office/drawing/2014/main" id="{35BE79C1-226D-010E-E790-02226AC53E04}"/>
-              </a:ext>
-            </a:extLst>
-          </p:cNvPr>
-          <p:cNvSpPr txBox="1"/>
-          <p:nvPr/>
-        </p:nvSpPr>
-        <p:spPr>
-          <a:xfrm>
-            <a:off x="7626096" y="1719072"/>
-            <a:ext cx="2274270" cy="646331"/>
-          </a:xfrm>
-          <a:prstGeom prst="rect">
-            <a:avLst/>
-          </a:prstGeom>
-          <a:noFill/>
-        </p:spPr>
-        <p:txBody>
-          <a:bodyPr wrap="square" rtlCol="0">
-            <a:spAutoFit/>
-          </a:bodyPr>
-          <a:lstStyle/>
-          <a:p>
-            <a:pPr algn="ctr"/>
-            <a:r>
-              <a:rPr lang="es-ES" u="sng" dirty="0"/>
-              <a:t>PostgreSQL</a:t>
-            </a:r>
-          </a:p>
-          <a:p>
-            <a:pPr algn="ctr"/>
-            <a:r>
-              <a:rPr lang="es-ES" dirty="0"/>
-              <a:t>Motor de BD</a:t>
-            </a:r>
-          </a:p>
-        </p:txBody>
-      </p:sp>
-      <p:sp>
-        <p:nvSpPr>
-          <p:cNvPr id="17" name="CuadroTexto 16">
-            <a:extLst>
-              <a:ext uri="{FF2B5EF4-FFF2-40B4-BE49-F238E27FC236}">
-                <a16:creationId xmlns:a16="http://schemas.microsoft.com/office/drawing/2014/main" id="{C897A921-0908-B6E4-14B8-C24D299F1204}"/>
-              </a:ext>
-            </a:extLst>
-          </p:cNvPr>
-          <p:cNvSpPr txBox="1"/>
-          <p:nvPr/>
-        </p:nvSpPr>
-        <p:spPr>
-          <a:xfrm>
-            <a:off x="7626096" y="3166023"/>
-            <a:ext cx="2274270" cy="646331"/>
-          </a:xfrm>
-          <a:prstGeom prst="rect">
-            <a:avLst/>
-          </a:prstGeom>
-          <a:noFill/>
-        </p:spPr>
-        <p:txBody>
-          <a:bodyPr wrap="square" rtlCol="0">
-            <a:spAutoFit/>
-          </a:bodyPr>
-          <a:lstStyle/>
-          <a:p>
-            <a:pPr algn="ctr"/>
-            <a:r>
-              <a:rPr lang="es-ES" u="sng" dirty="0"/>
-              <a:t>X.509</a:t>
-            </a:r>
-          </a:p>
-          <a:p>
-            <a:pPr algn="ctr"/>
-            <a:r>
-              <a:rPr lang="es-ES" dirty="0"/>
-              <a:t>Firma y Validación</a:t>
-            </a:r>
+            <a:pPr marL="285750" indent="-285750">
+              <a:buFont typeface="Arial" panose="020B0604020202020204" pitchFamily="34" charset="0"/>
+              <a:buChar char="•"/>
+            </a:pPr>
+            <a:r>
+              <a:rPr lang="es-ES" sz="1400" dirty="0">
+                <a:latin typeface="Aptos" panose="020B0004020202020204" pitchFamily="34" charset="0"/>
+              </a:rPr>
+              <a:t>Configuración del calendario electoral</a:t>
+            </a:r>
+          </a:p>
+          <a:p>
+            <a:pPr marL="285750" indent="-285750">
+              <a:buFont typeface="Arial" panose="020B0604020202020204" pitchFamily="34" charset="0"/>
+              <a:buChar char="•"/>
+            </a:pPr>
+            <a:r>
+              <a:rPr lang="es-ES" sz="1400" dirty="0">
+                <a:latin typeface="Aptos" panose="020B0004020202020204" pitchFamily="34" charset="0"/>
+              </a:rPr>
+              <a:t>Asociación de censos y participantes</a:t>
+            </a:r>
+          </a:p>
+          <a:p>
+            <a:pPr marL="285750" indent="-285750">
+              <a:buFont typeface="Arial" panose="020B0604020202020204" pitchFamily="34" charset="0"/>
+              <a:buChar char="•"/>
+            </a:pPr>
+            <a:r>
+              <a:rPr lang="es-ES" sz="1400" dirty="0">
+                <a:latin typeface="Aptos" panose="020B0004020202020204" pitchFamily="34" charset="0"/>
+              </a:rPr>
+              <a:t>Creación y gestión de candidaturas</a:t>
+            </a:r>
+          </a:p>
+          <a:p>
+            <a:pPr marL="285750" indent="-285750">
+              <a:buFont typeface="Arial" panose="020B0604020202020204" pitchFamily="34" charset="0"/>
+              <a:buChar char="•"/>
+            </a:pPr>
+            <a:r>
+              <a:rPr lang="es-ES" sz="1400" dirty="0">
+                <a:latin typeface="Aptos" panose="020B0004020202020204" pitchFamily="34" charset="0"/>
+              </a:rPr>
+              <a:t>Asignación del director de campaña</a:t>
+            </a:r>
+          </a:p>
+          <a:p>
+            <a:pPr marL="285750" indent="-285750">
+              <a:buFont typeface="Arial" panose="020B0604020202020204" pitchFamily="34" charset="0"/>
+              <a:buChar char="•"/>
+            </a:pPr>
+            <a:r>
+              <a:rPr lang="es-ES" sz="1400" dirty="0">
+                <a:latin typeface="Aptos" panose="020B0004020202020204" pitchFamily="34" charset="0"/>
+              </a:rPr>
+              <a:t>Activación y control de la votación</a:t>
+            </a:r>
+          </a:p>
+          <a:p>
+            <a:pPr marL="285750" indent="-285750">
+              <a:buFont typeface="Arial" panose="020B0604020202020204" pitchFamily="34" charset="0"/>
+              <a:buChar char="•"/>
+            </a:pPr>
+            <a:endParaRPr lang="es-ES" sz="1400" dirty="0">
+              <a:latin typeface="Aptos" panose="020B0004020202020204" pitchFamily="34" charset="0"/>
+            </a:endParaRPr>
           </a:p>
         </p:txBody>
       </p:sp>
     </p:spTree>
     <p:extLst>
       <p:ext uri="{BB962C8B-B14F-4D97-AF65-F5344CB8AC3E}">
-        <p14:creationId xmlns:p14="http://schemas.microsoft.com/office/powerpoint/2010/main" val="460483278"/>
+        <p14:creationId xmlns:p14="http://schemas.microsoft.com/office/powerpoint/2010/main" val="1013677796"/>
       </p:ext>
     </p:extLst>
   </p:cSld>
